--- a/docs/report/midyear-evalutaion-presentation.pptx
+++ b/docs/report/midyear-evalutaion-presentation.pptx
@@ -5,30 +5,31 @@
     <p:sldMasterId id="2147483660" r:id="rId4"/>
   </p:sldMasterIdLst>
   <p:notesMasterIdLst>
-    <p:notesMasterId r:id="rId23"/>
+    <p:notesMasterId r:id="rId24"/>
   </p:notesMasterIdLst>
   <p:handoutMasterIdLst>
-    <p:handoutMasterId r:id="rId24"/>
+    <p:handoutMasterId r:id="rId25"/>
   </p:handoutMasterIdLst>
   <p:sldIdLst>
     <p:sldId id="257" r:id="rId5"/>
     <p:sldId id="268" r:id="rId6"/>
     <p:sldId id="273" r:id="rId7"/>
-    <p:sldId id="275" r:id="rId8"/>
-    <p:sldId id="276" r:id="rId9"/>
-    <p:sldId id="277" r:id="rId10"/>
-    <p:sldId id="281" r:id="rId11"/>
-    <p:sldId id="282" r:id="rId12"/>
-    <p:sldId id="283" r:id="rId13"/>
-    <p:sldId id="284" r:id="rId14"/>
-    <p:sldId id="285" r:id="rId15"/>
-    <p:sldId id="286" r:id="rId16"/>
-    <p:sldId id="287" r:id="rId17"/>
-    <p:sldId id="288" r:id="rId18"/>
-    <p:sldId id="289" r:id="rId19"/>
-    <p:sldId id="278" r:id="rId20"/>
-    <p:sldId id="279" r:id="rId21"/>
-    <p:sldId id="280" r:id="rId22"/>
+    <p:sldId id="276" r:id="rId8"/>
+    <p:sldId id="275" r:id="rId9"/>
+    <p:sldId id="293" r:id="rId10"/>
+    <p:sldId id="282" r:id="rId11"/>
+    <p:sldId id="283" r:id="rId12"/>
+    <p:sldId id="284" r:id="rId13"/>
+    <p:sldId id="285" r:id="rId14"/>
+    <p:sldId id="286" r:id="rId15"/>
+    <p:sldId id="287" r:id="rId16"/>
+    <p:sldId id="288" r:id="rId17"/>
+    <p:sldId id="289" r:id="rId18"/>
+    <p:sldId id="291" r:id="rId19"/>
+    <p:sldId id="292" r:id="rId20"/>
+    <p:sldId id="278" r:id="rId21"/>
+    <p:sldId id="279" r:id="rId22"/>
+    <p:sldId id="280" r:id="rId23"/>
   </p:sldIdLst>
   <p:sldSz cx="12188825" cy="6858000"/>
   <p:notesSz cx="6858000" cy="9144000"/>
@@ -242,7 +243,7 @@
           <a:p>
             <a:fld id="{FE5B4EDC-59C0-49C7-8ADA-5A781B329E02}" type="datetimeFigureOut">
               <a:rPr lang="en-US"/>
-              <a:t>6/16/2026</a:t>
+              <a:t>6/17/2026</a:t>
             </a:fld>
             <a:endParaRPr/>
           </a:p>
@@ -322,6 +323,7 @@
     </p:extLst>
   </p:cSld>
   <p:clrMap bg1="lt1" tx1="dk1" bg2="lt2" tx2="dk2" accent1="accent1" accent2="accent2" accent3="accent3" accent4="accent4" accent5="accent5" accent6="accent6" hlink="hlink" folHlink="folHlink"/>
+  <p:hf sldNum="0" ftr="0" dt="0"/>
 </p:handoutMaster>
 </file>
 
@@ -513,7 +515,7 @@
           <inkml:channelProperty channel="Y" name="resolution" value="1000" units="1/cm"/>
         </inkml:channelProperties>
       </inkml:inkSource>
-      <inkml:timestamp xml:id="ts0" timeString="2026-06-15T23:04:30.666"/>
+      <inkml:timestamp xml:id="ts0" timeString="2026-06-16T21:00:13.451"/>
     </inkml:context>
     <inkml:brush xml:id="br0">
       <inkml:brushProperty name="width" value="0.3" units="cm"/>
@@ -524,7 +526,7 @@
       <inkml:brushProperty name="ignorePressure" value="1"/>
     </inkml:brush>
   </inkml:definitions>
-  <inkml:trace contextRef="#ctx0" brushRef="#br0">1 28,'45'0,"9"1,-1-3,81-11,-72 5,-1 3,124 6,-66 1,593-2,-703 1,0-1,0 1,0 0,-1 1,10 3,-3 0</inkml:trace>
+  <inkml:trace contextRef="#ctx0" brushRef="#br0">1 217,'4'-1,"0"0,0-1,0 1,1-1,-1 0,-1 0,1 0,6-5,9-4,38-13,0 3,63-13,18 6,70-2,-175 25,48-13,-56 11,0 2,1 0,45-2,13 6,118 4,-83 19,-34-8,-27-3,107 13,96 24,-95-25,-114-15,85 23,-102-20,-23-6,1-1,0 0,0-1,22 2,50 7,-58-7,48 2,-746-8,845 1,-153 0</inkml:trace>
 </inkml:ink>
 </file>
 
@@ -536,15 +538,13 @@
         <inkml:traceFormat>
           <inkml:channel name="X" type="integer" min="-2.14748E9" max="2.14748E9" units="cm"/>
           <inkml:channel name="Y" type="integer" min="-2.14748E9" max="2.14748E9" units="cm"/>
-          <inkml:channel name="F" type="integer" max="32767" units="dev"/>
         </inkml:traceFormat>
         <inkml:channelProperties>
           <inkml:channelProperty channel="X" name="resolution" value="1000" units="1/cm"/>
           <inkml:channelProperty channel="Y" name="resolution" value="1000" units="1/cm"/>
-          <inkml:channelProperty channel="F" name="resolution" value="0" units="1/dev"/>
         </inkml:channelProperties>
       </inkml:inkSource>
-      <inkml:timestamp xml:id="ts0" timeString="2026-06-15T23:24:37.975"/>
+      <inkml:timestamp xml:id="ts0" timeString="2026-06-16T17:53:51.628"/>
     </inkml:context>
     <inkml:brush xml:id="br0">
       <inkml:brushProperty name="width" value="0.3" units="cm"/>
@@ -555,7 +555,7 @@
       <inkml:brushProperty name="ignorePressure" value="1"/>
     </inkml:brush>
   </inkml:definitions>
-  <inkml:trace contextRef="#ctx0" brushRef="#br0">0 23 0,'1044'-23'0</inkml:trace>
+  <inkml:trace contextRef="#ctx0" brushRef="#br0">1 72,'147'3,"158"-7,-221-7,-49 5,60-1,854 8,-931-2,0-1,31-7,32-3,-66 11,12 1,1-1,-1-2,28-6,-15 2,-22 5</inkml:trace>
 </inkml:ink>
 </file>
 
@@ -573,7 +573,7 @@
           <inkml:channelProperty channel="Y" name="resolution" value="1000" units="1/cm"/>
         </inkml:channelProperties>
       </inkml:inkSource>
-      <inkml:timestamp xml:id="ts0" timeString="2026-06-15T23:24:45.831"/>
+      <inkml:timestamp xml:id="ts0" timeString="2026-06-16T17:53:52.703"/>
     </inkml:context>
     <inkml:brush xml:id="br0">
       <inkml:brushProperty name="width" value="0.3" units="cm"/>
@@ -584,7 +584,7 @@
       <inkml:brushProperty name="ignorePressure" value="1"/>
     </inkml:brush>
   </inkml:definitions>
-  <inkml:trace contextRef="#ctx0" brushRef="#br0">1 72,'927'0,"-909"-1,0-1,31-7,32-3,29 0,-75 7,56-2,-65 5,-1 0,25-6,39-3,-69 10</inkml:trace>
+  <inkml:trace contextRef="#ctx0" brushRef="#br0">0 96,'27'0,"0"-1,0-1,43-10,-26 5,0 2,1 2,-1 2,48 5,12-1,442-3,-522-2,1-1,31-7,4 0,82-14,-44 4,-80 18</inkml:trace>
 </inkml:ink>
 </file>
 
@@ -602,7 +602,7 @@
           <inkml:channelProperty channel="Y" name="resolution" value="1000" units="1/cm"/>
         </inkml:channelProperties>
       </inkml:inkSource>
-      <inkml:timestamp xml:id="ts0" timeString="2026-06-15T23:24:49.817"/>
+      <inkml:timestamp xml:id="ts0" timeString="2026-06-16T17:53:54.232"/>
     </inkml:context>
     <inkml:brush xml:id="br0">
       <inkml:brushProperty name="width" value="0.3" units="cm"/>
@@ -613,7 +613,7 @@
       <inkml:brushProperty name="ignorePressure" value="1"/>
     </inkml:brush>
   </inkml:definitions>
-  <inkml:trace contextRef="#ctx0" brushRef="#br0">0 1,'1117'0,"-1099"1,-1 0,33 9,31 2,275-12,-336 0</inkml:trace>
+  <inkml:trace contextRef="#ctx0" brushRef="#br0">1 40,'70'21,"74"-16,-102-5,-1 1,68 10,-69-5,1-2,49-1,-45-2,72 9,-43-2,1-2,116-8,-58-1,389 3,-504-1,0-1,31-7,32-3,-62 11,1-2,-1-1,0 0,20-8,-20 6,-1 1,2 1,-1 0,25-1,-21 4,0-2,-1-1,1 0,-1-2,22-9,-29 10</inkml:trace>
 </inkml:ink>
 </file>
 
@@ -631,7 +631,7 @@
           <inkml:channelProperty channel="Y" name="resolution" value="1000" units="1/cm"/>
         </inkml:channelProperties>
       </inkml:inkSource>
-      <inkml:timestamp xml:id="ts0" timeString="2026-06-15T23:24:52.019"/>
+      <inkml:timestamp xml:id="ts0" timeString="2026-06-16T17:53:56.006"/>
     </inkml:context>
     <inkml:brush xml:id="br0">
       <inkml:brushProperty name="width" value="0.3" units="cm"/>
@@ -642,7 +642,7 @@
       <inkml:brushProperty name="ignorePressure" value="1"/>
     </inkml:brush>
   </inkml:definitions>
-  <inkml:trace contextRef="#ctx0" brushRef="#br0">75 0,'879'0,"-855"1,-1 2,32 7,9 1,53 10,-79-12,0-2,54 3,-88-10,-1 0,1 0,0 0,-1 1,1-1,0 1,-1 0,1 0,-1 0,1 1,3 2,-6-4,-1 0,1 1,-1-1,0 0,0 1,1-1,-1 1,0-1,0 0,1 1,-1-1,0 1,0-1,0 0,0 1,1-1,-1 1,0-1,0 1,0-1,0 1,0-1,0 1,0-1,0 1,-1-1,1 1,0-1,0 0,-1 2,-20 18,-13 0,-53 22,15-8,51-24,-1-2,-1-1,0-1,0 0,-32 2,23-3,-58 16,46-8,-1-2,-1-2,-57 4,47-9,29-3,1 1,-40 8,39-5,0-1,-28 0,33-3,1 0,0 2,0 0,-33 11,30-7,-1-1,-45 5,48-9,1 2,-1 0,1 1,-29 12,48-17,0 1,0-1,0 1,0 0,1 0,-1-1,0 2,1-1,-1 0,0 0,1 0,-1 1,1-1,0 1,-1-1,1 1,0-1,0 1,0 0,0 0,0-1,1 1,-1 0,0 0,0 3,2-4,0 1,0 0,0-1,0 1,0-1,0 0,0 1,1-1,-1 0,0 0,1 1,-1-1,1 0,-1-1,1 1,0 0,-1 0,1-1,0 1,-1-1,1 1,0-1,0 0,0 1,-1-1,1 0,0 0,2-1,210 3,-154-5,1 4,107 13,-113-8,-1-2,108-5,45 2,-137 10,-48-6,-1-2,31 1,163-5,-1187 2,982 0,1 1,-1 1,0 0,13 5,2 1,23-1,0-1,0-2,0-2,49-5,-73 2,-92-1,-80 3,128 1,5 3</inkml:trace>
+  <inkml:trace contextRef="#ctx0" brushRef="#br0">1 1,'808'0,"-790"1,-1 1,0 1,1 0,31 12,-31-9,-1-1,1 0,0-2,29 3,-9-5,0-1,0-2,72-13,-89 11,0 2,0-1,23 2,-23 1</inkml:trace>
 </inkml:ink>
 </file>
 
@@ -689,7 +689,7 @@
           <inkml:channelProperty channel="Y" name="resolution" value="1000" units="1/cm"/>
         </inkml:channelProperties>
       </inkml:inkSource>
-      <inkml:timestamp xml:id="ts0" timeString="2026-06-15T23:45:17.703"/>
+      <inkml:timestamp xml:id="ts0" timeString="2026-06-16T17:53:58.200"/>
     </inkml:context>
     <inkml:brush xml:id="br0">
       <inkml:brushProperty name="width" value="0.3" units="cm"/>
@@ -700,7 +700,7 @@
       <inkml:brushProperty name="ignorePressure" value="1"/>
     </inkml:brush>
   </inkml:definitions>
-  <inkml:trace contextRef="#ctx0" brushRef="#br0">1 1,'690'0,"-672"1,0 0,31 8,31 3,31 1,-76-8,56 2,-44-6,0 2,55 10,-64-9,0-1,68-5,-59 1,51 3,-28 10,-49-8,0 0,33 1,516-6,-548-1,-1 0,0-1,0-2,0 0,-1-1,0-1,0-1,20-10,-27 11</inkml:trace>
+  <inkml:trace contextRef="#ctx0" brushRef="#br0">0 54,'46'0,"-11"1,-1-1,0-2,66-12,-76 9,1 2,46-1,-45 3,0-1,39-7,-20 2,-1 2,1 2,88 6,-29 0,-49-3,0-1,1 2,86 13,-101-8,0-2,54-2,-55-3,1 3,57 9,-63-6,0-2,1-1,38-3,54 2,-91 4,45 12,-46-8,47 5,273-10,-189-7,-144 3,-3 0</inkml:trace>
 </inkml:ink>
 </file>
 
@@ -747,6 +747,64 @@
           <inkml:channelProperty channel="Y" name="resolution" value="1000" units="1/cm"/>
         </inkml:channelProperties>
       </inkml:inkSource>
+      <inkml:timestamp xml:id="ts0" timeString="2026-06-16T21:01:00.700"/>
+    </inkml:context>
+    <inkml:brush xml:id="br0">
+      <inkml:brushProperty name="width" value="0.3" units="cm"/>
+      <inkml:brushProperty name="height" value="0.6" units="cm"/>
+      <inkml:brushProperty name="color" value="#00F900"/>
+      <inkml:brushProperty name="tip" value="rectangle"/>
+      <inkml:brushProperty name="rasterOp" value="maskPen"/>
+      <inkml:brushProperty name="ignorePressure" value="1"/>
+    </inkml:brush>
+  </inkml:definitions>
+  <inkml:trace contextRef="#ctx0" brushRef="#br0">1 31,'0'2,"1"-1,0 1,0 0,0 0,0-1,0 1,0-1,1 1,-1-1,1 1,-1-1,1 0,-1 0,1 0,-1 0,1 0,0 0,0 0,3 1,37 12,-27-10,23 4,0-1,0-2,46 1,415-7,-477-1,0 0,28-6,-27 3,-1 2,28-2,449 6,-472-2,54-10,-54 6,52-3,4 9,-30 0,1-2,88-13,-108 9,0 2,37 1,-42 2,1-1,-1-1,39-9,-29 5,1 1,0 2,0 1,52 6,3-1,665-3,-741 1,0 1,1 1,-1 1,28 9,-27-6,1-2,0 0,30 2,36 6,-63-9,1 0,28 0,-29-2,46 8,-46-6,48 4,-6-9,-32 0,0 1,0 1,0 2,36 8,-43-6,0-1,0-1,47-2,-46-2,0 1,0 2,41 8,-28-4,0-1,0-2,0-2,46-4,9 0,450 3,-565 2,0 0,0 1,1 1,-32 11,-42 8,38-14,19-3,-65 3,70-7,-45 7,-25 3,42-8,-86 16,32-2,15-10,-29 3,80-5,-47 0,48-4,-49 8,-59 14,111-17,0-3,0-1,-82-6,27 1,-1396 2,1462-2,-50-8,-12-1,-15-2,71 7,-52-1,-34 9,-102-3,141-10,49 5,-58-1,-215 8,288-1</inkml:trace>
+</inkml:ink>
+</file>
+
+<file path=ppt/ink/ink23.xml><?xml version="1.0" encoding="utf-8"?>
+<inkml:ink xmlns:inkml="http://www.w3.org/2003/InkML">
+  <inkml:definitions>
+    <inkml:context xml:id="ctx0">
+      <inkml:inkSource xml:id="inkSrc0">
+        <inkml:traceFormat>
+          <inkml:channel name="X" type="integer" min="-2.14748E9" max="2.14748E9" units="cm"/>
+          <inkml:channel name="Y" type="integer" min="-2.14748E9" max="2.14748E9" units="cm"/>
+        </inkml:traceFormat>
+        <inkml:channelProperties>
+          <inkml:channelProperty channel="X" name="resolution" value="1000" units="1/cm"/>
+          <inkml:channelProperty channel="Y" name="resolution" value="1000" units="1/cm"/>
+        </inkml:channelProperties>
+      </inkml:inkSource>
+      <inkml:timestamp xml:id="ts0" timeString="2026-06-16T22:22:24.804"/>
+    </inkml:context>
+    <inkml:brush xml:id="br0">
+      <inkml:brushProperty name="width" value="0.3" units="cm"/>
+      <inkml:brushProperty name="height" value="0.6" units="cm"/>
+      <inkml:brushProperty name="color" value="#00F900"/>
+      <inkml:brushProperty name="tip" value="rectangle"/>
+      <inkml:brushProperty name="rasterOp" value="maskPen"/>
+      <inkml:brushProperty name="ignorePressure" value="1"/>
+    </inkml:brush>
+  </inkml:definitions>
+  <inkml:trace contextRef="#ctx0" brushRef="#br0">1142 0,'-50'11,"8"-1,-297-5,185-7,-403 2,2198 0,-1620 0</inkml:trace>
+</inkml:ink>
+</file>
+
+<file path=ppt/ink/ink24.xml><?xml version="1.0" encoding="utf-8"?>
+<inkml:ink xmlns:inkml="http://www.w3.org/2003/InkML">
+  <inkml:definitions>
+    <inkml:context xml:id="ctx0">
+      <inkml:inkSource xml:id="inkSrc0">
+        <inkml:traceFormat>
+          <inkml:channel name="X" type="integer" min="-2.14748E9" max="2.14748E9" units="cm"/>
+          <inkml:channel name="Y" type="integer" min="-2.14748E9" max="2.14748E9" units="cm"/>
+        </inkml:traceFormat>
+        <inkml:channelProperties>
+          <inkml:channelProperty channel="X" name="resolution" value="1000" units="1/cm"/>
+          <inkml:channelProperty channel="Y" name="resolution" value="1000" units="1/cm"/>
+        </inkml:channelProperties>
+      </inkml:inkSource>
       <inkml:timestamp xml:id="ts0" timeString="2026-06-15T23:04:30.666"/>
     </inkml:context>
     <inkml:brush xml:id="br0">
@@ -762,7 +820,7 @@
 </inkml:ink>
 </file>
 
-<file path=ppt/ink/ink23.xml><?xml version="1.0" encoding="utf-8"?>
+<file path=ppt/ink/ink25.xml><?xml version="1.0" encoding="utf-8"?>
 <inkml:ink xmlns:inkml="http://www.w3.org/2003/InkML">
   <inkml:definitions>
     <inkml:context xml:id="ctx0">
@@ -793,7 +851,7 @@
 </inkml:ink>
 </file>
 
-<file path=ppt/ink/ink24.xml><?xml version="1.0" encoding="utf-8"?>
+<file path=ppt/ink/ink26.xml><?xml version="1.0" encoding="utf-8"?>
 <inkml:ink xmlns:inkml="http://www.w3.org/2003/InkML">
   <inkml:definitions>
     <inkml:context xml:id="ctx0">
@@ -807,7 +865,7 @@
           <inkml:channelProperty channel="Y" name="resolution" value="1000" units="1/cm"/>
         </inkml:channelProperties>
       </inkml:inkSource>
-      <inkml:timestamp xml:id="ts0" timeString="2026-06-15T23:45:28.838"/>
+      <inkml:timestamp xml:id="ts0" timeString="2026-06-16T17:50:54.692"/>
     </inkml:context>
     <inkml:brush xml:id="br0">
       <inkml:brushProperty name="width" value="0.3" units="cm"/>
@@ -818,67 +876,7 @@
       <inkml:brushProperty name="ignorePressure" value="1"/>
     </inkml:brush>
   </inkml:definitions>
-  <inkml:trace contextRef="#ctx0" brushRef="#br0">0 1,'1259'0,"-1216"4,-28 1</inkml:trace>
-</inkml:ink>
-</file>
-
-<file path=ppt/ink/ink25.xml><?xml version="1.0" encoding="utf-8"?>
-<inkml:ink xmlns:inkml="http://www.w3.org/2003/InkML">
-  <inkml:definitions>
-    <inkml:context xml:id="ctx0">
-      <inkml:inkSource xml:id="inkSrc0">
-        <inkml:traceFormat>
-          <inkml:channel name="X" type="integer" min="-2.14748E9" max="2.14748E9" units="cm"/>
-          <inkml:channel name="Y" type="integer" min="-2.14748E9" max="2.14748E9" units="cm"/>
-        </inkml:traceFormat>
-        <inkml:channelProperties>
-          <inkml:channelProperty channel="X" name="resolution" value="1000" units="1/cm"/>
-          <inkml:channelProperty channel="Y" name="resolution" value="1000" units="1/cm"/>
-        </inkml:channelProperties>
-      </inkml:inkSource>
-      <inkml:timestamp xml:id="ts0" timeString="2026-06-15T23:45:30.735"/>
-    </inkml:context>
-    <inkml:brush xml:id="br0">
-      <inkml:brushProperty name="width" value="0.3" units="cm"/>
-      <inkml:brushProperty name="height" value="0.6" units="cm"/>
-      <inkml:brushProperty name="color" value="#00F900"/>
-      <inkml:brushProperty name="tip" value="rectangle"/>
-      <inkml:brushProperty name="rasterOp" value="maskPen"/>
-      <inkml:brushProperty name="ignorePressure" value="1"/>
-    </inkml:brush>
-  </inkml:definitions>
-  <inkml:trace contextRef="#ctx0" brushRef="#br0">0 100,'0'-3,"1"0,0 0,-1 0,1 0,0 0,0 0,1 0,-1 0,1 0,-1 1,1-1,0 1,0-1,0 1,0 0,0 0,1 0,-1 0,1 0,-1 0,1 1,0-1,-1 1,1 0,0-1,4 0,11-4,0 1,1 0,21-1,-23 3,44-4,0 2,106 7,-51 1,454-3,-549 1,-1 1,37 9,-13-2,75 16,-101-21,-3 2</inkml:trace>
-</inkml:ink>
-</file>
-
-<file path=ppt/ink/ink26.xml><?xml version="1.0" encoding="utf-8"?>
-<inkml:ink xmlns:inkml="http://www.w3.org/2003/InkML">
-  <inkml:definitions>
-    <inkml:context xml:id="ctx0">
-      <inkml:inkSource xml:id="inkSrc0">
-        <inkml:traceFormat>
-          <inkml:channel name="X" type="integer" min="-2.14748E9" max="2.14748E9" units="cm"/>
-          <inkml:channel name="Y" type="integer" min="-2.14748E9" max="2.14748E9" units="cm"/>
-          <inkml:channel name="F" type="integer" max="32767" units="dev"/>
-        </inkml:traceFormat>
-        <inkml:channelProperties>
-          <inkml:channelProperty channel="X" name="resolution" value="1000" units="1/cm"/>
-          <inkml:channelProperty channel="Y" name="resolution" value="1000" units="1/cm"/>
-          <inkml:channelProperty channel="F" name="resolution" value="0" units="1/dev"/>
-        </inkml:channelProperties>
-      </inkml:inkSource>
-      <inkml:timestamp xml:id="ts0" timeString="2026-06-15T23:45:32.719"/>
-    </inkml:context>
-    <inkml:brush xml:id="br0">
-      <inkml:brushProperty name="width" value="0.3" units="cm"/>
-      <inkml:brushProperty name="height" value="0.6" units="cm"/>
-      <inkml:brushProperty name="color" value="#00F900"/>
-      <inkml:brushProperty name="tip" value="rectangle"/>
-      <inkml:brushProperty name="rasterOp" value="maskPen"/>
-      <inkml:brushProperty name="ignorePressure" value="1"/>
-    </inkml:brush>
-  </inkml:definitions>
-  <inkml:trace contextRef="#ctx0" brushRef="#br0">0 0 0,'2445'0'0</inkml:trace>
+  <inkml:trace contextRef="#ctx0" brushRef="#br0">1 49,'123'2,"134"-5,-186-9,-50 8,0 0,32 0,589 5,-624-2,1-1,30-7,30-3,-59 11</inkml:trace>
 </inkml:ink>
 </file>
 
@@ -896,7 +894,7 @@
           <inkml:channelProperty channel="Y" name="resolution" value="1000" units="1/cm"/>
         </inkml:channelProperties>
       </inkml:inkSource>
-      <inkml:timestamp xml:id="ts0" timeString="2026-06-15T23:52:40.067"/>
+      <inkml:timestamp xml:id="ts0" timeString="2026-06-16T17:50:56.373"/>
     </inkml:context>
     <inkml:brush xml:id="br0">
       <inkml:brushProperty name="width" value="0.3" units="cm"/>
@@ -907,7 +905,7 @@
       <inkml:brushProperty name="ignorePressure" value="1"/>
     </inkml:brush>
   </inkml:definitions>
-  <inkml:trace contextRef="#ctx0" brushRef="#br0">140 27,'904'0,"-876"2,51 8,-50-5,49 3,444-9,-495 2,53 10,-52-6,50 3,-42-6,65 11,-90-11,28 2,-1-1,66-5,-56 0,50 5,-28 9,-49-8,0 0,32 0,-16-4,-8 0,1 1,0 1,45 8,-34-3,0-2,0-2,0-2,46-5,8 2,13 0,117 4,-141 10,-49-7,59 3,38-6,139-6,-200-7,-50 6,0 2,32-2,1467 6,-1493 0,54 10,-54-6,52 3,942-9,-1004-1,0 0,0-1,0-1,0 0,-1-2,1 0,-1 0,-1-2,1 0,27-20,-24 17,1 1,0 0,0 2,33-10,-51 18,1 0,-1 0,0 0,1 0,-1 0,0 0,1 1,-1-1,0 1,1-1,-1 1,0 0,0 0,0 0,0 0,0 0,0 1,0-1,0 1,0-1,-1 1,1 0,0-1,-1 1,0 0,1 0,-1 0,0 0,0 0,0 1,0-1,1 5,3 8,-1 0,0 1,3 26,-6-35,2 26,-2 44,-2-59,1 0,0 0,2 0,0-1,1 1,0 0,2-1,10 30,-10-34,0 1,-1 0,-1-1,-1 2,0-1,0 16,7 38,-6-55,-1 0,0 0,-1 0,0 0,-1-1,-1 1,0 0,-1 0,0 0,-1-1,0 1,-1-1,0 0,-1 0,-1 0,0 0,-13 18,16-26,0-1,0 0,-1 0,1-1,-1 1,1-1,-1 0,0 1,0-2,0 1,0 0,0-1,0 0,0 0,0 0,-1 0,-5-1,-12 2,-1-2,-26-3,11 1,16 1,0 1,1 2,-1 0,0 1,0 1,1 1,-33 12,31-11,0-1,-1-1,0-1,0-1,0-1,0-1,-29-4,-21 2,-805 2,861-1,0-1,-31-7,-31-3,-12 11,46 2,-1-2,-77-12,90 8,-1 1,-49 2,52 3,1-2,0-2,-40-7,36 4,1 2,-1 1,-55 2,52 2,-1-1,-61-10,-90-15,151 20,-76-1,76 5,-76-10,82 6,-61 0,65 5,0-2,-57-10,61 7,-1 2,0 0,-28 2,27 1,1-1,-51-10,50 7,0 0,-1 2,-30 1,31 1,0-1,0-1,-37-7,25 2,-2 2,1 2,0 2,-51 4,-5 0,-758-3,837 1,-1 1,-32 7,-31 4,-404-12,234-3,233 3,0 1,-31 7,-32 3,2-12,47-1,-1 1,1 2,-63 11,56-6,-1-2,0-2,1-2,-54-5,-2 2,88 2,0 1,1-1,-1-1,0 1,1-1,-1 0,1-1,-1 1,1-1,0 0,0-1,0 0,0 0,0 0,1-1,-1 1,1-1,0-1,-9-8,7 5,-1 0,1-1,0 0,1 0,0-1,0 1,1-1,-5-15,4 4,1 1,1-1,-3-31,7 45,-1 1,0 0,0 0,0 0,-1 0,0 0,0 0,-1 0,0 1,0-1,0 1,0 0,-1 0,0 0,0 0,-7-6,6 8,1 0,-1 1,1-1,-1 1,0 0,0 0,0 1,0 0,0 0,0 0,-1 0,1 1,0-1,0 1,-1 1,1-1,0 1,0 0,0 0,-5 2,-4 1,0 1,1 1,-1 0,2 1,-1 0,-12 10,20-14,0 1,0 0,0 0,0 0,1 1,0-1,0 1,0 0,1 0,0 1,0-1,0 1,0-1,1 1,0 0,-2 9,4-13,0-1,-1 1,1 0,0-1,1 1,-1 0,0-1,0 1,1-1,-1 1,1-1,-1 1,1-1,0 1,-1-1,1 1,0-1,0 0,0 0,0 1,0-1,0 0,1 0,1 1,-1 0,1-1,0 0,0 0,-1 0,1 0,0 0,0 0,0-1,0 0,0 1,0-1,5-1,-4 1,0 0,1-1,-1 1,0-1,0 0,0 0,0-1,0 1,-1-1,1 0,0 0,-1 0,1 0,-1-1,0 1,1-1,-1 0,-1 0,1 0,2-4,-21 42,11-17,-3 11,0 0,-3 41,10-63,0 1,1-1,0 1,0-1,1 0,0 1,0-1,1 0,0 0,0 0,0 0,1 0,0 0,1-1,4 8,-5-11,0-1,-1 1,1-1,0 0,1 0,-1 0,0 0,0 0,1-1,-1 0,1 0,-1 0,1 0,0 0,-1-1,6 1,68-3,-48 1,36-2,251 5,-231 9,-51-5,61 1,1329-8,-1396 3,51 8,-50-5,49 2,-1-5,107 14,-112-9,1-3,83-6,-30-1,-78 4,0 2,51 11,-42-8,0-2,93-6,-39-1,-3 1,116 5,-154 8,-49-6,0-2,32 2,542-6,-573 3,0 0,28 6,-27-3,-1-2,28 2,639-6,-671 2,-1 0,33 9,31 2,452-10,-258-4,-258 1,0-1,34-7,29-4,-19 13,-32 0,1-1,-1-1,45-8,155-47,-223 56,-1-1,0 0,0 0,0-1,0 1,0-1,-1 0,1-1,-1 1,0-1,0 0,0 0,-1 0,1 0,-1-1,0 1,0-1,-1 0,1 0,-1 0,0 0,0-1,-1 1,0 0,0-1,0 1,0-1,-1-5,1 6,-1-1,0 1,0-1,0 1,-1 0,0-1,0 1,0 0,-1-1,1 1,-1 0,-1 0,1 0,-1 1,1-1,-1 0,-1 1,1 0,-1 0,1 0,-1 0,0 1,-1-1,1 1,0 0,-1 0,0 1,-8-4,-23-4,0 3,0 1,-53-3,79 9,-74-11,46 6,-54-2,-84-5,-5 0,128 12,0-2,-52-9,60 6,-79 1,80 4,-88-10,-114-24,102 27,90 6,-59-9,-20-1,89 10,-62-11,-58-12,91 17,-135 4,174 4,843-1,-788 3,-24 4,-33 4,-76-5,64-4,-51 7,31-1,-128-3,123-5,-98 11,8 2,23-2,-15-1,-172-9,137-4,-47 16,-1 0,-1060-14,1353-12,-22 3,-15 7,8-2,48-16,-74 21,1 0,-1 0,0 0,0 0,1 0,-1 0,0 0,0-1,1 1,-1 0,0 0,0 0,0 0,1 0,-1 0,0 0,0-1,1 1,-1 0,0 0,0 0,0 0,0-1,0 1,1 0,-1 0,0-1,0 1,0 0,0 0,0 0,0-1,0 1,0 0,0 0,0-1,0 1,0 0,0 0,0-1,0 1,0 0,0 0,0-1,0 1,0 0,0-1,-15-7,-30-3,39 9,-47-6,0 2,-1 2,-104 6,45 1,50-5,-93-15,115 13,0 2,-45 4,-53-3,130 0,0-1,0 0,1 0,-1 0,-15-8,30 5,7-5,-13 10,0 0,0-1,0 1,0 0,0-1,0 1,0 0,0 0,0-1,0 1,0 0,0-1,0 1,0 0,0-1,0 1,0 0,-1 0,1-1,0 1,0 0,0 0,0-1,-1 1,1 0,0 0,0-1,0 1,-1 0,1 0,0 0,-1 0,1-1,0 1,0 0,-1 0,1 0,0 0,-1 0,1 0,0 0,0 0,-1 0,1 0,0 0,-1 0,1 0,-1 0,-21-4,0 1,-1 1,0 1,1 1,-29 3,-14 0,44-3,0 0,1-1,-1-1,0-1,1-1,0 0,0-2,0 0,-29-15,22 9,1-2,0-1,2-1,-1-1,-23-23,35 29,0 1,-1 0,0 1,0 1,-24-10,-5-4,42 21,-1 1,1 0,0-1,0 1,0-1,0 1,0-1,1 0,-1 1,0-1,0 0,0 0,1 1,-1-1,0 0,0 0,1 0,-1 0,1 0,-1 0,1 0,0 0,-1-1,1 1,1 0,-1 0,1 0,-1 1,1-1,0 0,-1 1,1-1,0 0,-1 1,1-1,0 1,0-1,0 1,-1 0,1-1,0 1,0 0,0-1,2 1,54-7,647 6,-310 3,-365 0,0 2,0 1,29 8,-36-8,14 2,0-3,0-1,38-1,29 2,-16 7,-52-5,52 1,-38-7,98 13,-74-4,1-4,120-7,-61-1,-27 5,119-4,-105-21,-69 12,64-23,-59 17,-21 7,1 2,0 2,0 1,0 2,51 1,-624 1,251 3,271-3,1-1,0 0,0-1,0 0,0-1,1-1,0 0,-1-1,2-1,-1 0,1 0,-16-13,28 20,-1-1,0 1,0-1,0 0,0 1,0-1,0 0,1 1,-1-1,0 0,1 0,-1 0,0 0,1 0,-1 0,1 0,0 0,-1 0,1 0,0 0,-1 0,1 0,0 0,0 0,0 0,0 0,0 0,0 0,0 0,1-2,0 2,0 0,1-1,-1 1,1 0,-1 0,1 0,0 0,-1 0,1 0,0 0,0 1,-1-1,1 1,0-1,2 0,12-1,0 0,29 0,649 5,-667-2,53 10,-52-6,50 3,26-10,77 4,-61 20,-36-10,-60-7,1-1,30 0,729-5,-766 0,-1 0,33-9,31-2,-50 11,11 0,75-11,-54 4,-1 3,122 6,-65 2,-35-2,92-3,-105-9,-50 6,0 1,32 0,793 5,-847-1,1 0,0 0,0 0,0 0,0 0,0 0,0 0,0 0,0 0,0 0,0 0,0 0,0 1,0-1,0 0,0 0,0 0,0 0,0 0,0 0,0 0,0 0,0 0,0 0,0 0,0 0,0 0,0 1,0-1,0 0,0 0,0 0,0 0,1 0,-1 0,0 0,0 0,0 0,0 0,0 0,0 0,0 0,0 0,0 0,0 0,0 0,0 0,0 0,0 0,1 0,-1 0,0 0,0 0,0 0,-11 6,-16 4,-76 13,67-14,-1-1,1-2,-63 3,-1635-11,1707 1,-54-10,54 6,-52-3,43 6,-64-11,88 11,-21-2,-1 2,-55 3,-34-2,79-12,43 13,1 0,-1 0,0-1,1 1,-1 0,1 0,-1-1,1 1,-1 0,0-1,1 1,-1 0,1-1,0 1,-1-1,1 1,-1 0,1-1,0 0,-1 1,1-1,0 1,-1-1,1 1,0-1,0 1,0-1,-1 0,1 1,0-1,0 0,0 1,0-1,0 1,0-1,0 0,0 1,1-1,-1 0,0 1,0-1,0 1,1-1,-1 1,0-1,1 1,-1-1,0 1,1-1,-1 1,1-1,-1 1,1-1,-1 1,1 0,-1-1,1 1,-1 0,1-1,-1 1,1 0,0 0,-1 0,2-1,9-4,1 0,0 0,0 1,0 0,1 1,-1 1,26-2,96 5,-58 2,-54-3,10-1,0 2,0 1,49 10,84 12,-148-21,-1-1,1-1,18-1,-22-1,1 1,0 1,0 0,21 6,-34-8,-1 1,0 0,0 0,1 0,-1 0,0 0,0 0,1 0,-1 0,0 0,0 0,1 0,-1 0,0 0,0 0,1 0,-1 0,0 1,0-1,1 0,-1 0,0 0,0 0,0 0,1 0,-1 1,0-1,0 0,0 0,0 0,1 1,-1-1,0 0,0 0,0 0,0 1,0-1,0 0,0 0,1 1,-1-1,0 0,0 0,0 1,0-1,0 0,0 0,0 1,0-1,0 0,-1 1,-16 5,-30 1,45-7,-59 10,38-5,-45 3,-23 4,67-7,1-2,-28 1,-25-4,27-2,1 3,-93 14,97-9,-1-2,1-2,-66-5,-69 3,107 12,51-7,1-2,-33 2,-1206-6,1235 2,1 2,-31 6,-11 3,-3-3,28-3,-66 3,84-8,-1 1,-27 6,27-3,-48 2,42-6,-48 10,47-6,-48 2,62-6,0 1,0 1,-1 0,-29 12,29-10,0 0,-1 0,-33 3,-138 16,129-13,41-7,0-1,-26 2,25-4,0 2,0 0,1 1,-1 1,-20 9,-91 42,121-50,1 0,0 1,0 0,0 1,-14 16,16-16,-1 0,0-1,0 0,0 0,-1 0,-18 9,-21 6,-108 40,126-51,1 1,0 2,-28 18,44-25,0 1</inkml:trace>
+  <inkml:trace contextRef="#ctx0" brushRef="#br0">0 25,'48'0,"-1"1,67 12,-70-7,84 1,-82-6,72 9,-49-2,0-3,105-6,-56-2,-104 2,0-1,0 0,0-1,0-1,-1 0,1-1,17-9,-16 7,0 1,1 0,0 1,31-6,-28 10</inkml:trace>
 </inkml:ink>
 </file>
 
@@ -925,7 +923,7 @@
           <inkml:channelProperty channel="Y" name="resolution" value="1000" units="1/cm"/>
         </inkml:channelProperties>
       </inkml:inkSource>
-      <inkml:timestamp xml:id="ts0" timeString="2026-06-15T23:52:49.107"/>
+      <inkml:timestamp xml:id="ts0" timeString="2026-06-16T17:50:58.368"/>
     </inkml:context>
     <inkml:brush xml:id="br0">
       <inkml:brushProperty name="width" value="0.3" units="cm"/>
@@ -936,7 +934,7 @@
       <inkml:brushProperty name="ignorePressure" value="1"/>
     </inkml:brush>
   </inkml:definitions>
-  <inkml:trace contextRef="#ctx0" brushRef="#br0">30 60,'0'2,"0"-1,1 0,-1 0,1 0,-1 0,1 0,0-1,-1 1,1 0,0 0,0 0,-1 0,1-1,0 1,0 0,0-1,0 1,0-1,0 1,0-1,0 1,0-1,0 0,0 0,1 1,-1-1,2 0,36 4,-35-4,423 3,-218-5,251 2,-443 1,1 1,32 7,31 4,-32-13,-20 0,-1 1,1 1,36 8,-24-3,0-3,1-1,-1-2,45-4,9 0,28 6,133-6,-222-2,50-14,-57 12,0 1,1 1,34-1,-45 6,0-1,1-1,-1 0,25-7,-37 8,0-1,0 0,-1 0,1 0,-1-1,1 1,-1-1,0 0,0 0,0-1,0 1,-1-1,1 0,-1 0,0 0,0 0,0-1,3-8,-10 111,-16-36,15-48,0 1,1-1,0 1,1 0,-1 25,6 83,-4 63,-9-115,7-49,0 0,0 29,5 19,-2 50,0-116,0-1,1 1,-2-1,1 0,0 0,-1 0,0 1,1-1,-1-1,0 1,-1 0,1 0,0-1,-1 1,1-1,-1 0,0 0,0 0,0 0,0 0,0-1,0 1,0-1,-1 0,1 0,-1 0,1-1,-7 2,-12 1,0-1,-1-1,-29-2,33 1,-813-1,810 0,0-2,-29-5,29 3,-1 2,-27-2,-1280 6,1327 0,0-1,1 0,-1 0,0 0,0-1,0 1,0-1,0 1,0-1,1 0,-1 0,0-1,1 1,-1 0,1-1,-1 1,1-1,0 0,-1 0,1 0,-2-3,1 0,1 1,0-1,1 0,-1 0,1 0,0 0,0 0,0-1,1 1,-1 0,2-8,-11-118,0-3,8 90,0 31,2-1,-1 1,2 0,-1 0,2-1,5-24,-5 36,-1 0,1-1,-1 1,1 0,0 0,0 0,0 0,0 1,0-1,0 0,1 1,-1-1,1 1,-1 0,1 0,-1 0,1 0,-1 0,1 1,0-1,0 1,-1 0,4-1,11 0,1 1,26 3,-19-1,118-2,49 3,-108 8,-49-5,59 1,59 5,3-1,-77-12,102 2,-110 11,-50-8,0 0,32 1,-16-3,42 7,-44-3,52 0,412-7,-481 2,0 1,31 7,32 3,-49-13,-22 0,0 1,1 0,-1 0,18 4,-25-3,-1-1,0 1,0 0,0 0,0 0,1 0,-1 0,-1 0,1 1,0-1,0 0,0 1,-1 0,1-1,-1 1,1 0,-1 0,0 0,0 0,1 0,-2 0,1 0,0 0,0 1,-1-1,1 3,4 41,-5-36,1 0,0 0,1 0,0 0,0 0,6 13,-7-21,1 1,0 0,-1-1,1 1,0-1,0 0,1 0,-1 1,0-1,1-1,-1 1,1 0,0-1,-1 1,1-1,0 0,0 0,0 0,0 0,0 0,0-1,0 1,0-1,0 0,6 0,-6 0,0 0,-1 0,1 0,0-1,-1 1,1-1,0 1,-1-1,1 0,-1 0,1 0,-1 0,0 0,1-1,-1 1,0-1,0 0,0 1,3-4,-2 0,0 0,0 0,0-1,-1 1,1-1,1-9,3-5,-3 16,-5 19,-4 35,3-30,0 0,0-2,0 0,2 0,1 18,-1-32,0 1,1-1,0 0,0 0,0 0,0 0,1 0,0 0,0-1,0 1,0 0,0-1,1 0,-1 1,1-1,0 0,0 0,4 3,6 2</inkml:trace>
+  <inkml:trace contextRef="#ctx0" brushRef="#br0">0 25,'595'0,"-573"-2,0 0,29-6,-29 3,1 2,26-2,830 6,-860 0,-1 1,31 7,31 3,11 0,-67-7,-1-1,29 0,209-5,-241 1</inkml:trace>
 </inkml:ink>
 </file>
 
@@ -948,15 +946,13 @@
         <inkml:traceFormat>
           <inkml:channel name="X" type="integer" min="-2.14748E9" max="2.14748E9" units="cm"/>
           <inkml:channel name="Y" type="integer" min="-2.14748E9" max="2.14748E9" units="cm"/>
-          <inkml:channel name="F" type="integer" max="32767" units="dev"/>
         </inkml:traceFormat>
         <inkml:channelProperties>
           <inkml:channelProperty channel="X" name="resolution" value="1000" units="1/cm"/>
           <inkml:channelProperty channel="Y" name="resolution" value="1000" units="1/cm"/>
-          <inkml:channelProperty channel="F" name="resolution" value="0" units="1/dev"/>
         </inkml:channelProperties>
       </inkml:inkSource>
-      <inkml:timestamp xml:id="ts0" timeString="2026-06-15T23:53:11.798"/>
+      <inkml:timestamp xml:id="ts0" timeString="2026-06-16T17:50:59.607"/>
     </inkml:context>
     <inkml:brush xml:id="br0">
       <inkml:brushProperty name="width" value="0.3" units="cm"/>
@@ -967,7 +963,7 @@
       <inkml:brushProperty name="ignorePressure" value="1"/>
     </inkml:brush>
   </inkml:definitions>
-  <inkml:trace contextRef="#ctx0" brushRef="#br0">0 0 0,'5821'0'0</inkml:trace>
+  <inkml:trace contextRef="#ctx0" brushRef="#br0">0 72,'690'0,"-662"-1,51-10,-50 6,49-2,-63 6,1 0,-1-1,0-1,1-1,-1 0,20-9,-10 4,13 1,-19 6</inkml:trace>
 </inkml:ink>
 </file>
 
@@ -1010,15 +1006,13 @@
         <inkml:traceFormat>
           <inkml:channel name="X" type="integer" min="-2.14748E9" max="2.14748E9" units="cm"/>
           <inkml:channel name="Y" type="integer" min="-2.14748E9" max="2.14748E9" units="cm"/>
-          <inkml:channel name="F" type="integer" max="32767" units="dev"/>
         </inkml:traceFormat>
         <inkml:channelProperties>
           <inkml:channelProperty channel="X" name="resolution" value="1000" units="1/cm"/>
           <inkml:channelProperty channel="Y" name="resolution" value="1000" units="1/cm"/>
-          <inkml:channelProperty channel="F" name="resolution" value="0" units="1/dev"/>
         </inkml:channelProperties>
       </inkml:inkSource>
-      <inkml:timestamp xml:id="ts0" timeString="2026-06-15T23:53:17.362"/>
+      <inkml:timestamp xml:id="ts0" timeString="2026-06-16T17:51:01.450"/>
     </inkml:context>
     <inkml:brush xml:id="br0">
       <inkml:brushProperty name="width" value="0.3" units="cm"/>
@@ -1029,7 +1023,7 @@
       <inkml:brushProperty name="ignorePressure" value="1"/>
     </inkml:brush>
   </inkml:definitions>
-  <inkml:trace contextRef="#ctx0" brushRef="#br0">0 0 0,'5888'0'0</inkml:trace>
+  <inkml:trace contextRef="#ctx0" brushRef="#br0">0 0,'0'5,"4"0,1 4,4 1,1-2</inkml:trace>
 </inkml:ink>
 </file>
 
@@ -1041,15 +1035,13 @@
         <inkml:traceFormat>
           <inkml:channel name="X" type="integer" min="-2.14748E9" max="2.14748E9" units="cm"/>
           <inkml:channel name="Y" type="integer" min="-2.14748E9" max="2.14748E9" units="cm"/>
-          <inkml:channel name="F" type="integer" max="32767" units="dev"/>
         </inkml:traceFormat>
         <inkml:channelProperties>
           <inkml:channelProperty channel="X" name="resolution" value="1000" units="1/cm"/>
           <inkml:channelProperty channel="Y" name="resolution" value="1000" units="1/cm"/>
-          <inkml:channelProperty channel="F" name="resolution" value="0" units="1/dev"/>
         </inkml:channelProperties>
       </inkml:inkSource>
-      <inkml:timestamp xml:id="ts0" timeString="2026-06-15T23:53:34.344"/>
+      <inkml:timestamp xml:id="ts0" timeString="2026-06-16T17:51:02.877"/>
     </inkml:context>
     <inkml:brush xml:id="br0">
       <inkml:brushProperty name="width" value="0.3" units="cm"/>
@@ -1060,7 +1052,7 @@
       <inkml:brushProperty name="ignorePressure" value="1"/>
     </inkml:brush>
   </inkml:definitions>
-  <inkml:trace contextRef="#ctx0" brushRef="#br0">0 44 0,'5610'686'0,"-5521"-1416"0,-5788 774 0</inkml:trace>
+  <inkml:trace contextRef="#ctx0" brushRef="#br0">0 0,'12'1,"-1"0,0 1,20 6,21 2,36 2,-46-5,69 1,55-9,-146 1</inkml:trace>
 </inkml:ink>
 </file>
 
@@ -1078,7 +1070,7 @@
           <inkml:channelProperty channel="Y" name="resolution" value="1000" units="1/cm"/>
         </inkml:channelProperties>
       </inkml:inkSource>
-      <inkml:timestamp xml:id="ts0" timeString="2026-06-15T23:53:39.527"/>
+      <inkml:timestamp xml:id="ts0" timeString="2026-06-16T17:51:04.900"/>
     </inkml:context>
     <inkml:brush xml:id="br0">
       <inkml:brushProperty name="width" value="0.3" units="cm"/>
@@ -1089,7 +1081,7 @@
       <inkml:brushProperty name="ignorePressure" value="1"/>
     </inkml:brush>
   </inkml:definitions>
-  <inkml:trace contextRef="#ctx0" brushRef="#br0">2592 425,'-1'1,"1"0,0 0,-1 0,0 0,1 0,-1 0,0 0,1 0,-1 0,0 0,0-1,0 1,0 0,0 0,0-1,0 1,0-1,0 1,0-1,-2 1,-29 12,23-10,-15 3,0-1,-1-1,0-1,0-1,0-1,0-1,-27-4,-25 1,-246-15,193 10,87 8,-74-12,54 4,-1 3,-118 6,65 2,90-3,0-1,0-1,-46-10,44 7,0 1,-59 0,54 3,-61-8,55 4,-1 1,-81 5,-30-3,81-9,50 6,0 2,-32-2,19 5,16 1,0-1,0-1,1 0,-1-1,-19-5,33 6,0-1,0 1,0-1,0 0,0 0,0 0,0-1,1 0,-1 1,1-1,0 0,-1 0,2-1,-1 1,0-1,1 0,-1 1,1-1,0 0,0 0,1 0,-1-1,1 1,0 0,-1-7,-2-24,2 0,4-59,0 23,-2 50</inkml:trace>
+  <inkml:trace contextRef="#ctx0" brushRef="#br0">1 0,'3608'0,"-3587"0</inkml:trace>
 </inkml:ink>
 </file>
 
@@ -1107,7 +1099,7 @@
           <inkml:channelProperty channel="Y" name="resolution" value="1000" units="1/cm"/>
         </inkml:channelProperties>
       </inkml:inkSource>
-      <inkml:timestamp xml:id="ts0" timeString="2026-06-15T23:53:41.267"/>
+      <inkml:timestamp xml:id="ts0" timeString="2026-06-16T22:23:23.241"/>
     </inkml:context>
     <inkml:brush xml:id="br0">
       <inkml:brushProperty name="width" value="0.3" units="cm"/>
@@ -1118,7 +1110,7 @@
       <inkml:brushProperty name="ignorePressure" value="1"/>
     </inkml:brush>
   </inkml:definitions>
-  <inkml:trace contextRef="#ctx0" brushRef="#br0">1 291,'666'0,"-656"0,1 0,-1-1,1-1,-1 1,1-1,-1-1,0 0,0-1,0 1,-1-2,1 0,-1 0,0 0,0-1,15-14,12-9,-29 23,0 1,0-1,0 0,0-1,9-12,14-22,-15 22,-2 1,16-31,-28 48,-1 0,0-1,1 1,-1 0,1 0,-1 0,1 0,0 0,0 0,-1 0,1 0,0 0,0 1,0-1,0 0,0 0,0 1,0-1,0 1,0-1,0 1,3-2,-3 3,-1-1,1 0,0 1,0-1,0 1,0-1,0 1,0-1,0 1,-1 0,1-1,0 1,-1 0,1 0,0-1,-1 1,1 0,-1 0,1 0,0 1,2 6,0 0,0-1,-1 1,0 0,2 12,3 27,2-1,19 59,-26-101,0 0,0 0,0 0,0 0,1 0,0 0,-1-1,6 6,-5-7,6 9</inkml:trace>
+  <inkml:trace contextRef="#ctx0" brushRef="#br0">903 120,'61'1,"66"-2,-112-3,-14-1,-24-8,-39-9,26 13,-71-11,-13-2,74 14,13 2,0 1,-44 0,38 7,1 2,-1 1,1 2,0 2,0 2,-62 26,-49 32,141-66,-1 0,1 0,1 1,-1 0,1 0,-1 1,1 0,0 0,1 1,-9 8,15-13,0-1,0 1,0-1,-1 1,1-1,0 0,0 1,0-1,0 1,0-1,0 1,0-1,0 0,0 1,0-1,1 1,-1-1,0 0,0 1,0-1,0 1,1-1,-1 0,0 1,0-1,1 0,-1 1,0-1,1 0,-1 1,0-1,1 0,-1 0,0 1,1-1,-1 0,0 0,1 0,-1 0,1 0,-1 1,1-1,-1 0,0 0,1 0,-1 0,1 0,-1 0,1 0,-1-1,28 4,-26-3,65-3,-49 2,0 0,0 0,0 2,0 0,18 4,-21 0</inkml:trace>
 </inkml:ink>
 </file>
 
@@ -1138,7 +1130,7 @@
           <inkml:channelProperty channel="F" name="resolution" value="0" units="1/dev"/>
         </inkml:channelProperties>
       </inkml:inkSource>
-      <inkml:timestamp xml:id="ts0" timeString="2026-06-15T23:54:03.150"/>
+      <inkml:timestamp xml:id="ts0" timeString="2026-06-16T21:10:40.231"/>
     </inkml:context>
     <inkml:brush xml:id="br0">
       <inkml:brushProperty name="width" value="0.3" units="cm"/>
@@ -1149,7 +1141,7 @@
       <inkml:brushProperty name="ignorePressure" value="1"/>
     </inkml:brush>
   </inkml:definitions>
-  <inkml:trace contextRef="#ctx0" brushRef="#br0">0 0 0,'4394'0'0</inkml:trace>
+  <inkml:trace contextRef="#ctx0" brushRef="#br0">0 0 0,'8357'0'0</inkml:trace>
 </inkml:ink>
 </file>
 
@@ -1161,13 +1153,15 @@
         <inkml:traceFormat>
           <inkml:channel name="X" type="integer" min="-2.14748E9" max="2.14748E9" units="cm"/>
           <inkml:channel name="Y" type="integer" min="-2.14748E9" max="2.14748E9" units="cm"/>
+          <inkml:channel name="F" type="integer" max="32767" units="dev"/>
         </inkml:traceFormat>
         <inkml:channelProperties>
           <inkml:channelProperty channel="X" name="resolution" value="1000" units="1/cm"/>
           <inkml:channelProperty channel="Y" name="resolution" value="1000" units="1/cm"/>
+          <inkml:channelProperty channel="F" name="resolution" value="0" units="1/dev"/>
         </inkml:channelProperties>
       </inkml:inkSource>
-      <inkml:timestamp xml:id="ts0" timeString="2026-06-15T23:54:12.456"/>
+      <inkml:timestamp xml:id="ts0" timeString="2026-06-16T21:10:45.033"/>
     </inkml:context>
     <inkml:brush xml:id="br0">
       <inkml:brushProperty name="width" value="0.3" units="cm"/>
@@ -1178,7 +1172,7 @@
       <inkml:brushProperty name="ignorePressure" value="1"/>
     </inkml:brush>
   </inkml:definitions>
-  <inkml:trace contextRef="#ctx0" brushRef="#br0">123 252,'17'-1,"0"-1,34-8,29-2,12 0,-67 7,49-2,449 8,-505-2,-1-1,33-7,31-4,229 14,-1715-1,1455-2,-24 1,0 1,31 3,-48 2,-18 3,-26 8,25-12,8-3,1 0,-1 0,1 0,0-1,0 1,-1 0,1 1,0-1,0 0,0 0,0 0,0 1,0-1,1 0,-1 1,0-1,1 1,-1-1,1 1,-1-1,1 1,0 0,-1-1,1 1,0-1,0 4,14 45,-1-5,-10-12,-1-1,-2 1,-1 0,-2 0,-11 52,9-60,4-17,0-1,0 0,-1 1,0-1,-1 0,1 0,-1 0,-1 0,1-1,-1 1,-9 10,12-16,0 0,0-1,0 1,0 0,0-1,1 1,-1 0,0 0,1 0,-1-1,0 1,1 0,-1 0,1 0,0 0,-1 0,1 0,0 0,0 0,-1 0,1 1,0-1,0 0,0 0,0 1,1-1,0 0,0 0,0 0,0 0,0 0,0-1,0 1,0 0,0-1,0 1,0-1,0 1,1-1,-1 1,0-1,0 0,0 0,2 0,71 1,-64-2,-108 18,97-18,0 1,1 0,-1 0,0 0,1 0,-1-1,1 1,-1 0,0 0,1-1,-1 1,1-1,-1 1,1 0,-1-1,1 1,-1-1,1 1,-1-1,1 0,0 1,-1-1,1 1,0-1,0 0,-1 1,1-1,0 0,0 1,0-1,0 0,0 1,0-1,0 0,0 1,0-1,0-1,2-33,-2 28,1-5,-2 0,1-1,-1 1,-1 0,-1 0,1 0,-2 0,0 1,0-1,-1 1,0 0,-1 0,0 0,-1 1,-10-12,13 14,0-1,0 0,1 0,0 0,0 0,1-1,0 1,1 0,0-1,1 0,0 1,1-11,-3 51,-8 53,4-50,2 1,1-1,2 1,6 59,-5-91,0 1,1-1,0 0,-1 1,1-1,1 0,-1 0,0 0,1 0,-1 0,1 0,0 0,0 0,0-1,1 1,-1-1,1 1,-1-1,1 0,0 0,-1 0,1 0,0-1,0 1,1-1,-1 0,0 0,0 0,7 1,9 0,-1 0,0-1,1-2,28-2,1-1,1021 2,-547 4,-494-3,52-10,-52 6,50-2,515 8,-550-4,-41 3,-1 0,1 0,-1-1,1 1,-1 0,1-1,-1 1,1 0,-1-1,1 0,-1 1,0-1,1 0,-1 0,0 0,0 0,0 0,0 0,1 0,-1 0,-1 0,1 0,0-1,1-1,-2 2,0 0,-1-1,1 1,-1 0,1 0,-1 0,1 0,-1 0,0 1,1-1,-1 0,0 0,0 0,1 0,-1 1,0-1,0 0,0 1,0-1,0 1,0-1,0 1,0 0,0-1,0 1,-1 0,1 0,0 0,0-1,-2 1,-39-4,39 4,-79-2,43 2,0-2,-45-8,48 5,-1 2,-50 1,49 2,0-1,-39-7,-15-3,-1 4,-145 8,86 2,40-1,-123-5,213-2,22 5,0 0,-1-1,1 1,0 0,0 0,0 0,0 0,0 0,0 0,0-1,0 1,-1 0,1 0,0 0,0 0,0-1,0 1,0 0,0 0,0 0,0 0,0-1,0 1,0 0,0 0,0 0,0 0,0-1,0 1,1 0,-1 0,0 0,0 0,0-1,0 1,0 0,0 0,0 0,0 0,1 0,-1 0,0-1,0 1,0 0,0 0,0 0,0 0,1 0,-1 0,0 0,0 0,1 0,2-2,1 0,0 1,0 0,0 0,0 0,1 0,6 0,100-11,-63 5,62 0,-34 6,109-15,10-4,-138 13,84 2,-83 5,81-12,28-3,-23 2,-90 9,97 4,25-2,-172 2,-1-1,1 1,0-1,-1 0,1 0,0-1,-1 1,0-1,1 0,5-4,-9 6,1 0,-1-1,0 1,1 0,-1-1,0 1,1 0,-1-1,0 1,0 0,0-1,1 1,-1 0,0-1,0 1,0-1,0 1,0 0,0-1,1 1,-1-1,0 1,0-1,0 1,0 0,-1-1,1 1,0-1,0 1,0-1,0 1,0 0,-1-1,0 0,0 0,-1-1,1 1,-1 0,1 0,-1 1,1-1,-1 0,0 0,1 1,-1-1,0 1,-2-1,0 0,-273-51,208 41,44 6,1 2,-31-1,23 1,0 0,1-2,-34-9,26 4,-52-4,7 4,-65-2,125 10,0-1,0 0,-40-13,38 9,0 1,-45-4,45 10,21 1,0 0,0-1,-1 0,1 0,0 0,0-1,0 1,0-1,0 0,0-1,0 1,-9-5,14 5,0 1,1-1,-1 0,0 1,1-1,-1 1,1-1,-1 1,0-1,1 1,-1-1,1 1,0-1,-1 1,1 0,-1-1,1 1,0 0,-1 0,1-1,-1 1,1 0,0 0,-1 0,1 0,0 0,-1 0,1 0,0 0,-1 0,2 0,27-4,411 1,-226 6,589-3,-840-1,1-1,-50-9,39 4,-1 3,-52 2,51 2,-92-11,-83-13,122 16,-127 6,113 3,111-1,2 0,0-1,0 1,0 0,0 0,0 1,0-1,0 1,0-1,0 1,0 0,0 0,1 0,-6 3,8-3,0-1,0 1,1 0,-1-1,0 1,1-1,-1 1,1-1,-1 1,0-1,1 1,-1-1,1 0,-1 1,1-1,-1 0,1 1,-1-1,1 0,0 1,-1-1,1 0,-1 0,1 0,0 0,-1 0,1 0,0 0,-1 0,1 0,-1 0,1 0,1 0,26 4,91 8,55 2,-99-15,-13-1,0 3,96 14,-117-10,47 1,-48-4,53 9,-32-3,1-3,123-6,-66-2,402 3,-518 0,0 1,0-1,0 0,0-1,0 1,0 0,0-1,-1 0,1 0,0 0,0 0,-1 0,1 0,0-1,-1 1,0-1,1 0,-1 1,0-1,0 0,3-3,-3 0,0 0,0 0,0 1,0-1,-1 0,0-1,0 1,0 0,-1 0,0 0,0-8,-1 6,1 0,1 0,-1 0,1 0,0 0,1 0,-1 0,1 1,1-1,-1 0,1 1,0 0,1 0,0 0,0 0,0 0,0 1,1-1,0 1,0 1,0-1,1 1,0 0,-1 0,2 0,10-4,8-9,-19 13,0-1,0 1,0 1,1-1,8-3,-13 7,-1-1,1 1,0 0,-1 0,1-1,-1 1,1 0,-1 0,1 0,0 1,-1-1,1 0,-1 1,1-1,-1 1,1-1,-1 1,1 0,-1-1,0 1,1 0,-1 0,0 0,0 0,0 0,1 0,-1 1,0-1,1 2,6 12,0 0,-1 1,0 0,-1 0,-1 1,-1-1,0 1,-1 0,1 24,0-9,12 46,3 7,-16-66,0-1,1 0,1 1,1-2,0 1,1-1,1 0,16 25,-24-41,0-1,1 1,-1-1,0 0,1 1,-1-1,1 0,-1 0,0 1,1-1,-1 0,1 0,-1 0,1 1,-1-1,1 0,-1 0,1 0,-1 0,1 0,-1 0,1 0,-1 0,1 0,-1 0,1 0,-1 0,1 0,-1-1,0 1,1 0,-1 0,1 0,-1-1,1 1,-1 0,0-1,1 1,-1 0,1-1,-1 1,0 0,0-1,1 1,-1-1,0 1,0-1,1 1,-1 0,0-1,0 1,0-1,0 1,0-1,0 1,0-1,0 0,12-39,-9 31,2-33,-5 36,0 0,1 0,-1 1,1-1,0 0,0 1,1-1,0 0,0 1,0 0,4-6,-6 11,1 0,0 0,-1 1,1-1,-1 0,1 0,-1 1,1-1,-1 0,1 1,-1-1,0 1,1-1,-1 0,1 1,-1-1,0 1,0-1,1 1,-1-1,0 1,0-1,1 1,-1-1,0 1,0 0,0-1,0 1,0-1,0 1,0-1,0 1,0 0,0-1,0 1,0 0,3 27,-1 46,-4-44,2-30,0 0,0 0,0-1,0 1,0 0,0 0,0 0,0 0,-1 0,1 0,0 0,0 0,0 0,0 0,0 0,0 0,-1 0,1 0,0 0,0 0,0 0,0 0,0 0,0 0,-1 0,1 0,0 0,0 0,0 1,0-1,0 0,0 0,0 0,-1 0,1 0,0 0,-6-28,1 0,1 0,1-1,3-56,-3-29,-8 50,-1-14,12 67,-1 1,0-1,-1 0,0 0,-1 1,-6-16,-2 82,1 8,2 1,4 0,6 122,0-57,1-96,1-27,3-23,20-98,-19 72,2-1,2 2,27-64,-38 104,-1 0,0 0,1 0,-1-1,1 1,-1 0,1 0,0 0,-1 0,1 0,0 1,0-1,-1 0,1 0,0 0,0 1,0-1,0 0,0 1,0-1,2 0,-3 2,1-1,0 0,-1 1,1-1,0 1,-1-1,1 1,-1-1,1 1,-1 0,1-1,-1 1,1 0,-1-1,0 1,1 0,-1-1,0 1,0 0,1 0,-1-1,0 2,7 54,-9 308,2-359,0 0,0-1,-1 1,0-1,0 1,0 0,0-1,-1 0,1 1,-1-1,0 0,-1 0,1 0,-1 0,0 0,0 0,0-1,0 0,0 1,-1-1,0 0,1-1,-1 1,0-1,0 1,-1-1,1-1,0 1,-1 0,1-1,-8 1,-14 3,-1-2,1-1,-1-1,-39-3,20 0,-79 4,-103-5,158-8,-15-1,56 12,0-2,-56-10,57 7,0 2,0 0,-43 3,40 1,-1-2,-44-7,-109-7,183 11,12-1,14-3,78 1,-76 7,1-2,50-9,-37 5,1 1,-1 2,1 2,48 4,6 0,-44-3,-45 0,-34 0,-883 0,955 1,-30 1,0-1,0-1,0 0,0-1,0-1,22-4,-21-3,-4-1</inkml:trace>
+  <inkml:trace contextRef="#ctx0" brushRef="#br0">0 0 0,'8238'0'0</inkml:trace>
 </inkml:ink>
 </file>
 
@@ -1198,7 +1192,7 @@
           <inkml:channelProperty channel="F" name="resolution" value="0" units="1/dev"/>
         </inkml:channelProperties>
       </inkml:inkSource>
-      <inkml:timestamp xml:id="ts0" timeString="2026-06-15T23:54:37.786"/>
+      <inkml:timestamp xml:id="ts0" timeString="2026-06-16T21:10:50.982"/>
     </inkml:context>
     <inkml:brush xml:id="br0">
       <inkml:brushProperty name="width" value="0.3" units="cm"/>
@@ -1209,7 +1203,7 @@
       <inkml:brushProperty name="ignorePressure" value="1"/>
     </inkml:brush>
   </inkml:definitions>
-  <inkml:trace contextRef="#ctx0" brushRef="#br0">0 0 0,'2780'0'0</inkml:trace>
+  <inkml:trace contextRef="#ctx0" brushRef="#br0">0 0 0,'8333'0'0</inkml:trace>
 </inkml:ink>
 </file>
 
@@ -1227,7 +1221,7 @@
           <inkml:channelProperty channel="Y" name="resolution" value="1000" units="1/cm"/>
         </inkml:channelProperties>
       </inkml:inkSource>
-      <inkml:timestamp xml:id="ts0" timeString="2026-06-15T23:54:47.377"/>
+      <inkml:timestamp xml:id="ts0" timeString="2026-06-16T21:10:51.869"/>
     </inkml:context>
     <inkml:brush xml:id="br0">
       <inkml:brushProperty name="width" value="0.3" units="cm"/>
@@ -1238,7 +1232,67 @@
       <inkml:brushProperty name="ignorePressure" value="1"/>
     </inkml:brush>
   </inkml:definitions>
-  <inkml:trace contextRef="#ctx0" brushRef="#br0">244 290,'107'2,"119"-4,-156-10,-49 8,0 0,32-1,78 7,96-3,-138-10,-45 5,48-1,1107 8,-1182-2,1-1,32-7,30-4,-62 13,-5 0,0-1,0 0,0 0,24-7,-34 7,1 0,-1 0,0-1,1 0,-1 0,0 0,0 0,0 0,-1 0,1-1,0 1,-1-1,0 0,0 0,0 0,0 0,0 0,0 0,-1-1,1 1,-1-1,1-3,-1 35,0 1,-2-1,-8 46,3-45,1 1,1 1,1 53,3-47,-11 71,6-70,2 0,3 77,-1 25,-11-69,8-49,0 0,0 29,4-47,0 0,0 0,0 0,-1-1,1 1,-1 0,0-1,0 1,0 0,-1-1,1 1,-1-1,0 0,0 0,0 1,0-1,-1 0,1-1,-1 1,-5 4,3-4,-1 0,0 0,1-1,-1 0,-1 0,1 0,0-1,0 0,-1 0,1 0,-11-1,-139 11,-23 0,-677-11,839-1,0-1,-33-8,-30-2,7 13,54 1,0-1,0-1,0-1,0-1,0 0,0-1,-22-7,39 9,0 0,0 0,0-1,0 1,0 0,0-1,0 1,0-1,0 0,1 0,-1 1,1-1,-1 0,1 0,0-1,0 1,0 0,0 0,0 0,0-1,1 1,-1 0,1-1,0 1,-1-1,1 1,0-1,0 1,1 0,0-4,1-9,1 0,1 0,10-27,-2 9,20-114,-29 130,-1 0,-2 0,1 0,-2-1,0 1,-7-30,7 42,-1 0,0 0,-1 0,1 0,-1 0,0 0,0 1,0-1,0 1,-1 0,0 0,0 1,0-1,0 1,-1-1,1 1,-1 1,0-1,-8-3,-10-2,1 1,-2 1,-31-5,-16-5,19 4,0 2,0 3,-1 1,1 3,-59 4,69 0,28-2,10 0,0 1,0 0,0-1,0 2,0-1,0 0,0 1,0 0,0-1,0 2,0-1,0 0,-6 4,10-5,0 1,0-1,0 1,0-1,0 1,0 0,0-1,0 1,0-1,0 1,0-1,0 1,0 0,0-1,0 1,1-1,-1 1,0-1,0 1,1-1,-1 1,0-1,1 0,-1 1,0-1,1 1,-1-1,1 0,-1 1,1-1,-1 0,1 1,-1-1,1 0,-1 0,1 1,0-1,21 11,3-6,-1 0,1-2,0 0,1-2,-1-1,31-4,17 1,473 3,-556-2,0 0,-1 0,1-1,-12-5,-4-1,-2 2,-1 1,-38-3,-36-6,69 9,0 2,0 1,-56 3,57 2,0-3,-1 0,1-2,-35-9,65 12,1-1,-1 0,0 0,1-1,-1 1,1-1,-1 1,1-1,0 0,0 1,0-1,0 0,0-1,0 1,0 0,1-1,-1 1,1 0,-1-1,1 0,-1-4,-2-5,1-1,1 1,-2-23,0-4,2 27,0-1,0 0,-2 1,0 0,0 0,-1 0,0 0,-1 1,0-1,-1 2,0-1,-1 1,0 0,-19-17,21 22,0 0,-1 0,0 1,0 0,0 0,0 1,-1-1,-14-3,-66-9,76 14,9 1,-1 1,1 0,-1-1,1 1,-1 0,1 1,-1-1,1 1,-1-1,1 1,-1 0,1 0,0 1,-1-1,1 1,0-1,0 1,0 0,0 0,1 1,-1-1,0 0,1 1,0 0,0-1,-1 1,2 0,-1 0,-3 7,-1 6,0 1,1 0,1 0,1 0,-1 18,-5 17,3-15,2 1,2 0,1 0,7 63,-2-84,0 1,2-1,0 0,0-1,2 0,0 0,20 28,-17-25,33 46,-33-52,-1 0,0 2,-1-1,-1 1,0 0,-1 1,-1 0,0 0,-1 0,3 19,-4-10,1 0,1 0,12 30,7 26,-23-73,0 4,1 0,1 0,0 0,0 0,8 13,-9-21,-1-1,1 1,0-1,0 1,0-1,1 0,-1 0,1-1,0 1,-1-1,1 0,0 0,1 0,-1 0,0-1,0 1,1-1,5 0,23 3,0-2,0-1,35-4,6 1,-62 1,1 0,0-1,-1 0,0-1,19-6,-27 8,0 0,0-1,0 1,0-1,-1 0,1 0,0-1,-1 1,1-1,-1 0,0 1,0-1,0-1,0 1,-1 0,1-1,-1 1,0-1,3-6,-5 9,1-1,-1 0,0 0,0 1,0-1,0 0,0 1,0-1,0 0,-1 1,1-1,0 0,-1 1,1-1,-1 0,0 1,0-1,0 1,1-1,-1 1,-3-3,1 2,1-1,-2 1,1 0,0-1,0 2,-1-1,1 0,-1 1,-5-2,-2 0,0 0,0 1,0 1,0 0,-21 1,30 0,0 0,0 0,0 0,0 1,0-1,0 0,1 1,-1 0,0-1,0 1,0 0,1 0,-1 0,1 0,-1 0,0 0,1 1,0-1,-1 0,1 1,0-1,0 1,0-1,0 1,0 0,0-1,0 1,0 0,0 2,1-2,0-1,0 1,1 0,-1-1,0 1,1 0,-1-1,1 1,0-1,-1 1,1-1,0 1,0-1,0 1,0-1,0 0,0 0,0 1,1-1,-1 0,0 0,1 0,-1 0,0-1,1 1,-1 0,1-1,0 1,-1-1,1 1,-1-1,1 1,2-1,43 4,0-1,86-7,-115 3,-426 1,394-1,0-1,0 0,0-1,0-1,-26-10,-38-9,73 22,0 0,0 0,0-1,1 0,-1 0,1 0,-1 0,-5-5,9 6,1 1,0 0,-1 0,1-1,-1 1,1 0,0-1,-1 1,1-1,0 1,0 0,-1-1,1 1,0-1,0 1,-1 0,1-1,0 1,0-1,0 1,0-1,0 1,0-1,0 1,0-1,0 1,0-1,0 1,0-1,0 1,1-1,0 0,0 0,0 0,1 0,-1 0,1 0,-1 0,1 1,-1-1,1 0,-1 1,1 0,-1-1,1 1,0 0,1 0,52-5,0 2,65 6,-12 0,22-5,143 5,-203 8,-48-7,0 0,30 0,-18-2,0 1,35 8,-58-9,135 18,-109-14,1-2,-1-1,0-2,66-7,-102 7,0-1,0 0,0 0,1 0,-1 0,0-1,0 1,0 0,0 0,1-1,-1 1,0-1,0 1,0-1,0 1,0-1,0 1,0-1,0 0,0 0,-1 0,1 1,0-1,0 0,-1 0,1 0,0 0,-1 0,1 0,0-2,-2 2,1 0,-1-1,1 1,-1 0,0 0,1 0,-1-1,0 1,0 0,0 0,1 0,-1 0,0 0,0 1,-1-1,1 0,0 0,0 1,0-1,0 1,-1-1,1 1,0-1,-1 1,1 0,-3-1,-94-14,74 13,1-1,-43-11,65 14,1 0,0 0,0 0,-1 0,1 0,0 0,0 0,-1 0,1 0,0 0,0 0,-1 0,1 0,0 0,0 0,-1 0,1 0,0 0,0 0,-1 0,1-1,0 1,0 0,0 0,-1 0,1 0,0-1,0 1,0 0,0 0,-1 0,1-1,0 1,0 0,0 0,0-1,0 1,0 0,0 0,0-1,0 1,0 0,0 0,0-1,0 1,0 0,0 0,0-1,0 1,16-6,32 0,-44 5,71-9,-33 4,63-1,-59 5,56-10,-22 2,-2-1,-44 6,54-3,-77 8,0-1,1 0,-1-1,18-5,-25 6,0 0,-1-1,1 1,-1 0,0-1,0 0,1 0,-1 0,0 0,0 0,-1-1,1 1,0-1,-1 0,0 0,0 0,4-6,-5 8,-1 0,0 0,0 0,1 0,-1 0,0 0,0 0,0 0,0 0,0 0,0 0,0 0,-1 0,1 0,0 0,0 0,-1 0,1 0,-1 0,1 0,-1 1,1-1,-1 0,1 0,-1 0,-1 0,-29-17,-38 2,-40-8,84 17,0 0,0 2,0 1,-31 0,33 2,1 0,-27-6,-37-3,169-10,-52 18,-9 2,0-2,0 0,0-1,-1-1,23-9,-26 8,-1 1,1 1,31-4,10-1,-25 3,-27 6,1-1,0 0,0 0,-1-1,1 0,-1 0,1-1,-1 0,0 0,0-1,0 0,12-9,-19 13,1-1,0 0,-1 0,1 0,0 0,-1 0,1 1,-1-1,1 0,-1 0,0 0,1-1,-1 1,0 0,0 0,0 0,0 0,0 0,0 0,0 0,0 0,0 0,0 0,0 0,-1 0,1 0,0 0,-1 0,0-2,-1 1,0 0,0-1,-1 1,1 0,0 0,-1 0,1 1,-1-1,0 1,-4-3,-7-1,-1 0,-30-7,17 8,-54-1,56 4,0-1,-41-7,34 4,0 1,-1 2,-57 3,41 0,612-1,-541 1,0 1,35 9,-11-2,-40-8,0 1,0-1,0 1,-1-1,1 1,-1 1,1-1,-1 1,0-1,1 1,-1 1,-1-1,1 0,0 1,-1 0,0 0,3 4,4 8,-1 0,-1 1,9 26,-14-32,1 1,1-1,0 0,0 0,1-1,1 0,0 0,0 0,12 12,36 11,-20-14,-31-16,0 0,0 0,-1 0,1 1,-1-1,0 1,0 0,0 0,0 0,-1 0,0 1,0-1,0 1,0-1,-1 1,1 0,-1-1,0 1,-1 0,1 0,-1 0,-1 7,9 40,-8-52,0 0,0 1,0-1,-1 0,1 0,0 1,0-1,0 0,0 0,0 1,0-1,0 0,0 0,0 0,0 1,0-1,0 0,0 0,0 1,0-1,0 0,1 0,-1 0,0 1,0-1,0 0,0 0,0 0,0 1,1-1,-1 0,0 0,0 0,0 0,1 1,-1-1,0 0,0 0,0 0,1 0,-1 0,0 0,0 0,1 0,-1 0,0 0,0 0,0 0,1 0,-1 0,0 0,0 0,1 0,-1 0,0 0,0 0,1 0,-1 0,6-19,-1-28,-4 5,-3-185,-21 107,20 96,-1 0,-1 0,-9-23,-8-45,-3-51,3 24,-4 24,5 22,20 69,0 1,-1-1,0 0,1 0,-1 1,-1-1,1 1,0 0,-1 0,0 0,0 0,0 0,0 0,0 1,0-1,-1 1,1 0,-1 0,0 1,1-1,-1 1,0-1,0 1,0 0,0 1,-4-1,-16-2,1 1,0 1,-34 3,28-1,-10 1,0 1,0 2,1 2,0 1,0 3,-40 15,-16 8,-115 47,52-8,84-37,-30 17,7-5,8-5,72-36,0 0,0 0,0-2,-19 5,19-6,0 1,0 0,1 1,-17 9,30-14,0 0,0 0,0 0,0 1,1-1,-1 0,1 1,-1-1,1 1,-1 0,1-1,0 1,0 0,-2 3,3-4,0 0,0 0,0 0,0 0,0 0,0 0,0 0,0 0,0 0,0 0,0 0,0 0,1 0,-1 0,0-1,1 1,-1 0,1 0,-1 0,1 0,1 1,1 1,0-1,0 0,0 1,0-1,0 0,0-1,1 1,-1-1,1 1,0-1,-1 0,1 0,0-1,4 1,18 2,0 0,0 1,0 2,-1 1,0 1,35 15,-45-17,0-1,1-1,29 5,-2-1,124 19,-129-22,-34-5,0 1,-1 0,1 0,-1 0,1 0,-1 1,1-1,-1 1,0 0,0 0,0 0,0 1,0-1,0 1,2 3,-4-5,0 0,0 1,0-1,-1 1,1-1,-1 1,1-1,-1 1,1-1,-1 1,0-1,0 1,0-1,0 1,0 0,0-1,0 1,0-1,-1 1,1 0,-1-1,1 1,-1-1,1 0,-1 1,0-1,0 1,0-1,0 0,0 0,0 1,0-1,0 0,0 0,0 0,-1 0,-1 1,-20 17,-1-1,0-1,-53 27,47-29,0 2,1 0,1 2,0 1,-38 37,50-45,0 0,-1 0,0-2,-33 16,-13 8,43-24,0 0,0-1,-1-1,0-1,-1-1,0 0,0-2,-30 2,-26-2,-83-6,45-1,-407 3,518 0,-1 1,1-1,-1 1,1 0,0 1,-1-1,-5 3,10-3,1-1,-1 0,0 1,0-1,0 1,0-1,1 1,-1-1,0 1,0-1,1 1,-1 0,1-1,-1 1,0 0,1 0,-1-1,1 1,0 0,-1 0,1 0,0 0,-1 0,1 0,0-1,0 1,0 0,0 0,0 0,0 0,0 0,0 0,0 0,0 0,0 0,1 0,-1-1,0 1,1 0,-1 0,1 0,-1 0,1-1,-1 1,1 0,-1 0,1-1,0 1,-1 0,3 0,4 4,0-1,1 0,-1 0,1-1,0 0,0 0,0-1,1 0,-1-1,1 0,8 1,15 3,111 17,-127-18,22 5,1-1,0-3,57 3,-68-10,1 0,35-9,-36 6,26-1,1 2,99 6,-43 1,364-3,-451-2,0-1,0 0,45-14,-45 10,0 2,-1 0,49-2,73 9,138-4,-257-1,-1-2,0-1,29-11,-32 10,-6 3</inkml:trace>
+  <inkml:trace contextRef="#ctx0" brushRef="#br0">1 0,'0'0</inkml:trace>
+</inkml:ink>
+</file>
+
+<file path=ppt/ink/ink38.xml><?xml version="1.0" encoding="utf-8"?>
+<inkml:ink xmlns:inkml="http://www.w3.org/2003/InkML">
+  <inkml:definitions>
+    <inkml:context xml:id="ctx0">
+      <inkml:inkSource xml:id="inkSrc0">
+        <inkml:traceFormat>
+          <inkml:channel name="X" type="integer" min="-2.14748E9" max="2.14748E9" units="cm"/>
+          <inkml:channel name="Y" type="integer" min="-2.14748E9" max="2.14748E9" units="cm"/>
+        </inkml:traceFormat>
+        <inkml:channelProperties>
+          <inkml:channelProperty channel="X" name="resolution" value="1000" units="1/cm"/>
+          <inkml:channelProperty channel="Y" name="resolution" value="1000" units="1/cm"/>
+        </inkml:channelProperties>
+      </inkml:inkSource>
+      <inkml:timestamp xml:id="ts0" timeString="2026-06-16T21:10:59.304"/>
+    </inkml:context>
+    <inkml:brush xml:id="br0">
+      <inkml:brushProperty name="width" value="0.3" units="cm"/>
+      <inkml:brushProperty name="height" value="0.6" units="cm"/>
+      <inkml:brushProperty name="color" value="#00F900"/>
+      <inkml:brushProperty name="tip" value="rectangle"/>
+      <inkml:brushProperty name="rasterOp" value="maskPen"/>
+      <inkml:brushProperty name="ignorePressure" value="1"/>
+    </inkml:brush>
+  </inkml:definitions>
+  <inkml:trace contextRef="#ctx0" brushRef="#br0">13 78,'42'-2,"0"-2,0-2,79-21,-94 22,-1 2,1 0,27 1,-22 1,55-8,-27 2,1 1,0 4,65 5,-7 0,-3-5,125 5,-164 8,-48-6,54 3,534-9,-589 3,52 8,-52-5,50 2,-31-7,-16-1,0 2,0 1,52 10,-60-8,1-1,0-1,33-1,-32-2,0 2,-1 1,26 4,-6 1,0-2,0-2,75-4,56 3,-104 9,-49-7,0 0,29 0,544-5,-575 0,1-1,35-9,-11 2,-26 5,-16 3,0 0,0 0,0 1,0-1,0 1,0 0,1 0,-1 0,3 0,-4 1,-1-1,0 1,0 0,0 0,0-1,0 1,0 0,0 0,0 0,0 0,0 0,0 0,0 1,-1-1,1 0,-1 0,1 0,-1 1,1-1,-1 0,1 1,-1-1,0 0,0 1,0-1,0 2,4 44,-3-1,-4 48,-1 6,4 399,0-496,0 0,0 1,0-1,-1 1,1-1,-1 1,0-1,0 0,0 0,-1 1,1-1,-1 0,1 0,-1 0,0 0,-1-1,1 1,0-1,-1 1,1-1,-1 0,-3 3,-1-2,0 1,1-1,-2-1,1 1,0-1,0 0,-1-1,1 0,-12 0,-70 11,-13 1,11-2,66-6,-48 2,-1-8,37 0,1 1,-1 1,1 2,-39 9,-91 12,120-17,1-2,-2-2,-81-6,23 0,-1082 3,1169-1,0-1,-31-7,-31-3,-232 11,148 2,147-2,-1 0,-32-9,-30-2,-29 13,-43-2,81-11,49 8,0 0,-29 0,-69 6,-93-4,211 2,-1 0,1-1,0 1,0-1,-1 0,1 0,0 0,0 0,0 0,0 0,0 0,0-1,0 1,0-1,0 1,1-1,-1 0,0 0,1 0,0 0,-1 0,1 0,0 0,0 0,0 0,1-1,-1 1,0 0,1-1,-1-2,-1-10,1-1,1 0,2-29,-1 33,0 0,-1-1,-2-17,-42-164,38 165,5 26,0-1,0 0,0 0,0 1,1-1,0 0,0 0,0-5,1 7,-1 0,1 0,0 0,0 0,0 0,1 0,-1 1,0-1,1 0,-1 1,1-1,-1 1,1-1,0 1,-1 0,1 0,0 0,0 0,2-1,17-6,0 0,0 1,0 2,1 0,0 1,0 2,0 0,0 1,26 2,49-3,-10-9,-51 5,55-1,1215 8,-1278 1,51 8,-50-5,48 2,1015-7,-1072 1,-1 1,38 9,-10-1,71 14,-65-13,26 2,-599-16,265 5,-600-2,841 1,0 1,0 1,0 0,1 0,-1 1,1 1,-22 11,22-10,0 0,-1-1,0 0,0-1,0-1,0 0,-19 1,-98-6,-71 3,132 10,48-6,0-2,-30 1,-120-9,202-5,1 1,0 1,0 2,1 1,34-2,164 7,-103 3,1416-3,-1526-1,1-1,32-7,30-4,-35 10,53-11,-92 13,140-19,-84 8,0 3,1 2,97 3,-90 4,-49 0</inkml:trace>
+</inkml:ink>
+</file>
+
+<file path=ppt/ink/ink39.xml><?xml version="1.0" encoding="utf-8"?>
+<inkml:ink xmlns:inkml="http://www.w3.org/2003/InkML">
+  <inkml:definitions>
+    <inkml:context xml:id="ctx0">
+      <inkml:inkSource xml:id="inkSrc0">
+        <inkml:traceFormat>
+          <inkml:channel name="X" type="integer" min="-2.14748E9" max="2.14748E9" units="cm"/>
+          <inkml:channel name="Y" type="integer" min="-2.14748E9" max="2.14748E9" units="cm"/>
+          <inkml:channel name="F" type="integer" max="32767" units="dev"/>
+        </inkml:traceFormat>
+        <inkml:channelProperties>
+          <inkml:channelProperty channel="X" name="resolution" value="1000" units="1/cm"/>
+          <inkml:channelProperty channel="Y" name="resolution" value="1000" units="1/cm"/>
+          <inkml:channelProperty channel="F" name="resolution" value="0" units="1/dev"/>
+        </inkml:channelProperties>
+      </inkml:inkSource>
+      <inkml:timestamp xml:id="ts0" timeString="2026-06-16T21:11:02.030"/>
+    </inkml:context>
+    <inkml:brush xml:id="br0">
+      <inkml:brushProperty name="width" value="0.3" units="cm"/>
+      <inkml:brushProperty name="height" value="0.6" units="cm"/>
+      <inkml:brushProperty name="color" value="#00F900"/>
+      <inkml:brushProperty name="tip" value="rectangle"/>
+      <inkml:brushProperty name="rasterOp" value="maskPen"/>
+      <inkml:brushProperty name="ignorePressure" value="1"/>
+    </inkml:brush>
+  </inkml:definitions>
+  <inkml:trace contextRef="#ctx0" brushRef="#br0">0 0 0,'4061'0'0</inkml:trace>
 </inkml:ink>
 </file>
 
@@ -1271,6 +1325,310 @@
 </inkml:ink>
 </file>
 
+<file path=ppt/ink/ink40.xml><?xml version="1.0" encoding="utf-8"?>
+<inkml:ink xmlns:inkml="http://www.w3.org/2003/InkML">
+  <inkml:definitions>
+    <inkml:context xml:id="ctx0">
+      <inkml:inkSource xml:id="inkSrc0">
+        <inkml:traceFormat>
+          <inkml:channel name="X" type="integer" min="-2.14748E9" max="2.14748E9" units="cm"/>
+          <inkml:channel name="Y" type="integer" min="-2.14748E9" max="2.14748E9" units="cm"/>
+          <inkml:channel name="F" type="integer" max="32767" units="dev"/>
+        </inkml:traceFormat>
+        <inkml:channelProperties>
+          <inkml:channelProperty channel="X" name="resolution" value="1000" units="1/cm"/>
+          <inkml:channelProperty channel="Y" name="resolution" value="1000" units="1/cm"/>
+          <inkml:channelProperty channel="F" name="resolution" value="0" units="1/dev"/>
+        </inkml:channelProperties>
+      </inkml:inkSource>
+      <inkml:timestamp xml:id="ts0" timeString="2026-06-16T21:11:05.849"/>
+    </inkml:context>
+    <inkml:brush xml:id="br0">
+      <inkml:brushProperty name="width" value="0.3" units="cm"/>
+      <inkml:brushProperty name="height" value="0.6" units="cm"/>
+      <inkml:brushProperty name="color" value="#00F900"/>
+      <inkml:brushProperty name="tip" value="rectangle"/>
+      <inkml:brushProperty name="rasterOp" value="maskPen"/>
+      <inkml:brushProperty name="ignorePressure" value="1"/>
+    </inkml:brush>
+  </inkml:definitions>
+  <inkml:trace contextRef="#ctx0" brushRef="#br0">0 24 0,'4106'-24'0</inkml:trace>
+</inkml:ink>
+</file>
+
+<file path=ppt/ink/ink41.xml><?xml version="1.0" encoding="utf-8"?>
+<inkml:ink xmlns:inkml="http://www.w3.org/2003/InkML">
+  <inkml:definitions>
+    <inkml:context xml:id="ctx0">
+      <inkml:inkSource xml:id="inkSrc0">
+        <inkml:traceFormat>
+          <inkml:channel name="X" type="integer" min="-2.14748E9" max="2.14748E9" units="cm"/>
+          <inkml:channel name="Y" type="integer" min="-2.14748E9" max="2.14748E9" units="cm"/>
+          <inkml:channel name="F" type="integer" max="32767" units="dev"/>
+        </inkml:traceFormat>
+        <inkml:channelProperties>
+          <inkml:channelProperty channel="X" name="resolution" value="1000" units="1/cm"/>
+          <inkml:channelProperty channel="Y" name="resolution" value="1000" units="1/cm"/>
+          <inkml:channelProperty channel="F" name="resolution" value="0" units="1/dev"/>
+        </inkml:channelProperties>
+      </inkml:inkSource>
+      <inkml:timestamp xml:id="ts0" timeString="2026-06-16T21:11:08.712"/>
+    </inkml:context>
+    <inkml:brush xml:id="br0">
+      <inkml:brushProperty name="width" value="0.3" units="cm"/>
+      <inkml:brushProperty name="height" value="0.6" units="cm"/>
+      <inkml:brushProperty name="color" value="#00F900"/>
+      <inkml:brushProperty name="tip" value="rectangle"/>
+      <inkml:brushProperty name="rasterOp" value="maskPen"/>
+      <inkml:brushProperty name="ignorePressure" value="1"/>
+    </inkml:brush>
+  </inkml:definitions>
+  <inkml:trace contextRef="#ctx0" brushRef="#br0">0 0 0,'4059'0'0</inkml:trace>
+</inkml:ink>
+</file>
+
+<file path=ppt/ink/ink42.xml><?xml version="1.0" encoding="utf-8"?>
+<inkml:ink xmlns:inkml="http://www.w3.org/2003/InkML">
+  <inkml:definitions>
+    <inkml:context xml:id="ctx0">
+      <inkml:inkSource xml:id="inkSrc0">
+        <inkml:traceFormat>
+          <inkml:channel name="X" type="integer" min="-2.14748E9" max="2.14748E9" units="cm"/>
+          <inkml:channel name="Y" type="integer" min="-2.14748E9" max="2.14748E9" units="cm"/>
+          <inkml:channel name="F" type="integer" max="32767" units="dev"/>
+        </inkml:traceFormat>
+        <inkml:channelProperties>
+          <inkml:channelProperty channel="X" name="resolution" value="1000" units="1/cm"/>
+          <inkml:channelProperty channel="Y" name="resolution" value="1000" units="1/cm"/>
+          <inkml:channelProperty channel="F" name="resolution" value="0" units="1/dev"/>
+        </inkml:channelProperties>
+      </inkml:inkSource>
+      <inkml:timestamp xml:id="ts0" timeString="2026-06-16T21:11:12.777"/>
+    </inkml:context>
+    <inkml:brush xml:id="br0">
+      <inkml:brushProperty name="width" value="0.3" units="cm"/>
+      <inkml:brushProperty name="height" value="0.6" units="cm"/>
+      <inkml:brushProperty name="color" value="#00F900"/>
+      <inkml:brushProperty name="tip" value="rectangle"/>
+      <inkml:brushProperty name="rasterOp" value="maskPen"/>
+      <inkml:brushProperty name="ignorePressure" value="1"/>
+    </inkml:brush>
+  </inkml:definitions>
+  <inkml:trace contextRef="#ctx0" brushRef="#br0">0 0 0,'4059'25'0</inkml:trace>
+</inkml:ink>
+</file>
+
+<file path=ppt/ink/ink43.xml><?xml version="1.0" encoding="utf-8"?>
+<inkml:ink xmlns:inkml="http://www.w3.org/2003/InkML">
+  <inkml:definitions>
+    <inkml:context xml:id="ctx0">
+      <inkml:inkSource xml:id="inkSrc0">
+        <inkml:traceFormat>
+          <inkml:channel name="X" type="integer" min="-2.14748E9" max="2.14748E9" units="cm"/>
+          <inkml:channel name="Y" type="integer" min="-2.14748E9" max="2.14748E9" units="cm"/>
+          <inkml:channel name="F" type="integer" max="32767" units="dev"/>
+        </inkml:traceFormat>
+        <inkml:channelProperties>
+          <inkml:channelProperty channel="X" name="resolution" value="1000" units="1/cm"/>
+          <inkml:channelProperty channel="Y" name="resolution" value="1000" units="1/cm"/>
+          <inkml:channelProperty channel="F" name="resolution" value="0" units="1/dev"/>
+        </inkml:channelProperties>
+      </inkml:inkSource>
+      <inkml:timestamp xml:id="ts0" timeString="2026-06-16T21:11:20.186"/>
+    </inkml:context>
+    <inkml:brush xml:id="br0">
+      <inkml:brushProperty name="width" value="0.3" units="cm"/>
+      <inkml:brushProperty name="height" value="0.6" units="cm"/>
+      <inkml:brushProperty name="color" value="#00F900"/>
+      <inkml:brushProperty name="tip" value="rectangle"/>
+      <inkml:brushProperty name="rasterOp" value="maskPen"/>
+      <inkml:brushProperty name="ignorePressure" value="1"/>
+    </inkml:brush>
+  </inkml:definitions>
+  <inkml:trace contextRef="#ctx0" brushRef="#br0">0 0 0,'2660'0'0</inkml:trace>
+</inkml:ink>
+</file>
+
+<file path=ppt/ink/ink44.xml><?xml version="1.0" encoding="utf-8"?>
+<inkml:ink xmlns:inkml="http://www.w3.org/2003/InkML">
+  <inkml:definitions>
+    <inkml:context xml:id="ctx0">
+      <inkml:inkSource xml:id="inkSrc0">
+        <inkml:traceFormat>
+          <inkml:channel name="X" type="integer" min="-2.14748E9" max="2.14748E9" units="cm"/>
+          <inkml:channel name="Y" type="integer" min="-2.14748E9" max="2.14748E9" units="cm"/>
+          <inkml:channel name="F" type="integer" max="32767" units="dev"/>
+        </inkml:traceFormat>
+        <inkml:channelProperties>
+          <inkml:channelProperty channel="X" name="resolution" value="1000" units="1/cm"/>
+          <inkml:channelProperty channel="Y" name="resolution" value="1000" units="1/cm"/>
+          <inkml:channelProperty channel="F" name="resolution" value="0" units="1/dev"/>
+        </inkml:channelProperties>
+      </inkml:inkSource>
+      <inkml:timestamp xml:id="ts0" timeString="2026-06-16T21:11:25.035"/>
+    </inkml:context>
+    <inkml:brush xml:id="br0">
+      <inkml:brushProperty name="width" value="0.3" units="cm"/>
+      <inkml:brushProperty name="height" value="0.6" units="cm"/>
+      <inkml:brushProperty name="color" value="#00F900"/>
+      <inkml:brushProperty name="tip" value="rectangle"/>
+      <inkml:brushProperty name="rasterOp" value="maskPen"/>
+      <inkml:brushProperty name="ignorePressure" value="1"/>
+    </inkml:brush>
+  </inkml:definitions>
+  <inkml:trace contextRef="#ctx0" brushRef="#br0">0 0 0,'2564'0'0</inkml:trace>
+</inkml:ink>
+</file>
+
+<file path=ppt/ink/ink45.xml><?xml version="1.0" encoding="utf-8"?>
+<inkml:ink xmlns:inkml="http://www.w3.org/2003/InkML">
+  <inkml:definitions>
+    <inkml:context xml:id="ctx0">
+      <inkml:inkSource xml:id="inkSrc0">
+        <inkml:traceFormat>
+          <inkml:channel name="X" type="integer" min="-2.14748E9" max="2.14748E9" units="cm"/>
+          <inkml:channel name="Y" type="integer" min="-2.14748E9" max="2.14748E9" units="cm"/>
+          <inkml:channel name="F" type="integer" max="32767" units="dev"/>
+        </inkml:traceFormat>
+        <inkml:channelProperties>
+          <inkml:channelProperty channel="X" name="resolution" value="1000" units="1/cm"/>
+          <inkml:channelProperty channel="Y" name="resolution" value="1000" units="1/cm"/>
+          <inkml:channelProperty channel="F" name="resolution" value="0" units="1/dev"/>
+        </inkml:channelProperties>
+      </inkml:inkSource>
+      <inkml:timestamp xml:id="ts0" timeString="2026-06-16T21:11:29.420"/>
+    </inkml:context>
+    <inkml:brush xml:id="br0">
+      <inkml:brushProperty name="width" value="0.3" units="cm"/>
+      <inkml:brushProperty name="height" value="0.6" units="cm"/>
+      <inkml:brushProperty name="color" value="#00F900"/>
+      <inkml:brushProperty name="tip" value="rectangle"/>
+      <inkml:brushProperty name="rasterOp" value="maskPen"/>
+      <inkml:brushProperty name="ignorePressure" value="1"/>
+    </inkml:brush>
+  </inkml:definitions>
+  <inkml:trace contextRef="#ctx0" brushRef="#br0">0 0 0,'0'343'0,"2532"-343"0,-2532-343 0,-2532 343 0</inkml:trace>
+</inkml:ink>
+</file>
+
+<file path=ppt/ink/ink46.xml><?xml version="1.0" encoding="utf-8"?>
+<inkml:ink xmlns:inkml="http://www.w3.org/2003/InkML">
+  <inkml:definitions>
+    <inkml:context xml:id="ctx0">
+      <inkml:inkSource xml:id="inkSrc0">
+        <inkml:traceFormat>
+          <inkml:channel name="X" type="integer" min="-2.14748E9" max="2.14748E9" units="cm"/>
+          <inkml:channel name="Y" type="integer" min="-2.14748E9" max="2.14748E9" units="cm"/>
+        </inkml:traceFormat>
+        <inkml:channelProperties>
+          <inkml:channelProperty channel="X" name="resolution" value="1000" units="1/cm"/>
+          <inkml:channelProperty channel="Y" name="resolution" value="1000" units="1/cm"/>
+        </inkml:channelProperties>
+      </inkml:inkSource>
+      <inkml:timestamp xml:id="ts0" timeString="2026-06-16T21:11:31.176"/>
+    </inkml:context>
+    <inkml:brush xml:id="br0">
+      <inkml:brushProperty name="width" value="0.3" units="cm"/>
+      <inkml:brushProperty name="height" value="0.6" units="cm"/>
+      <inkml:brushProperty name="color" value="#00F900"/>
+      <inkml:brushProperty name="tip" value="rectangle"/>
+      <inkml:brushProperty name="rasterOp" value="maskPen"/>
+      <inkml:brushProperty name="ignorePressure" value="1"/>
+    </inkml:brush>
+  </inkml:definitions>
+  <inkml:trace contextRef="#ctx0" brushRef="#br0">1 0,'0'4,"0"6,0 4,4 1,1-3</inkml:trace>
+</inkml:ink>
+</file>
+
+<file path=ppt/ink/ink47.xml><?xml version="1.0" encoding="utf-8"?>
+<inkml:ink xmlns:inkml="http://www.w3.org/2003/InkML">
+  <inkml:definitions>
+    <inkml:context xml:id="ctx0">
+      <inkml:inkSource xml:id="inkSrc0">
+        <inkml:traceFormat>
+          <inkml:channel name="X" type="integer" min="-2.14748E9" max="2.14748E9" units="cm"/>
+          <inkml:channel name="Y" type="integer" min="-2.14748E9" max="2.14748E9" units="cm"/>
+        </inkml:traceFormat>
+        <inkml:channelProperties>
+          <inkml:channelProperty channel="X" name="resolution" value="1000" units="1/cm"/>
+          <inkml:channelProperty channel="Y" name="resolution" value="1000" units="1/cm"/>
+        </inkml:channelProperties>
+      </inkml:inkSource>
+      <inkml:timestamp xml:id="ts0" timeString="2026-06-16T21:11:43.717"/>
+    </inkml:context>
+    <inkml:brush xml:id="br0">
+      <inkml:brushProperty name="width" value="0.3" units="cm"/>
+      <inkml:brushProperty name="height" value="0.6" units="cm"/>
+      <inkml:brushProperty name="color" value="#00F900"/>
+      <inkml:brushProperty name="tip" value="rectangle"/>
+      <inkml:brushProperty name="rasterOp" value="maskPen"/>
+      <inkml:brushProperty name="ignorePressure" value="1"/>
+    </inkml:brush>
+  </inkml:definitions>
+  <inkml:trace contextRef="#ctx0" brushRef="#br0">124 2,'1592'0,"-1564"1,51 10,-50-6,49 2,1227-8,-1283 0,0-1,28-7,-27 5,0 0,26 0,593 5,-639-1,0-1,0 1,0 0,0 1,0-1,-1 0,1 1,0 0,0 0,0 0,0 0,-1 0,1 0,-1 1,1-1,-1 1,1 0,-1-1,0 1,0 0,3 3,-3 0,0-1,0 1,0 0,-1 0,1 0,-1 0,0 0,-1 0,1 0,-1 0,0 9,-5 140,1-54,9 101,-2-182,0 1,2-1,7 21,-6-23,-1-1,-1 1,0 0,2 31,10 110,-9-102,2-16,-7-31,1 0,-1 1,-1 0,0 0,0 16,-1-23,0-1,-1 0,1 0,-1 1,0-1,1 0,-1 0,0 0,-1 0,1 1,0-2,0 1,-1 0,1 0,-1 0,0-1,1 1,-1-1,0 1,0-1,0 0,0 1,0-1,0 0,0-1,-1 1,1 0,-4 0,-12 3,0-2,0 0,-30-1,29-1,-1 0,1 2,-20 4,-7 0,0-1,0-2,-84-6,27 1,-466 2,541 1,-52 10,53-6,-52 3,-1251-9,1302 2,-51 10,50-6,-48 2,-350-8,393-1,-58-10,28 2,1-1,40 6,0 1,-34 0,23 4,4 0,1 0,-1-2,-47-9,-65-37,113 41,-18-8,45 14,-1-1,1 1,0-1,0 1,0-1,1 0,-1 0,0 1,0-1,1-1,0 1,-1 0,1 0,0 0,0-1,0 1,-1-4,-15-56,-14-113,30 162,-2-3,2 1,0-1,0 0,2 0,0 1,0-1,6-20,-6 33,1 1,-1 0,1 0,0-1,-1 1,1 0,0 1,0-1,1 0,-1 0,0 1,1 0,-1-1,0 1,1 0,0 0,-1 0,1 0,0 1,-1-1,1 1,0 0,2 0,13-1,-1 0,28 4,-20-1,820 3,-454-8,511 3,-874 2,52 8,-51-5,48 2,872-8,-924 0,-1-2,0-1,-1-1,26-8,43-9,18 0,-159 24,-54-3,24 0,51-1,-51-8,50 5,-48-3,-87 11,-123-5,205-10,50 7,-53-3,-5 7,-96-15,103 9,-151 6,100 4,100-5,-52-9,52 6,-49-2,62 5,1-1,-1 0,1-1,0-2,1 0,-24-10,-16-5,18 10,-56-7,-64-1,77 6,-70-16,128 23,1 2,-41-2,38 4,-50-10,59 9,-1 1,0 0,-27 2,34 1,-1 0,1-2,-1 0,1 0,0-1,-1 0,1-2,-21-7,95 5,684 7,-718 0,51 10,20 1,63-12,-76-2,167 18,-135-5,14 2,-97-9,1-1,60-2,25 1,-49 9,-50-6,0-2,32 2,-19-3,0 2,60 14,-62-11,1 0,0-3,39 2,-50-5,1 1,28 6,-27-3,46 2,-47-6,0 2,25 5,-25-4,0 0,27 0,-10-4,-1 3,49 7,-40-4,1-1,86-5,-58-2,-73 3,0-1,0 0,0 0,-1 0,1-1,0 1,0-1,0 0,0 0,0 0,-1-1,1 1,0-1,-1 0,1 0,-1 0,0-1,0 1,0-1,0 1,0-1,-1 0,1 0,-1-1,0 1,1 0,-2-1,1 1,0-1,1-6,4-4</inkml:trace>
+</inkml:ink>
+</file>
+
+<file path=ppt/ink/ink48.xml><?xml version="1.0" encoding="utf-8"?>
+<inkml:ink xmlns:inkml="http://www.w3.org/2003/InkML">
+  <inkml:definitions>
+    <inkml:context xml:id="ctx0">
+      <inkml:inkSource xml:id="inkSrc0">
+        <inkml:traceFormat>
+          <inkml:channel name="X" type="integer" min="-2.14748E9" max="2.14748E9" units="cm"/>
+          <inkml:channel name="Y" type="integer" min="-2.14748E9" max="2.14748E9" units="cm"/>
+          <inkml:channel name="F" type="integer" max="32767" units="dev"/>
+        </inkml:traceFormat>
+        <inkml:channelProperties>
+          <inkml:channelProperty channel="X" name="resolution" value="1000" units="1/cm"/>
+          <inkml:channelProperty channel="Y" name="resolution" value="1000" units="1/cm"/>
+          <inkml:channelProperty channel="F" name="resolution" value="0" units="1/dev"/>
+        </inkml:channelProperties>
+      </inkml:inkSource>
+      <inkml:timestamp xml:id="ts0" timeString="2026-06-16T21:11:54.045"/>
+    </inkml:context>
+    <inkml:brush xml:id="br0">
+      <inkml:brushProperty name="width" value="0.3" units="cm"/>
+      <inkml:brushProperty name="height" value="0.6" units="cm"/>
+      <inkml:brushProperty name="color" value="#00F900"/>
+      <inkml:brushProperty name="tip" value="rectangle"/>
+      <inkml:brushProperty name="rasterOp" value="maskPen"/>
+      <inkml:brushProperty name="ignorePressure" value="1"/>
+    </inkml:brush>
+  </inkml:definitions>
+  <inkml:trace contextRef="#ctx0" brushRef="#br0">0 0 0,'0'1026'0,"5529"-1026"0,-5529-1026 0,-5529 1026 0</inkml:trace>
+</inkml:ink>
+</file>
+
+<file path=ppt/ink/ink49.xml><?xml version="1.0" encoding="utf-8"?>
+<inkml:ink xmlns:inkml="http://www.w3.org/2003/InkML">
+  <inkml:definitions>
+    <inkml:context xml:id="ctx0">
+      <inkml:inkSource xml:id="inkSrc0">
+        <inkml:traceFormat>
+          <inkml:channel name="X" type="integer" min="-2.14748E9" max="2.14748E9" units="cm"/>
+          <inkml:channel name="Y" type="integer" min="-2.14748E9" max="2.14748E9" units="cm"/>
+        </inkml:traceFormat>
+        <inkml:channelProperties>
+          <inkml:channelProperty channel="X" name="resolution" value="1000" units="1/cm"/>
+          <inkml:channelProperty channel="Y" name="resolution" value="1000" units="1/cm"/>
+        </inkml:channelProperties>
+      </inkml:inkSource>
+      <inkml:timestamp xml:id="ts0" timeString="2026-06-16T21:11:58.599"/>
+    </inkml:context>
+    <inkml:brush xml:id="br0">
+      <inkml:brushProperty name="width" value="0.3" units="cm"/>
+      <inkml:brushProperty name="height" value="0.6" units="cm"/>
+      <inkml:brushProperty name="color" value="#00F900"/>
+      <inkml:brushProperty name="tip" value="rectangle"/>
+      <inkml:brushProperty name="rasterOp" value="maskPen"/>
+      <inkml:brushProperty name="ignorePressure" value="1"/>
+    </inkml:brush>
+  </inkml:definitions>
+  <inkml:trace contextRef="#ctx0" brushRef="#br0">226 120,'10'0,"10"1,1-1,-1-1,0 0,-1-2,1 0,0-2,-1 0,20-8,-25 8,0 0,0 2,0-1,0 2,29-2,26-5,135-25,-142 24,-37 5,0 1,29 0,1348 5,-1369 1,60 11,-30-4,39 14,-79-16,0-2,0 0,43 3,69 4,-86-6,53 0,-56-5,-1 1,59 12,-47-8,0-2,93-6,-39-1,838 3,-927-1,0-1,29-7,-29 5,1 0,26 0,380 5,-448 0,0 1,-28 7,-37 3,69-12,-12 1,0 0,-1 2,-27 6,26-4,0-1,-1-2,-49-1,50-2,-1 1,0 2,-47 9,46-6,1-1,-1-2,0-1,-36-3,34 0,0 2,0 1,-49 8,10 1,0-3,-1-3,-92-7,28 0,81 3,1-2,-59-11,68 8,-1 1,-73 5,-39-3,67-8,-64-3,80 12,-93-12,21 2,-11-2,79 5,-1 3,-102 7,51 0,91-4,-51-9,50 5,-46 0,-912 7,983 0,-1 1,1 1,0 0,-33 12,33-9,-1-1,0-1,0 0,-28 2,-5-5,-184-4,233 3,-1-1,1 1,-1 0,0-1,1 0,-1 0,1 1,0-1,-5-3,2-1</inkml:trace>
+</inkml:ink>
+</file>
+
 <file path=ppt/ink/ink5.xml><?xml version="1.0" encoding="utf-8"?>
 <inkml:ink xmlns:inkml="http://www.w3.org/2003/InkML">
   <inkml:definitions>
@@ -1297,6 +1655,35 @@
     </inkml:brush>
   </inkml:definitions>
   <inkml:trace contextRef="#ctx0" brushRef="#br0">21570 767,'-67'-1,"10"0,-1 2,-94 14,-37 10,68-11,74-10,-56 12,12 0,-128 7,196-21,-228 4,-25 2,-154 18,266-19,-294 12,67-6,15-2,-682 41,408-33,282 3,-283 14,452-27,-289 6,-55 9,-4 0,236-13,15 1,-2579-13,2665-11,5 0,-682 12,739-12,2-1,-21 15,48 0,-187-19,47-12,241 28,-419-26,374 24,-108-18,104 10,-85-2,84 9,-82-16,83 10,-84-4,88 10,-86-16,89 10,-102-3,89 9,-96-16,98 9,-98-2,117 10,-98-17,94 10,-68-3,2 1,-23-1,101 11,0-3,-52-11,51 7,-91-6,-130-9,112 7,115 11,-18-5,34 6,0 1,-30-1,-86-6,-15-1,118 10,-48-8,-25-1,-9-1,81 6,-56-1,-477 8,542-2,-51-10,50 6,-48-2,-1253 8,8002-1,-6393 12,-8 0,1603-13,-1908 1,-16-1,0 3,-81 12,83-7,-81 1,-1 1,-153 1,19-2,-221 6,44-5,-85 25,372-25,-421 12,280-10,10 1,-9 0,-1 0,-1465-13,1584-11,1-1,157 13,-65 0,0-3,-107-18,133 11,1 3,-113 1,201 4,55-10,-38 5,-1 2,2 3,80 5,-23-1,928-2,-1034 0,-1 0,1-1,0 1,0 0,0 0,0 0,-1 0,1 0,0 0,0 0,0 0,0 0,0 0,-1 0,1 1,0-1,0 0,0 1,-1-1,1 1,0-1,0 0,-1 1,1 0,0-1,0 2,-19 10,-39 9,-92 3,119-20,0 0,0-2,-44-3,43 0,1 1,-1 2,-38 6,-80 11,51-9,-8-1,-179-7,133-4,-9 14,-3 1,75-12,-103 15,171-14,-27 4,46-6,0 1,0-1,0 1,0 0,0 0,0-1,0 1,0 1,0-1,0 0,1 0,-1 1,1-1,-1 1,1-1,-1 1,-1 2,3-3,0 0,0 0,0 0,0-1,0 1,0 0,0 0,0 0,0 0,0 0,1 0,-1-1,0 1,1 0,-1 0,0 0,1-1,-1 1,1 0,-1 0,1-1,0 1,-1 0,1-1,0 1,-1-1,1 1,0-1,0 1,-1-1,1 0,0 1,1-1,30 13,-10-8,1-2,0 0,0-1,0-2,29-2,-26 1,-1 0,1 2,49 8,-14 0,0-2,0-3,106-7,-44 0,219 27,11 1,-285-25,97 13,-46-4,157-8,-197-2,-210 3,-147-4,70-22,121 14,-101-4,-79 1,190 4,-259-17,270 23,1-3,-90-20,88 12,1 4,-85-2,104 10,-62-11,63 6,98 10,62-4,-24-1,1001 2,-1085 0,-3 0,-1 1,1-1,0 0,0 0,0-1,0 1,0-1,0 1,-1-1,1 0,0 0,-1 0,1 0,3-3,-6 4,0-1,0 1,-1-1,1 0,0 1,0-1,-1 1,1-1,0 1,-1-1,1 1,-1-1,1 1,-1 0,1-1,-1 1,1 0,-1-1,1 1,-1 0,1-1,-1 1,0 0,1 0,-1 0,1 0,-1 0,0 0,1 0,-1 0,0 0,1 0,-1 0,1 0,-2 0,-26-4,-122 2,92 3,-1-3,-60-9,-113-14,135 16,-165 4,152 7,-110-13,-93-18,-31 25,43 3,193-10,-42-2,-104 0,120 2,-185 9,146 5,64-3,189-30,-41 22,0 1,1 3,-1 1,1 2,52 5,6-2,70-4,179 5,-152 19,-113-10,97 1,64 2,-134-5,-10 0,69 2,689-12,-840 1,0 0,33 9,31 2,-33-8,90 19,-17-2,-60-11,-28-4,51 1,-31-3,87 16,-87-10,90 4,-101-13,263 12,712 44,-401-43,263 32,-352-20,120-2,-517-18,717 21,-398-15,-11 0,320 1,489-1,-755-15,2396 3,-2587-12,3 0,-285 12,454-14,156 2,-386 15,-101-15,-3-1,838 14,-949 1,51 8,-50-5,48 3,635-9,-684-1,52-8,-52 5,50-3,-56 9,42-3,-61 2,-1-1,1 1,-1-1,1 1,-1-1,0 0,1 0,-1 0,0 0,0-1,0 1,1-1,-1 1,-1-1,1 1,0-1,0 0,-1 0,1 0,2-4,-4 5,0-1,0 1,0-1,1 1,-1-1,-1 1,1 0,0-1,0 1,0-1,-1 1,1-1,-1 1,1 0,-1-1,1 1,-1 0,0 0,0-1,0 1,0 0,1 0,-1 0,-1 0,1 0,0 0,0 0,0 1,0-1,-1 0,1 1,0-1,-1 1,1-1,-3 0,-54-18,55 18,-170-47,-39-10,-194-12,271 50,-515-65,229 42,118 15,-737-59,530 50,-506-13,-184-1,495 12,-1103-62,1575 84,-237-12,-56-8,59 3,132-1,198 17,-148 0,229 16,-58-11,40 4,65 8,-1 0,1-1,0 0,-17-6,26 8,0 0,0 0,0 0,0 0,0 0,0 0,-1 0,1 0,0 0,0 0,0 0,0 0,0-1,0 1,0 0,0 0,0 0,0 0,0 0,-1 0,1 0,0-1,0 1,0 0,0 0,0 0,0 0,0 0,0 0,0-1,0 1,0 0,0 0,0 0,0 0,0 0,1 0,-1-1,0 1,0 0,0 0,0 0,0 0,0 0,0 0,0 0,0 0,0-1,0 1,1 0,-1 0,0 0,0 0,0 0,0 0,0 0,1 0,11-8,17-3,8 5,1 2,-1 1,1 2,50 4,0 0,72-5,149 5,-186 8,52 2,242 12,-92-2,39 13,-20-1,220 21,29 2,350 17,-430-45,-62-6,555 42,-773-56,172 2,1057-13,-1438 3,1 1,-1 1,29 8,-47-11,-122 2,-266-1,-246-5,411-8,-97-3,-2068 15,1590 36,33-1,65 13,215-7,-104 4,256-27,-275 14,289-33,360-1,52 1,129 15,35 10,-147-16,180-7,-134-5,935 3,-890 13,-5-1,-29-14,136 4,-201 9,46 2,140-14,-353 1,-64 1,-228-28,-123-20,233 24,-59-1,5 10,129 4,8 1,-220-5,-397 15,714 5,60-6,-1 0,1 1,-1-1,1 0,-1 0,1 1,-1-1,1 1,-1 0,1-1,0 1,-1 0,1 0,0 0,0 0,-1 0,1 0,0 0,0 0,0 1,0-1,1 0,-1 0,0 1,0-1,1 1,-1-1,1 1,-1-1,1 1,0-1,0 1,-1-1,1 1,1 2,-1-3,1 1,0-1,0 1,0-1,0 1,0-1,0 0,1 1,-1-1,0 0,1 0,-1 0,1 0,-1 0,1 0,0 0,-1-1,1 1,0-1,1 1,45 11,-35-10,29 6,83 2,-3 0,-104-7,480 51,172-3,-327-21,347 7,-567-32,668 36,1861 8,-1938-35,-349-4,375 9,746 10,1345-30,-2289-46,-382 26,33 2,-182 18,25-4,-35 5,0 0,0 0,-1 0,1 0,0-1,0 1,0 0,0 0,0-1,0 1,0-1,0 1,-1 0,1-1,0 0,0 1,-1-1,1 1,0-1,-1 0,1 0,0 1,-1-1,1-1,-1 1,-1 0,1 0,-1 1,1-1,-1 0,0 1,1-1,-1 1,0-1,0 1,1-1,-1 1,0-1,0 1,0-1,1 1,-1 0,0 0,0-1,0 1,0 0,0 0,-1 0,-29-3,21 2,-34-6,-1 0,-79-3,-178 13,-441-5,544-10,-93-1,-754 14,761 14,153-6,-233 35,265-30,-138 25,65-6,119-21,52-12,1 0,-1 0,1 1,-1-1,1 0,-1 1,1-1,0 1,-1-1,1 1,0 0,-1 0,1-1,0 1,-2 2,16 5,42-1,998-5,-505-5,-284-9,3 0,-172 8,166-29,-135 16,238 0,-336 15,0 0,37-10,-22 5,-42 7,0 0,1 0,-1 0,0-1,0 1,1 0,-1-1,0 1,1 0,-1-1,0 1,0-1,0 0,0 1,0-1,0 0,0 0,0 0,0 0,0 0,0 0,1-1,-2 1,0 0,0 0,-1 0,1 0,0 0,0 0,-1 0,1 0,0 0,-1 1,1-1,-1 0,1 0,-1 0,0 1,1-1,-1 0,0 0,1 1,-1-1,0 1,-1-1,-4-4,-1 1,0-1,0 2,0-1,-1 1,-8-3,-464-79,309 56,-73-8,-14 5,-136-8,-150 4,-75 1,-810 36,1533-2,319 16,-182-1,-44-4,-32 5,525 28,-332-32,-4 1,1225-13,-1605 0,-48-9,-17-2,36 8,-71-16,72 10,-79-4,-131-10,-42-1,-360 27,648-2,0 1,0 2,1-1,-1 2,0 0,1 2,0-1,0 2,1 1,-1 0,-15 10,30-16,1-1,-1 0,0 1,0-1,1 1,-1 0,1-1,-1 1,1 0,0 0,-1 0,1 0,0 0,1 0,-1 0,0 1,0 3,1-4,0 0,0-1,0 1,1 0,-1-1,1 1,-1 0,1-1,0 1,-1-1,1 1,0-1,0 1,0-1,0 0,1 0,-1 1,2 1,3 1,0 0,1 0,-1 0,1-1,0 0,0 0,0-1,0 1,10 0,58 11,-15-2,0-2,89 2,-90-12,83 13,-33-3,195-8,-144-5,37 6,217-6,-235-23,-43 4,-105 17,52-15,17-3,-46 12,63-20,-42 10,-19 4,-2-2,67-33,-117 49,0 1,0-1,-1 0,1-1,-1 1,1-1,-1 1,0-1,-1 0,1 0,-1 0,1-1,-1 1,-1 0,1-1,-1 0,1 1,0-8,3-5,0 1</inkml:trace>
+</inkml:ink>
+</file>
+
+<file path=ppt/ink/ink50.xml><?xml version="1.0" encoding="utf-8"?>
+<inkml:ink xmlns:inkml="http://www.w3.org/2003/InkML">
+  <inkml:definitions>
+    <inkml:context xml:id="ctx0">
+      <inkml:inkSource xml:id="inkSrc0">
+        <inkml:traceFormat>
+          <inkml:channel name="X" type="integer" min="-2.14748E9" max="2.14748E9" units="cm"/>
+          <inkml:channel name="Y" type="integer" min="-2.14748E9" max="2.14748E9" units="cm"/>
+        </inkml:traceFormat>
+        <inkml:channelProperties>
+          <inkml:channelProperty channel="X" name="resolution" value="1000" units="1/cm"/>
+          <inkml:channelProperty channel="Y" name="resolution" value="1000" units="1/cm"/>
+        </inkml:channelProperties>
+      </inkml:inkSource>
+      <inkml:timestamp xml:id="ts0" timeString="2026-06-16T21:12:24.997"/>
+    </inkml:context>
+    <inkml:brush xml:id="br0">
+      <inkml:brushProperty name="width" value="0.3" units="cm"/>
+      <inkml:brushProperty name="height" value="0.6" units="cm"/>
+      <inkml:brushProperty name="color" value="#00F900"/>
+      <inkml:brushProperty name="tip" value="rectangle"/>
+      <inkml:brushProperty name="rasterOp" value="maskPen"/>
+      <inkml:brushProperty name="ignorePressure" value="1"/>
+    </inkml:brush>
+  </inkml:definitions>
+  <inkml:trace contextRef="#ctx0" brushRef="#br0">0 0,'0'0</inkml:trace>
 </inkml:ink>
 </file>
 
@@ -1498,7 +1885,7 @@
           <a:p>
             <a:fld id="{F2D8D46A-B586-417D-BFBD-8C8FE0AAF762}" type="datetimeFigureOut">
               <a:rPr lang="en-US"/>
-              <a:t>6/16/2026</a:t>
+              <a:t>6/17/2026</a:t>
             </a:fld>
             <a:endParaRPr/>
           </a:p>
@@ -1665,6 +2052,7 @@
     </p:extLst>
   </p:cSld>
   <p:clrMap bg1="lt1" tx1="dk1" bg2="lt2" tx2="dk2" accent1="accent1" accent2="accent2" accent3="accent3" accent4="accent4" accent5="accent5" accent6="accent6" hlink="hlink" folHlink="folHlink"/>
+  <p:hf sldNum="0" ftr="0" dt="0"/>
   <p:notesStyle>
     <a:lvl1pPr marL="0" algn="l" defTabSz="1218987" rtl="0" eaLnBrk="1" latinLnBrk="0" hangingPunct="1">
       <a:defRPr sz="1600" kern="1200">
@@ -2514,9 +2902,9 @@
           <a:bodyPr/>
           <a:lstStyle/>
           <a:p>
-            <a:fld id="{F0DFD029-FB74-4578-B929-F66AA97659CA}" type="datetimeFigureOut">
-              <a:rPr lang="en-US"/>
-              <a:t>6/16/2026</a:t>
+            <a:fld id="{6148ED26-FDCF-4C3D-8692-8CA9C76D640F}" type="datetime1">
+              <a:rPr lang="en-US" smtClean="0"/>
+              <a:t>6/17/2026</a:t>
             </a:fld>
             <a:endParaRPr/>
           </a:p>
@@ -2712,9 +3100,9 @@
           <a:bodyPr/>
           <a:lstStyle/>
           <a:p>
-            <a:fld id="{F0DFD029-FB74-4578-B929-F66AA97659CA}" type="datetimeFigureOut">
-              <a:rPr lang="en-US"/>
-              <a:t>6/16/2026</a:t>
+            <a:fld id="{69BCA6DB-2FE7-46D1-8A81-F3FBF6D93621}" type="datetime1">
+              <a:rPr lang="en-US" smtClean="0"/>
+              <a:t>6/17/2026</a:t>
             </a:fld>
             <a:endParaRPr/>
           </a:p>
@@ -2920,9 +3308,9 @@
           <a:bodyPr/>
           <a:lstStyle/>
           <a:p>
-            <a:fld id="{F0DFD029-FB74-4578-B929-F66AA97659CA}" type="datetimeFigureOut">
-              <a:rPr lang="en-US"/>
-              <a:t>6/16/2026</a:t>
+            <a:fld id="{33F4EB8D-25AB-42F5-9E98-637268F1D594}" type="datetime1">
+              <a:rPr lang="en-US" smtClean="0"/>
+              <a:t>6/17/2026</a:t>
             </a:fld>
             <a:endParaRPr/>
           </a:p>
@@ -3118,9 +3506,9 @@
           <a:bodyPr/>
           <a:lstStyle/>
           <a:p>
-            <a:fld id="{F0DFD029-FB74-4578-B929-F66AA97659CA}" type="datetimeFigureOut">
-              <a:rPr lang="en-US"/>
-              <a:t>6/16/2026</a:t>
+            <a:fld id="{1AA78CA8-7FE6-4A40-AF74-8B38E86A1BDE}" type="datetime1">
+              <a:rPr lang="en-US" smtClean="0"/>
+              <a:t>6/17/2026</a:t>
             </a:fld>
             <a:endParaRPr/>
           </a:p>
@@ -3550,9 +3938,9 @@
           <a:bodyPr/>
           <a:lstStyle/>
           <a:p>
-            <a:fld id="{F0DFD029-FB74-4578-B929-F66AA97659CA}" type="datetimeFigureOut">
-              <a:rPr lang="en-US"/>
-              <a:t>6/16/2026</a:t>
+            <a:fld id="{526498B2-20DF-47DF-AED3-61A31612C1F7}" type="datetime1">
+              <a:rPr lang="en-US" smtClean="0"/>
+              <a:t>6/17/2026</a:t>
             </a:fld>
             <a:endParaRPr/>
           </a:p>
@@ -3854,9 +4242,9 @@
           <a:bodyPr/>
           <a:lstStyle/>
           <a:p>
-            <a:fld id="{F0DFD029-FB74-4578-B929-F66AA97659CA}" type="datetimeFigureOut">
-              <a:rPr lang="en-US"/>
-              <a:t>6/16/2026</a:t>
+            <a:fld id="{80B75469-9F17-4F98-BE3B-98331A24AF45}" type="datetime1">
+              <a:rPr lang="en-US" smtClean="0"/>
+              <a:t>6/17/2026</a:t>
             </a:fld>
             <a:endParaRPr/>
           </a:p>
@@ -4310,9 +4698,9 @@
           <a:bodyPr/>
           <a:lstStyle/>
           <a:p>
-            <a:fld id="{F0DFD029-FB74-4578-B929-F66AA97659CA}" type="datetimeFigureOut">
-              <a:rPr lang="en-US"/>
-              <a:t>6/16/2026</a:t>
+            <a:fld id="{C433612D-1DDB-4E58-B74D-27A2E0D1BAD4}" type="datetime1">
+              <a:rPr lang="en-US" smtClean="0"/>
+              <a:t>6/17/2026</a:t>
             </a:fld>
             <a:endParaRPr/>
           </a:p>
@@ -4440,9 +4828,9 @@
           <a:bodyPr/>
           <a:lstStyle/>
           <a:p>
-            <a:fld id="{F0DFD029-FB74-4578-B929-F66AA97659CA}" type="datetimeFigureOut">
-              <a:rPr lang="en-US"/>
-              <a:t>6/16/2026</a:t>
+            <a:fld id="{266063A7-F3B3-47C5-88A9-24F3F772CD15}" type="datetime1">
+              <a:rPr lang="en-US" smtClean="0"/>
+              <a:t>6/17/2026</a:t>
             </a:fld>
             <a:endParaRPr/>
           </a:p>
@@ -4547,9 +4935,9 @@
           <a:bodyPr/>
           <a:lstStyle/>
           <a:p>
-            <a:fld id="{F0DFD029-FB74-4578-B929-F66AA97659CA}" type="datetimeFigureOut">
-              <a:rPr lang="en-US"/>
-              <a:t>6/16/2026</a:t>
+            <a:fld id="{9F0E5985-C2F7-42A4-8132-11663E33D25B}" type="datetime1">
+              <a:rPr lang="en-US" smtClean="0"/>
+              <a:t>6/17/2026</a:t>
             </a:fld>
             <a:endParaRPr/>
           </a:p>
@@ -4846,9 +5234,9 @@
           <a:bodyPr/>
           <a:lstStyle/>
           <a:p>
-            <a:fld id="{F0DFD029-FB74-4578-B929-F66AA97659CA}" type="datetimeFigureOut">
-              <a:rPr lang="en-US"/>
-              <a:t>6/16/2026</a:t>
+            <a:fld id="{19FE705E-538B-4AC9-9E08-13660912A0EC}" type="datetime1">
+              <a:rPr lang="en-US" smtClean="0"/>
+              <a:t>6/17/2026</a:t>
             </a:fld>
             <a:endParaRPr/>
           </a:p>
@@ -5134,9 +5522,9 @@
           <a:bodyPr/>
           <a:lstStyle/>
           <a:p>
-            <a:fld id="{F0DFD029-FB74-4578-B929-F66AA97659CA}" type="datetimeFigureOut">
-              <a:rPr lang="en-US"/>
-              <a:t>6/16/2026</a:t>
+            <a:fld id="{CCA05AF2-7680-424B-922C-16FF7A279643}" type="datetime1">
+              <a:rPr lang="en-US" smtClean="0"/>
+              <a:t>6/17/2026</a:t>
             </a:fld>
             <a:endParaRPr/>
           </a:p>
@@ -5756,10 +6144,9 @@
             </a:lvl1pPr>
           </a:lstStyle>
           <a:p>
-            <a:fld id="{F0DFD029-FB74-4578-B929-F66AA97659CA}" type="datetimeFigureOut">
-              <a:rPr lang="en-US"/>
-              <a:pPr/>
-              <a:t>6/16/2026</a:t>
+            <a:fld id="{CF11C9C5-97C1-4036-8F72-D77A0851B8C6}" type="datetime1">
+              <a:rPr lang="en-US" smtClean="0"/>
+              <a:t>6/17/2026</a:t>
             </a:fld>
             <a:endParaRPr/>
           </a:p>
@@ -5877,6 +6264,7 @@
       </p:transition>
     </mc:Fallback>
   </mc:AlternateContent>
+  <p:hf hdr="0" ftr="0" dt="0"/>
   <p:txStyles>
     <p:titleStyle>
       <a:lvl1pPr algn="l" defTabSz="1218987" rtl="0" eaLnBrk="1" latinLnBrk="0" hangingPunct="1">
@@ -6273,19 +6661,23 @@
         </p:nvSpPr>
         <p:spPr>
           <a:xfrm>
-            <a:off x="1359939" y="3356992"/>
-            <a:ext cx="8735325" cy="2384214"/>
+            <a:off x="1143496" y="2996952"/>
+            <a:ext cx="9217005" cy="3024336"/>
           </a:xfrm>
         </p:spPr>
         <p:txBody>
           <a:bodyPr>
-            <a:normAutofit fontScale="55000" lnSpcReduction="20000"/>
+            <a:normAutofit fontScale="62500" lnSpcReduction="20000"/>
           </a:bodyPr>
           <a:lstStyle/>
           <a:p>
             <a:r>
-              <a:rPr lang="en-US" cap="none" dirty="0"/>
-              <a:t>M.Engg. Thesis defence by</a:t>
+              <a:rPr lang="en-US" b="1" cap="none" dirty="0" err="1"/>
+              <a:t>M.Engg</a:t>
+            </a:r>
+            <a:r>
+              <a:rPr lang="en-US" b="1" cap="none" dirty="0"/>
+              <a:t> IC Design Thesis by</a:t>
             </a:r>
             <a:br>
               <a:rPr lang="en-US" cap="none" dirty="0"/>
@@ -6308,7 +6700,7 @@
               <a:rPr lang="en-US" dirty="0"/>
             </a:br>
             <a:r>
-              <a:rPr lang="en-US" cap="none" dirty="0"/>
+              <a:rPr lang="en-US" b="1" cap="none" dirty="0"/>
               <a:t>Supervised by</a:t>
             </a:r>
             <a:br>
@@ -6348,16 +6740,16 @@
           </a:p>
           <a:p>
             <a:br>
-              <a:rPr lang="en-US" sz="3200" cap="none" dirty="0"/>
+              <a:rPr lang="en-US" sz="3200" b="1" cap="none" dirty="0"/>
             </a:br>
             <a:r>
-              <a:rPr lang="en-US" sz="3200" cap="none" dirty="0"/>
+              <a:rPr lang="en-US" sz="2700" b="1" cap="none" dirty="0"/>
               <a:t>Co-supervised by</a:t>
             </a:r>
             <a:br>
-              <a:rPr lang="en-US" sz="3200" cap="none" dirty="0"/>
+              <a:rPr lang="en-US" sz="3200" b="1" cap="none" dirty="0"/>
             </a:br>
-            <a:endParaRPr lang="en-US" sz="3200" cap="none" dirty="0">
+            <a:endParaRPr lang="en-US" sz="3200" b="1" cap="none" dirty="0">
               <a:solidFill>
                 <a:schemeClr val="tx1"/>
               </a:solidFill>
@@ -6373,9 +6765,45 @@
               <a:t>DR . SONIYA Shafi </a:t>
             </a:r>
             <a:br>
+              <a:rPr lang="en-US" sz="3200" dirty="0">
+                <a:solidFill>
+                  <a:schemeClr val="tx1"/>
+                </a:solidFill>
+              </a:rPr>
+            </a:br>
+            <a:br>
               <a:rPr lang="en-US" dirty="0"/>
             </a:br>
             <a:endParaRPr lang="en-US" dirty="0"/>
+          </a:p>
+        </p:txBody>
+      </p:sp>
+      <p:sp>
+        <p:nvSpPr>
+          <p:cNvPr id="3" name="Slide Number Placeholder 2">
+            <a:extLst>
+              <a:ext uri="{FF2B5EF4-FFF2-40B4-BE49-F238E27FC236}">
+                <a16:creationId xmlns:a16="http://schemas.microsoft.com/office/drawing/2014/main" id="{761EDC0F-B35B-86B4-D41F-F0E2341ACAA0}"/>
+              </a:ext>
+            </a:extLst>
+          </p:cNvPr>
+          <p:cNvSpPr>
+            <a:spLocks noGrp="1"/>
+          </p:cNvSpPr>
+          <p:nvPr>
+            <p:ph type="sldNum" sz="quarter" idx="12"/>
+          </p:nvPr>
+        </p:nvSpPr>
+        <p:spPr/>
+        <p:txBody>
+          <a:bodyPr/>
+          <a:lstStyle/>
+          <a:p>
+            <a:fld id="{C014DD1E-5D91-48A3-AD6D-45FBA980D106}" type="slidenum">
+              <a:rPr lang="en-PK" smtClean="0"/>
+              <a:t>1</a:t>
+            </a:fld>
+            <a:endParaRPr lang="en-PK"/>
           </a:p>
         </p:txBody>
       </p:sp>
@@ -6405,186 +6833,6 @@
 </file>
 
 <file path=ppt/slides/slide10.xml><?xml version="1.0" encoding="utf-8"?>
-<p:sld xmlns:a="http://schemas.openxmlformats.org/drawingml/2006/main" xmlns:r="http://schemas.openxmlformats.org/officeDocument/2006/relationships" xmlns:p="http://schemas.openxmlformats.org/presentationml/2006/main">
-  <p:cSld>
-    <p:spTree>
-      <p:nvGrpSpPr>
-        <p:cNvPr id="1" name="">
-          <a:extLst>
-            <a:ext uri="{FF2B5EF4-FFF2-40B4-BE49-F238E27FC236}">
-              <a16:creationId xmlns:a16="http://schemas.microsoft.com/office/drawing/2014/main" id="{3CA2E923-41D4-14D2-77BC-F70A91B244B7}"/>
-            </a:ext>
-          </a:extLst>
-        </p:cNvPr>
-        <p:cNvGrpSpPr/>
-        <p:nvPr/>
-      </p:nvGrpSpPr>
-      <p:grpSpPr>
-        <a:xfrm>
-          <a:off x="0" y="0"/>
-          <a:ext cx="0" cy="0"/>
-          <a:chOff x="0" y="0"/>
-          <a:chExt cx="0" cy="0"/>
-        </a:xfrm>
-      </p:grpSpPr>
-      <p:sp>
-        <p:nvSpPr>
-          <p:cNvPr id="13" name="Title 12">
-            <a:extLst>
-              <a:ext uri="{FF2B5EF4-FFF2-40B4-BE49-F238E27FC236}">
-                <a16:creationId xmlns:a16="http://schemas.microsoft.com/office/drawing/2014/main" id="{6D7031FA-ADEF-5C30-831D-1BF250DADCB9}"/>
-              </a:ext>
-            </a:extLst>
-          </p:cNvPr>
-          <p:cNvSpPr>
-            <a:spLocks noGrp="1"/>
-          </p:cNvSpPr>
-          <p:nvPr>
-            <p:ph type="title"/>
-          </p:nvPr>
-        </p:nvSpPr>
-        <p:spPr/>
-        <p:txBody>
-          <a:bodyPr>
-            <a:normAutofit/>
-          </a:bodyPr>
-          <a:lstStyle/>
-          <a:p>
-            <a:br>
-              <a:rPr lang="en-US" dirty="0"/>
-            </a:br>
-            <a:r>
-              <a:rPr lang="en-US" dirty="0">
-                <a:solidFill>
-                  <a:schemeClr val="accent1">
-                    <a:lumMod val="20000"/>
-                    <a:lumOff val="80000"/>
-                  </a:schemeClr>
-                </a:solidFill>
-              </a:rPr>
-              <a:t>Keccak Engine – Design </a:t>
-            </a:r>
-          </a:p>
-        </p:txBody>
-      </p:sp>
-      <p:sp>
-        <p:nvSpPr>
-          <p:cNvPr id="14" name="Content Placeholder 13">
-            <a:extLst>
-              <a:ext uri="{FF2B5EF4-FFF2-40B4-BE49-F238E27FC236}">
-                <a16:creationId xmlns:a16="http://schemas.microsoft.com/office/drawing/2014/main" id="{3AA8BD2D-BE62-8A93-9071-D8E84129C24B}"/>
-              </a:ext>
-            </a:extLst>
-          </p:cNvPr>
-          <p:cNvSpPr>
-            <a:spLocks noGrp="1"/>
-          </p:cNvSpPr>
-          <p:nvPr>
-            <p:ph idx="1"/>
-          </p:nvPr>
-        </p:nvSpPr>
-        <p:spPr/>
-        <p:txBody>
-          <a:bodyPr>
-            <a:normAutofit/>
-          </a:bodyPr>
-          <a:lstStyle/>
-          <a:p>
-            <a:r>
-              <a:rPr lang="en-US" sz="2100" dirty="0"/>
-              <a:t>SHAKE128/SHAKE256  hashing </a:t>
-            </a:r>
-            <a:br>
-              <a:rPr lang="en-US" sz="2100" dirty="0"/>
-            </a:br>
-            <a:r>
-              <a:rPr lang="en-US" sz="2100" dirty="0"/>
-              <a:t>support</a:t>
-            </a:r>
-          </a:p>
-          <a:p>
-            <a:r>
-              <a:rPr lang="en-US" sz="2100" dirty="0"/>
-              <a:t>64-bit bus</a:t>
-            </a:r>
-          </a:p>
-          <a:p>
-            <a:r>
-              <a:rPr lang="en-US" sz="2100" dirty="0"/>
-              <a:t>one-round-per-cycle core</a:t>
-            </a:r>
-          </a:p>
-          <a:p>
-            <a:r>
-              <a:rPr lang="en-US" sz="2100" dirty="0"/>
-              <a:t>parameterized parallel lanes</a:t>
-            </a:r>
-          </a:p>
-          <a:p>
-            <a:r>
-              <a:rPr lang="en-US" sz="2100" dirty="0"/>
-              <a:t>4-lane speedup: 3.84x</a:t>
-            </a:r>
-          </a:p>
-        </p:txBody>
-      </p:sp>
-      <p:pic>
-        <p:nvPicPr>
-          <p:cNvPr id="2" name="f4" descr="Figure 4&#10;Module hierarchy of the Keccak engine: a parameterised parallel wrapper over N independent cores, each split into parameter, absorb, step and output units.">
-            <a:extLst>
-              <a:ext uri="{FF2B5EF4-FFF2-40B4-BE49-F238E27FC236}">
-                <a16:creationId xmlns:a16="http://schemas.microsoft.com/office/drawing/2014/main" id="{5DE65C66-46C4-57B8-7A77-0CE320A168AB}"/>
-              </a:ext>
-            </a:extLst>
-          </p:cNvPr>
-          <p:cNvPicPr>
-            <a:picLocks noChangeAspect="1"/>
-          </p:cNvPicPr>
-          <p:nvPr/>
-        </p:nvPicPr>
-        <p:blipFill>
-          <a:blip r:embed="rId2"/>
-          <a:stretch>
-            <a:fillRect/>
-          </a:stretch>
-        </p:blipFill>
-        <p:spPr bwMode="auto">
-          <a:xfrm>
-            <a:off x="5739692" y="1701797"/>
-            <a:ext cx="5839692" cy="3887443"/>
-          </a:xfrm>
-          <a:prstGeom prst="rect">
-            <a:avLst/>
-          </a:prstGeom>
-          <a:noFill/>
-        </p:spPr>
-      </p:pic>
-    </p:spTree>
-    <p:extLst>
-      <p:ext uri="{BB962C8B-B14F-4D97-AF65-F5344CB8AC3E}">
-        <p14:creationId xmlns:p14="http://schemas.microsoft.com/office/powerpoint/2010/main" val="168890123"/>
-      </p:ext>
-    </p:extLst>
-  </p:cSld>
-  <p:clrMapOvr>
-    <a:masterClrMapping/>
-  </p:clrMapOvr>
-  <mc:AlternateContent xmlns:mc="http://schemas.openxmlformats.org/markup-compatibility/2006" xmlns:p14="http://schemas.microsoft.com/office/powerpoint/2010/main">
-    <mc:Choice Requires="p14">
-      <p:transition spd="med" p14:dur="700">
-        <p:fade/>
-      </p:transition>
-    </mc:Choice>
-    <mc:Fallback xmlns="">
-      <p:transition spd="med">
-        <p:fade/>
-      </p:transition>
-    </mc:Fallback>
-  </mc:AlternateContent>
-</p:sld>
-</file>
-
-<file path=ppt/slides/slide11.xml><?xml version="1.0" encoding="utf-8"?>
 <p:sld xmlns:a="http://schemas.openxmlformats.org/drawingml/2006/main" xmlns:r="http://schemas.openxmlformats.org/officeDocument/2006/relationships" xmlns:p="http://schemas.openxmlformats.org/presentationml/2006/main">
   <p:cSld>
     <p:spTree>
@@ -6625,7 +6873,7 @@
         </p:nvSpPr>
         <p:spPr>
           <a:xfrm>
-            <a:off x="1125860" y="0"/>
+            <a:off x="1125860" y="-218751"/>
             <a:ext cx="10360501" cy="1223963"/>
           </a:xfrm>
         </p:spPr>
@@ -6670,8 +6918,8 @@
         </p:nvSpPr>
         <p:spPr bwMode="auto">
           <a:xfrm>
-            <a:off x="1221844" y="1050539"/>
-            <a:ext cx="7848871" cy="5632311"/>
+            <a:off x="1197868" y="964079"/>
+            <a:ext cx="7848871" cy="5601533"/>
           </a:xfrm>
           <a:prstGeom prst="rect">
             <a:avLst/>
@@ -6751,7 +6999,7 @@
               <a:buSzTx/>
             </a:pPr>
             <a:r>
-              <a:rPr kumimoji="0" lang="en-PK" altLang="en-PK" sz="1800" b="0" i="0" u="none" strike="noStrike" cap="none" normalizeH="0" baseline="0" dirty="0">
+              <a:rPr kumimoji="0" lang="en-PK" altLang="en-PK" sz="1600" b="0" i="0" u="none" strike="noStrike" cap="none" normalizeH="0" baseline="0" dirty="0">
                 <a:ln>
                   <a:noFill/>
                 </a:ln>
@@ -6764,7 +7012,7 @@
               <a:t>Cover</a:t>
             </a:r>
             <a:r>
-              <a:rPr kumimoji="0" lang="en-US" altLang="en-PK" sz="1800" b="0" i="0" u="none" strike="noStrike" cap="none" normalizeH="0" baseline="0" dirty="0">
+              <a:rPr kumimoji="0" lang="en-US" altLang="en-PK" sz="1600" b="0" i="0" u="none" strike="noStrike" cap="none" normalizeH="0" baseline="0" dirty="0">
                 <a:ln>
                   <a:noFill/>
                 </a:ln>
@@ -6777,7 +7025,7 @@
               <a:t> </a:t>
             </a:r>
             <a:r>
-              <a:rPr kumimoji="0" lang="en-PK" altLang="en-PK" sz="1800" b="0" i="0" u="none" strike="noStrike" cap="none" normalizeH="0" baseline="0" dirty="0">
+              <a:rPr kumimoji="0" lang="en-PK" altLang="en-PK" sz="1600" b="0" i="0" u="none" strike="noStrike" cap="none" normalizeH="0" baseline="0" dirty="0">
                 <a:ln>
                   <a:noFill/>
                 </a:ln>
@@ -6790,7 +7038,7 @@
               <a:t>group samples each completed SHAKE </a:t>
             </a:r>
             <a:r>
-              <a:rPr kumimoji="0" lang="en-PK" altLang="en-PK" sz="1800" b="0" i="0" u="none" strike="noStrike" cap="none" normalizeH="0" baseline="0" dirty="0" err="1">
+              <a:rPr kumimoji="0" lang="en-PK" altLang="en-PK" sz="1600" b="0" i="0" u="none" strike="noStrike" cap="none" normalizeH="0" baseline="0" dirty="0" err="1">
                 <a:ln>
                   <a:noFill/>
                 </a:ln>
@@ -6803,7 +7051,7 @@
               <a:t>transactio</a:t>
             </a:r>
             <a:r>
-              <a:rPr kumimoji="0" lang="en-US" altLang="en-PK" sz="1800" b="0" i="0" u="none" strike="noStrike" cap="none" normalizeH="0" baseline="0" dirty="0">
+              <a:rPr kumimoji="0" lang="en-US" altLang="en-PK" sz="1600" b="0" i="0" u="none" strike="noStrike" cap="none" normalizeH="0" baseline="0" dirty="0">
                 <a:ln>
                   <a:noFill/>
                 </a:ln>
@@ -6831,7 +7079,7 @@
               <a:buSzTx/>
               <a:buNone/>
             </a:pPr>
-            <a:endParaRPr kumimoji="0" lang="en-US" altLang="en-PK" sz="1800" b="0" i="0" u="none" strike="noStrike" cap="none" normalizeH="0" baseline="0" dirty="0">
+            <a:endParaRPr kumimoji="0" lang="en-US" altLang="en-PK" sz="1600" b="0" i="0" u="none" strike="noStrike" cap="none" normalizeH="0" baseline="0" dirty="0">
               <a:ln>
                 <a:noFill/>
               </a:ln>
@@ -6857,7 +7105,7 @@
               <a:buSzTx/>
             </a:pPr>
             <a:r>
-              <a:rPr kumimoji="0" lang="en-PK" altLang="en-PK" sz="1800" b="0" i="0" u="none" strike="noStrike" cap="none" normalizeH="0" baseline="0" dirty="0">
+              <a:rPr kumimoji="0" lang="en-PK" altLang="en-PK" sz="1600" b="0" i="0" u="none" strike="noStrike" cap="none" normalizeH="0" baseline="0" dirty="0">
                 <a:ln>
                   <a:noFill/>
                 </a:ln>
@@ -6870,7 +7118,7 @@
               <a:t>Cover</a:t>
             </a:r>
             <a:r>
-              <a:rPr kumimoji="0" lang="en-US" altLang="en-PK" sz="1800" b="0" i="0" u="none" strike="noStrike" cap="none" normalizeH="0" baseline="0" dirty="0">
+              <a:rPr kumimoji="0" lang="en-US" altLang="en-PK" sz="1600" b="0" i="0" u="none" strike="noStrike" cap="none" normalizeH="0" baseline="0" dirty="0">
                 <a:ln>
                   <a:noFill/>
                 </a:ln>
@@ -6883,7 +7131,7 @@
               <a:t> </a:t>
             </a:r>
             <a:r>
-              <a:rPr kumimoji="0" lang="en-PK" altLang="en-PK" sz="1800" b="0" i="0" u="none" strike="noStrike" cap="none" normalizeH="0" baseline="0" dirty="0">
+              <a:rPr kumimoji="0" lang="en-PK" altLang="en-PK" sz="1600" b="0" i="0" u="none" strike="noStrike" cap="none" normalizeH="0" baseline="0" dirty="0">
                 <a:ln>
                   <a:noFill/>
                 </a:ln>
@@ -6895,7 +7143,7 @@
               </a:rPr>
               <a:t>points:</a:t>
             </a:r>
-            <a:endParaRPr kumimoji="0" lang="en-US" altLang="en-PK" sz="1800" b="0" i="0" u="none" strike="noStrike" cap="none" normalizeH="0" baseline="0" dirty="0">
+            <a:endParaRPr kumimoji="0" lang="en-US" altLang="en-PK" sz="1600" b="0" i="0" u="none" strike="noStrike" cap="none" normalizeH="0" baseline="0" dirty="0">
               <a:ln>
                 <a:noFill/>
               </a:ln>
@@ -6921,7 +7169,7 @@
               <a:buSzTx/>
             </a:pPr>
             <a:r>
-              <a:rPr kumimoji="0" lang="en-PK" altLang="en-PK" sz="1800" b="0" i="0" u="none" strike="noStrike" cap="none" normalizeH="0" baseline="0" dirty="0">
+              <a:rPr kumimoji="0" lang="en-PK" altLang="en-PK" sz="1600" b="0" i="0" u="none" strike="noStrike" cap="none" normalizeH="0" baseline="0" dirty="0">
                 <a:ln>
                   <a:noFill/>
                 </a:ln>
@@ -6949,7 +7197,7 @@
               <a:buSzTx/>
             </a:pPr>
             <a:r>
-              <a:rPr kumimoji="0" lang="en-PK" altLang="en-PK" sz="1800" b="0" i="0" u="none" strike="noStrike" cap="none" normalizeH="0" baseline="0" dirty="0">
+              <a:rPr kumimoji="0" lang="en-PK" altLang="en-PK" sz="1600" b="0" i="0" u="none" strike="noStrike" cap="none" normalizeH="0" baseline="0" dirty="0">
                 <a:ln>
                   <a:noFill/>
                 </a:ln>
@@ -6977,7 +7225,7 @@
               <a:buSzTx/>
             </a:pPr>
             <a:r>
-              <a:rPr kumimoji="0" lang="en-PK" altLang="en-PK" sz="1800" b="0" i="0" u="none" strike="noStrike" cap="none" normalizeH="0" baseline="0" dirty="0">
+              <a:rPr kumimoji="0" lang="en-PK" altLang="en-PK" sz="1600" b="0" i="0" u="none" strike="noStrike" cap="none" normalizeH="0" baseline="0" dirty="0">
                 <a:ln>
                   <a:noFill/>
                 </a:ln>
@@ -6989,7 +7237,7 @@
               </a:rPr>
               <a:t>XOF length: continuous, small, medium, large</a:t>
             </a:r>
-            <a:endParaRPr kumimoji="0" lang="en-US" altLang="en-PK" sz="1800" b="0" i="0" u="none" strike="noStrike" cap="none" normalizeH="0" baseline="0" dirty="0">
+            <a:endParaRPr kumimoji="0" lang="en-US" altLang="en-PK" sz="1600" b="0" i="0" u="none" strike="noStrike" cap="none" normalizeH="0" baseline="0" dirty="0">
               <a:ln>
                 <a:noFill/>
               </a:ln>
@@ -7015,7 +7263,7 @@
               <a:buSzTx/>
               <a:buNone/>
             </a:pPr>
-            <a:endParaRPr kumimoji="0" lang="en-PK" altLang="en-PK" sz="1800" b="0" i="0" u="none" strike="noStrike" cap="none" normalizeH="0" baseline="0" dirty="0">
+            <a:endParaRPr kumimoji="0" lang="en-PK" altLang="en-PK" sz="1600" b="0" i="0" u="none" strike="noStrike" cap="none" normalizeH="0" baseline="0" dirty="0">
               <a:ln>
                 <a:noFill/>
               </a:ln>
@@ -7041,7 +7289,7 @@
               <a:buSzTx/>
             </a:pPr>
             <a:r>
-              <a:rPr kumimoji="0" lang="en-PK" altLang="en-PK" sz="1800" b="0" i="0" u="none" strike="noStrike" cap="none" normalizeH="0" baseline="0" dirty="0">
+              <a:rPr kumimoji="0" lang="en-PK" altLang="en-PK" sz="1600" b="0" i="0" u="none" strike="noStrike" cap="none" normalizeH="0" baseline="0" dirty="0">
                 <a:ln>
                   <a:noFill/>
                 </a:ln>
@@ -7053,7 +7301,7 @@
               </a:rPr>
               <a:t>Cross coverage:</a:t>
             </a:r>
-            <a:endParaRPr kumimoji="0" lang="en-US" altLang="en-PK" sz="1800" b="0" i="0" u="none" strike="noStrike" cap="none" normalizeH="0" baseline="0" dirty="0">
+            <a:endParaRPr kumimoji="0" lang="en-US" altLang="en-PK" sz="1600" b="0" i="0" u="none" strike="noStrike" cap="none" normalizeH="0" baseline="0" dirty="0">
               <a:ln>
                 <a:noFill/>
               </a:ln>
@@ -7079,7 +7327,7 @@
               <a:buSzTx/>
             </a:pPr>
             <a:r>
-              <a:rPr lang="en-PK" altLang="en-PK" sz="1800" dirty="0">
+              <a:rPr lang="en-PK" altLang="en-PK" sz="1600" dirty="0">
                 <a:latin typeface="Arial" panose="020B0604020202020204" pitchFamily="34" charset="0"/>
               </a:rPr>
               <a:t>mode x message length</a:t>
@@ -7100,12 +7348,12 @@
               <a:buSzTx/>
             </a:pPr>
             <a:r>
-              <a:rPr lang="en-PK" altLang="en-PK" sz="1800" dirty="0">
+              <a:rPr lang="en-PK" altLang="en-PK" sz="1600" dirty="0">
                 <a:latin typeface="Arial" panose="020B0604020202020204" pitchFamily="34" charset="0"/>
               </a:rPr>
               <a:t>mode x XOF length</a:t>
             </a:r>
-            <a:endParaRPr lang="en-US" altLang="en-PK" sz="1800" dirty="0">
+            <a:endParaRPr lang="en-US" altLang="en-PK" sz="1600" dirty="0">
               <a:latin typeface="Arial" panose="020B0604020202020204" pitchFamily="34" charset="0"/>
             </a:endParaRPr>
           </a:p>
@@ -7123,7 +7371,7 @@
               <a:buClrTx/>
               <a:buSzTx/>
             </a:pPr>
-            <a:endParaRPr kumimoji="0" lang="en-US" altLang="en-PK" sz="1800" b="0" i="0" u="none" strike="noStrike" cap="none" normalizeH="0" baseline="0" dirty="0">
+            <a:endParaRPr kumimoji="0" lang="en-US" altLang="en-PK" sz="1600" b="0" i="0" u="none" strike="noStrike" cap="none" normalizeH="0" baseline="0" dirty="0">
               <a:ln>
                 <a:noFill/>
               </a:ln>
@@ -7149,12 +7397,12 @@
               <a:buSzTx/>
             </a:pPr>
             <a:r>
-              <a:rPr lang="en-US" altLang="en-PK" sz="1800" dirty="0">
+              <a:rPr lang="en-US" altLang="en-PK" sz="1600" dirty="0">
                 <a:latin typeface="Arial" panose="020B0604020202020204" pitchFamily="34" charset="0"/>
               </a:rPr>
               <a:t>Verified against System Verilog golden model</a:t>
             </a:r>
-            <a:endParaRPr kumimoji="0" lang="en-PK" altLang="en-PK" sz="1800" b="0" i="0" u="none" strike="noStrike" cap="none" normalizeH="0" baseline="0" dirty="0">
+            <a:endParaRPr kumimoji="0" lang="en-PK" altLang="en-PK" sz="1600" b="0" i="0" u="none" strike="noStrike" cap="none" normalizeH="0" baseline="0" dirty="0">
               <a:ln>
                 <a:noFill/>
               </a:ln>
@@ -7180,7 +7428,7 @@
               <a:buSzTx/>
               <a:buNone/>
             </a:pPr>
-            <a:endParaRPr kumimoji="0" lang="en-PK" altLang="en-PK" sz="1800" b="0" i="0" u="none" strike="noStrike" cap="none" normalizeH="0" baseline="0" dirty="0">
+            <a:endParaRPr kumimoji="0" lang="en-PK" altLang="en-PK" sz="1600" b="0" i="0" u="none" strike="noStrike" cap="none" normalizeH="0" baseline="0" dirty="0">
               <a:ln>
                 <a:noFill/>
               </a:ln>
@@ -7206,7 +7454,7 @@
               <a:buSzTx/>
             </a:pPr>
             <a:r>
-              <a:rPr kumimoji="0" lang="en-PK" altLang="en-PK" sz="1800" b="0" i="0" u="none" strike="noStrike" cap="none" normalizeH="0" baseline="0" dirty="0">
+              <a:rPr kumimoji="0" lang="en-PK" altLang="en-PK" sz="1600" b="0" i="0" u="none" strike="noStrike" cap="none" normalizeH="0" baseline="0" dirty="0">
                 <a:ln>
                   <a:noFill/>
                 </a:ln>
@@ -7219,7 +7467,7 @@
               <a:t>Result</a:t>
             </a:r>
             <a:r>
-              <a:rPr kumimoji="0" lang="en-US" altLang="en-PK" sz="1800" b="0" i="0" u="none" strike="noStrike" cap="none" normalizeH="0" baseline="0" dirty="0">
+              <a:rPr kumimoji="0" lang="en-US" altLang="en-PK" sz="1600" b="0" i="0" u="none" strike="noStrike" cap="none" normalizeH="0" baseline="0" dirty="0">
                 <a:ln>
                   <a:noFill/>
                 </a:ln>
@@ -7232,7 +7480,7 @@
               <a:t>s</a:t>
             </a:r>
             <a:r>
-              <a:rPr kumimoji="0" lang="en-PK" altLang="en-PK" sz="1800" b="0" i="0" u="none" strike="noStrike" cap="none" normalizeH="0" baseline="0" dirty="0">
+              <a:rPr kumimoji="0" lang="en-PK" altLang="en-PK" sz="1600" b="0" i="0" u="none" strike="noStrike" cap="none" normalizeH="0" baseline="0" dirty="0">
                 <a:ln>
                   <a:noFill/>
                 </a:ln>
@@ -7260,7 +7508,7 @@
               <a:buSzTx/>
             </a:pPr>
             <a:r>
-              <a:rPr kumimoji="0" lang="en-PK" altLang="en-PK" sz="1800" b="0" i="0" u="none" strike="noStrike" cap="none" normalizeH="0" baseline="0" dirty="0">
+              <a:rPr kumimoji="0" lang="en-PK" altLang="en-PK" sz="1600" b="0" i="0" u="none" strike="noStrike" cap="none" normalizeH="0" baseline="0" dirty="0">
                 <a:ln>
                   <a:noFill/>
                 </a:ln>
@@ -7273,7 +7521,7 @@
               <a:t>208/208 </a:t>
             </a:r>
             <a:r>
-              <a:rPr kumimoji="0" lang="en-US" altLang="en-PK" sz="1800" b="0" i="0" u="none" strike="noStrike" cap="none" normalizeH="0" baseline="0" dirty="0">
+              <a:rPr kumimoji="0" lang="en-US" altLang="en-PK" sz="1600" b="0" i="0" u="none" strike="noStrike" cap="none" normalizeH="0" baseline="0" dirty="0">
                 <a:ln>
                   <a:noFill/>
                 </a:ln>
@@ -7286,7 +7534,7 @@
               <a:t> UVM </a:t>
             </a:r>
             <a:r>
-              <a:rPr kumimoji="0" lang="en-PK" altLang="en-PK" sz="1800" b="0" i="0" u="none" strike="noStrike" cap="none" normalizeH="0" baseline="0" dirty="0">
+              <a:rPr kumimoji="0" lang="en-PK" altLang="en-PK" sz="1600" b="0" i="0" u="none" strike="noStrike" cap="none" normalizeH="0" baseline="0" dirty="0">
                 <a:ln>
                   <a:noFill/>
                 </a:ln>
@@ -7314,7 +7562,7 @@
               <a:buSzTx/>
             </a:pPr>
             <a:r>
-              <a:rPr kumimoji="0" lang="en-PK" altLang="en-PK" sz="1800" b="0" i="0" u="none" strike="noStrike" cap="none" normalizeH="0" baseline="0" dirty="0">
+              <a:rPr kumimoji="0" lang="en-PK" altLang="en-PK" sz="1600" b="0" i="0" u="none" strike="noStrike" cap="none" normalizeH="0" baseline="0" dirty="0">
                 <a:ln>
                   <a:noFill/>
                 </a:ln>
@@ -7326,7 +7574,7 @@
               </a:rPr>
               <a:t>100% functional coverage</a:t>
             </a:r>
-            <a:endParaRPr kumimoji="0" lang="en-US" altLang="en-PK" sz="1800" b="0" i="0" u="none" strike="noStrike" cap="none" normalizeH="0" baseline="0" dirty="0">
+            <a:endParaRPr kumimoji="0" lang="en-US" altLang="en-PK" sz="1600" b="0" i="0" u="none" strike="noStrike" cap="none" normalizeH="0" baseline="0" dirty="0">
               <a:ln>
                 <a:noFill/>
               </a:ln>
@@ -7352,14 +7600,60 @@
               <a:buSzTx/>
             </a:pPr>
             <a:r>
-              <a:rPr lang="en-US" sz="1800" dirty="0"/>
+              <a:rPr lang="en-US" sz="1600" dirty="0"/>
               <a:t>Fmax: 84.31 MHz </a:t>
             </a:r>
             <a:r>
-              <a:rPr lang="en-US" sz="1800" b="1" dirty="0"/>
+              <a:rPr lang="en-US" sz="1600" b="1" dirty="0"/>
               <a:t>(Cyclone V)</a:t>
             </a:r>
-            <a:endParaRPr lang="en-US" sz="1800" dirty="0"/>
+          </a:p>
+          <a:p>
+            <a:pPr lvl="1" defTabSz="914400" eaLnBrk="0" fontAlgn="base" hangingPunct="0">
+              <a:lnSpc>
+                <a:spcPct val="100000"/>
+              </a:lnSpc>
+              <a:spcBef>
+                <a:spcPct val="0"/>
+              </a:spcBef>
+              <a:spcAft>
+                <a:spcPct val="0"/>
+              </a:spcAft>
+              <a:buClrTx/>
+              <a:buSzTx/>
+            </a:pPr>
+            <a:r>
+              <a:rPr lang="en-US" sz="1600" b="1" dirty="0"/>
+              <a:t>ALMS: 3,747 (4 Lanes) </a:t>
+            </a:r>
+          </a:p>
+          <a:p>
+            <a:pPr lvl="1" defTabSz="914400" eaLnBrk="0" fontAlgn="base" hangingPunct="0">
+              <a:lnSpc>
+                <a:spcPct val="100000"/>
+              </a:lnSpc>
+              <a:spcBef>
+                <a:spcPct val="0"/>
+              </a:spcBef>
+              <a:spcAft>
+                <a:spcPct val="0"/>
+              </a:spcAft>
+              <a:buClrTx/>
+              <a:buSzTx/>
+            </a:pPr>
+            <a:r>
+              <a:rPr lang="en-US" sz="1600" b="1" dirty="0"/>
+              <a:t>Latency: 48 </a:t>
+            </a:r>
+            <a:r>
+              <a:rPr lang="en-US" sz="1600" b="1" dirty="0" err="1"/>
+              <a:t>cyc</a:t>
+            </a:r>
+            <a:r>
+              <a:rPr lang="en-US" sz="1600" b="1" dirty="0"/>
+              <a:t>/perm (2-stage pipeline)</a:t>
+            </a:r>
+            <a:endParaRPr lang="en-US" sz="1600" dirty="0"/>
           </a:p>
           <a:p>
             <a:pPr lvl="1" defTabSz="914400" eaLnBrk="0" fontAlgn="base" hangingPunct="0">
@@ -7420,10 +7714,10 @@
         <mc:Choice Requires="p14">
           <p:contentPart p14:bwMode="auto" r:id="rId2">
             <p14:nvContentPartPr>
-              <p14:cNvPr id="9" name="Ink 8">
+              <p14:cNvPr id="2" name="Ink 1">
                 <a:extLst>
                   <a:ext uri="{FF2B5EF4-FFF2-40B4-BE49-F238E27FC236}">
-                    <a16:creationId xmlns:a16="http://schemas.microsoft.com/office/drawing/2014/main" id="{4C85B01F-CF12-20BD-587B-2A05A5C9F09E}"/>
+                    <a16:creationId xmlns:a16="http://schemas.microsoft.com/office/drawing/2014/main" id="{428467CD-6D65-1892-D42F-F0A912D48CC8}"/>
                   </a:ext>
                 </a:extLst>
               </p14:cNvPr>
@@ -7431,18 +7725,18 @@
               <p14:nvPr/>
             </p14:nvContentPartPr>
             <p14:xfrm>
-              <a:off x="1930939" y="5356507"/>
-              <a:ext cx="541080" cy="10440"/>
+              <a:off x="1905379" y="4836590"/>
+              <a:ext cx="717480" cy="27000"/>
             </p14:xfrm>
           </p:contentPart>
         </mc:Choice>
         <mc:Fallback xmlns="">
           <p:pic>
             <p:nvPicPr>
-              <p:cNvPr id="9" name="Ink 8">
+              <p:cNvPr id="2" name="Ink 1">
                 <a:extLst>
                   <a:ext uri="{FF2B5EF4-FFF2-40B4-BE49-F238E27FC236}">
-                    <a16:creationId xmlns:a16="http://schemas.microsoft.com/office/drawing/2014/main" id="{4C85B01F-CF12-20BD-587B-2A05A5C9F09E}"/>
+                    <a16:creationId xmlns:a16="http://schemas.microsoft.com/office/drawing/2014/main" id="{428467CD-6D65-1892-D42F-F0A912D48CC8}"/>
                   </a:ext>
                 </a:extLst>
               </p:cNvPr>
@@ -7457,8 +7751,8 @@
             </p:blipFill>
             <p:spPr>
               <a:xfrm>
-                <a:off x="1877299" y="5248867"/>
-                <a:ext cx="648720" cy="226080"/>
+                <a:off x="1851739" y="4728950"/>
+                <a:ext cx="825120" cy="242640"/>
               </a:xfrm>
               <a:prstGeom prst="rect">
                 <a:avLst/>
@@ -7471,10 +7765,10 @@
         <mc:Choice Requires="p14">
           <p:contentPart p14:bwMode="auto" r:id="rId4">
             <p14:nvContentPartPr>
-              <p14:cNvPr id="14" name="Ink 13">
+              <p14:cNvPr id="3" name="Ink 2">
                 <a:extLst>
                   <a:ext uri="{FF2B5EF4-FFF2-40B4-BE49-F238E27FC236}">
-                    <a16:creationId xmlns:a16="http://schemas.microsoft.com/office/drawing/2014/main" id="{0DD5BB60-13A2-5AA4-AA58-8D0371625FDA}"/>
+                    <a16:creationId xmlns:a16="http://schemas.microsoft.com/office/drawing/2014/main" id="{D55961F5-CFA3-9A78-CEEF-BAF91E00DD17}"/>
                   </a:ext>
                 </a:extLst>
               </p14:cNvPr>
@@ -7482,18 +7776,18 @@
               <p14:nvPr/>
             </p14:nvContentPartPr>
             <p14:xfrm>
-              <a:off x="2341339" y="5357947"/>
-              <a:ext cx="376200" cy="8640"/>
+              <a:off x="1922659" y="5067350"/>
+              <a:ext cx="537840" cy="34560"/>
             </p14:xfrm>
           </p:contentPart>
         </mc:Choice>
         <mc:Fallback xmlns="">
           <p:pic>
             <p:nvPicPr>
-              <p:cNvPr id="14" name="Ink 13">
+              <p:cNvPr id="3" name="Ink 2">
                 <a:extLst>
                   <a:ext uri="{FF2B5EF4-FFF2-40B4-BE49-F238E27FC236}">
-                    <a16:creationId xmlns:a16="http://schemas.microsoft.com/office/drawing/2014/main" id="{0DD5BB60-13A2-5AA4-AA58-8D0371625FDA}"/>
+                    <a16:creationId xmlns:a16="http://schemas.microsoft.com/office/drawing/2014/main" id="{D55961F5-CFA3-9A78-CEEF-BAF91E00DD17}"/>
                   </a:ext>
                 </a:extLst>
               </p:cNvPr>
@@ -7508,8 +7802,8 @@
             </p:blipFill>
             <p:spPr>
               <a:xfrm>
-                <a:off x="2287339" y="5249947"/>
-                <a:ext cx="483840" cy="224280"/>
+                <a:off x="1868659" y="4959710"/>
+                <a:ext cx="645480" cy="250200"/>
               </a:xfrm>
               <a:prstGeom prst="rect">
                 <a:avLst/>
@@ -7522,10 +7816,10 @@
         <mc:Choice Requires="p14">
           <p:contentPart p14:bwMode="auto" r:id="rId6">
             <p14:nvContentPartPr>
-              <p14:cNvPr id="15" name="Ink 14">
+              <p14:cNvPr id="4" name="Ink 3">
                 <a:extLst>
                   <a:ext uri="{FF2B5EF4-FFF2-40B4-BE49-F238E27FC236}">
-                    <a16:creationId xmlns:a16="http://schemas.microsoft.com/office/drawing/2014/main" id="{C3BF6225-49C6-02E9-F0CC-18A3E58DCCDE}"/>
+                    <a16:creationId xmlns:a16="http://schemas.microsoft.com/office/drawing/2014/main" id="{C3E0A502-E035-8AE6-FE89-6E1961F8456E}"/>
                   </a:ext>
                 </a:extLst>
               </p14:cNvPr>
@@ -7533,18 +7827,18 @@
               <p14:nvPr/>
             </p14:nvContentPartPr>
             <p14:xfrm>
-              <a:off x="1930939" y="5631187"/>
-              <a:ext cx="554400" cy="26280"/>
+              <a:off x="2452219" y="5317910"/>
+              <a:ext cx="831240" cy="41760"/>
             </p14:xfrm>
           </p:contentPart>
         </mc:Choice>
         <mc:Fallback xmlns="">
           <p:pic>
             <p:nvPicPr>
-              <p:cNvPr id="15" name="Ink 14">
+              <p:cNvPr id="4" name="Ink 3">
                 <a:extLst>
                   <a:ext uri="{FF2B5EF4-FFF2-40B4-BE49-F238E27FC236}">
-                    <a16:creationId xmlns:a16="http://schemas.microsoft.com/office/drawing/2014/main" id="{C3BF6225-49C6-02E9-F0CC-18A3E58DCCDE}"/>
+                    <a16:creationId xmlns:a16="http://schemas.microsoft.com/office/drawing/2014/main" id="{C3E0A502-E035-8AE6-FE89-6E1961F8456E}"/>
                   </a:ext>
                 </a:extLst>
               </p:cNvPr>
@@ -7559,8 +7853,8 @@
             </p:blipFill>
             <p:spPr>
               <a:xfrm>
-                <a:off x="1877299" y="5523187"/>
-                <a:ext cx="662040" cy="241920"/>
+                <a:off x="2398579" y="5210270"/>
+                <a:ext cx="938880" cy="257400"/>
               </a:xfrm>
               <a:prstGeom prst="rect">
                 <a:avLst/>
@@ -7573,10 +7867,10 @@
         <mc:Choice Requires="p14">
           <p:contentPart p14:bwMode="auto" r:id="rId8">
             <p14:nvContentPartPr>
-              <p14:cNvPr id="18" name="Ink 17">
+              <p14:cNvPr id="6" name="Ink 5">
                 <a:extLst>
                   <a:ext uri="{FF2B5EF4-FFF2-40B4-BE49-F238E27FC236}">
-                    <a16:creationId xmlns:a16="http://schemas.microsoft.com/office/drawing/2014/main" id="{EB090E66-56BA-BF92-8EE1-1BE2D0632813}"/>
+                    <a16:creationId xmlns:a16="http://schemas.microsoft.com/office/drawing/2014/main" id="{A26D0B59-67A6-BCF4-611A-35D55B80409B}"/>
                   </a:ext>
                 </a:extLst>
               </p14:cNvPr>
@@ -7584,18 +7878,18 @@
               <p14:nvPr/>
             </p14:nvContentPartPr>
             <p14:xfrm>
-              <a:off x="1914019" y="5639827"/>
-              <a:ext cx="597600" cy="9360"/>
+              <a:off x="2511979" y="5562710"/>
+              <a:ext cx="503280" cy="18360"/>
             </p14:xfrm>
           </p:contentPart>
         </mc:Choice>
         <mc:Fallback xmlns="">
           <p:pic>
             <p:nvPicPr>
-              <p:cNvPr id="18" name="Ink 17">
+              <p:cNvPr id="6" name="Ink 5">
                 <a:extLst>
                   <a:ext uri="{FF2B5EF4-FFF2-40B4-BE49-F238E27FC236}">
-                    <a16:creationId xmlns:a16="http://schemas.microsoft.com/office/drawing/2014/main" id="{EB090E66-56BA-BF92-8EE1-1BE2D0632813}"/>
+                    <a16:creationId xmlns:a16="http://schemas.microsoft.com/office/drawing/2014/main" id="{A26D0B59-67A6-BCF4-611A-35D55B80409B}"/>
                   </a:ext>
                 </a:extLst>
               </p:cNvPr>
@@ -7610,8 +7904,8 @@
             </p:blipFill>
             <p:spPr>
               <a:xfrm>
-                <a:off x="1860019" y="5532187"/>
-                <a:ext cx="705240" cy="225000"/>
+                <a:off x="2458339" y="5455070"/>
+                <a:ext cx="610920" cy="234000"/>
               </a:xfrm>
               <a:prstGeom prst="rect">
                 <a:avLst/>
@@ -7624,10 +7918,10 @@
         <mc:Choice Requires="p14">
           <p:contentPart p14:bwMode="auto" r:id="rId10">
             <p14:nvContentPartPr>
-              <p14:cNvPr id="19" name="Ink 18">
+              <p14:cNvPr id="7" name="Ink 6">
                 <a:extLst>
                   <a:ext uri="{FF2B5EF4-FFF2-40B4-BE49-F238E27FC236}">
-                    <a16:creationId xmlns:a16="http://schemas.microsoft.com/office/drawing/2014/main" id="{3F3364B6-16F3-6DCB-318D-15221D669AE3}"/>
+                    <a16:creationId xmlns:a16="http://schemas.microsoft.com/office/drawing/2014/main" id="{C0DDB810-F29D-3E33-2433-802935EE64C7}"/>
                   </a:ext>
                 </a:extLst>
               </p14:cNvPr>
@@ -7635,18 +7929,18 @@
               <p14:nvPr/>
             </p14:nvContentPartPr>
             <p14:xfrm>
-              <a:off x="1613779" y="5409427"/>
-              <a:ext cx="524520" cy="217440"/>
+              <a:off x="2682979" y="5808950"/>
+              <a:ext cx="948240" cy="37440"/>
             </p14:xfrm>
           </p:contentPart>
         </mc:Choice>
         <mc:Fallback xmlns="">
           <p:pic>
             <p:nvPicPr>
-              <p:cNvPr id="19" name="Ink 18">
+              <p:cNvPr id="7" name="Ink 6">
                 <a:extLst>
                   <a:ext uri="{FF2B5EF4-FFF2-40B4-BE49-F238E27FC236}">
-                    <a16:creationId xmlns:a16="http://schemas.microsoft.com/office/drawing/2014/main" id="{3F3364B6-16F3-6DCB-318D-15221D669AE3}"/>
+                    <a16:creationId xmlns:a16="http://schemas.microsoft.com/office/drawing/2014/main" id="{C0DDB810-F29D-3E33-2433-802935EE64C7}"/>
                   </a:ext>
                 </a:extLst>
               </p:cNvPr>
@@ -7661,8 +7955,8 @@
             </p:blipFill>
             <p:spPr>
               <a:xfrm>
-                <a:off x="1559779" y="5301427"/>
-                <a:ext cx="632160" cy="433080"/>
+                <a:off x="2628979" y="5700950"/>
+                <a:ext cx="1055880" cy="253080"/>
               </a:xfrm>
               <a:prstGeom prst="rect">
                 <a:avLst/>
@@ -7671,57 +7965,35 @@
           </p:pic>
         </mc:Fallback>
       </mc:AlternateContent>
-      <mc:AlternateContent xmlns:mc="http://schemas.openxmlformats.org/markup-compatibility/2006" xmlns:p14="http://schemas.microsoft.com/office/powerpoint/2010/main">
-        <mc:Choice Requires="p14">
-          <p:contentPart p14:bwMode="auto" r:id="rId12">
-            <p14:nvContentPartPr>
-              <p14:cNvPr id="20" name="Ink 19">
-                <a:extLst>
-                  <a:ext uri="{FF2B5EF4-FFF2-40B4-BE49-F238E27FC236}">
-                    <a16:creationId xmlns:a16="http://schemas.microsoft.com/office/drawing/2014/main" id="{B2EBEBAE-95D3-BDFE-67CB-35B18FF066B6}"/>
-                  </a:ext>
-                </a:extLst>
-              </p14:cNvPr>
-              <p14:cNvContentPartPr/>
-              <p14:nvPr/>
-            </p14:nvContentPartPr>
-            <p14:xfrm>
-              <a:off x="2546179" y="5913427"/>
-              <a:ext cx="925560" cy="34920"/>
-            </p14:xfrm>
-          </p:contentPart>
-        </mc:Choice>
-        <mc:Fallback xmlns="">
-          <p:pic>
-            <p:nvPicPr>
-              <p:cNvPr id="20" name="Ink 19">
-                <a:extLst>
-                  <a:ext uri="{FF2B5EF4-FFF2-40B4-BE49-F238E27FC236}">
-                    <a16:creationId xmlns:a16="http://schemas.microsoft.com/office/drawing/2014/main" id="{B2EBEBAE-95D3-BDFE-67CB-35B18FF066B6}"/>
-                  </a:ext>
-                </a:extLst>
-              </p:cNvPr>
-              <p:cNvPicPr/>
-              <p:nvPr/>
-            </p:nvPicPr>
-            <p:blipFill>
-              <a:blip r:embed="rId13"/>
-              <a:stretch>
-                <a:fillRect/>
-              </a:stretch>
-            </p:blipFill>
-            <p:spPr>
-              <a:xfrm>
-                <a:off x="2492539" y="5805787"/>
-                <a:ext cx="1033200" cy="250560"/>
-              </a:xfrm>
-              <a:prstGeom prst="rect">
-                <a:avLst/>
-              </a:prstGeom>
-            </p:spPr>
-          </p:pic>
-        </mc:Fallback>
-      </mc:AlternateContent>
+      <p:sp>
+        <p:nvSpPr>
+          <p:cNvPr id="8" name="Slide Number Placeholder 7">
+            <a:extLst>
+              <a:ext uri="{FF2B5EF4-FFF2-40B4-BE49-F238E27FC236}">
+                <a16:creationId xmlns:a16="http://schemas.microsoft.com/office/drawing/2014/main" id="{1E81F256-323D-9157-2077-DACB83EF2545}"/>
+              </a:ext>
+            </a:extLst>
+          </p:cNvPr>
+          <p:cNvSpPr>
+            <a:spLocks noGrp="1"/>
+          </p:cNvSpPr>
+          <p:nvPr>
+            <p:ph type="sldNum" sz="quarter" idx="12"/>
+          </p:nvPr>
+        </p:nvSpPr>
+        <p:spPr/>
+        <p:txBody>
+          <a:bodyPr/>
+          <a:lstStyle/>
+          <a:p>
+            <a:fld id="{C014DD1E-5D91-48A3-AD6D-45FBA980D106}" type="slidenum">
+              <a:rPr lang="en-PK" smtClean="0"/>
+              <a:t>10</a:t>
+            </a:fld>
+            <a:endParaRPr lang="en-PK"/>
+          </a:p>
+        </p:txBody>
+      </p:sp>
     </p:spTree>
     <p:extLst>
       <p:ext uri="{BB962C8B-B14F-4D97-AF65-F5344CB8AC3E}">
@@ -7747,7 +8019,7 @@
 </p:sld>
 </file>
 
-<file path=ppt/slides/slide12.xml><?xml version="1.0" encoding="utf-8"?>
+<file path=ppt/slides/slide11.xml><?xml version="1.0" encoding="utf-8"?>
 <p:sld xmlns:a="http://schemas.openxmlformats.org/drawingml/2006/main" xmlns:r="http://schemas.openxmlformats.org/officeDocument/2006/relationships" xmlns:p="http://schemas.openxmlformats.org/presentationml/2006/main">
   <p:cSld>
     <p:spTree>
@@ -8080,6 +8352,35 @@
           </a:prstGeom>
         </p:spPr>
       </p:pic>
+      <p:sp>
+        <p:nvSpPr>
+          <p:cNvPr id="2" name="Slide Number Placeholder 1">
+            <a:extLst>
+              <a:ext uri="{FF2B5EF4-FFF2-40B4-BE49-F238E27FC236}">
+                <a16:creationId xmlns:a16="http://schemas.microsoft.com/office/drawing/2014/main" id="{797EB2F5-771E-6DB9-A706-47B638AD9CAE}"/>
+              </a:ext>
+            </a:extLst>
+          </p:cNvPr>
+          <p:cNvSpPr>
+            <a:spLocks noGrp="1"/>
+          </p:cNvSpPr>
+          <p:nvPr>
+            <p:ph type="sldNum" sz="quarter" idx="12"/>
+          </p:nvPr>
+        </p:nvSpPr>
+        <p:spPr/>
+        <p:txBody>
+          <a:bodyPr/>
+          <a:lstStyle/>
+          <a:p>
+            <a:fld id="{C014DD1E-5D91-48A3-AD6D-45FBA980D106}" type="slidenum">
+              <a:rPr lang="en-PK" smtClean="0"/>
+              <a:t>11</a:t>
+            </a:fld>
+            <a:endParaRPr lang="en-PK"/>
+          </a:p>
+        </p:txBody>
+      </p:sp>
     </p:spTree>
     <p:extLst>
       <p:ext uri="{BB962C8B-B14F-4D97-AF65-F5344CB8AC3E}">
@@ -8105,7 +8406,7 @@
 </p:sld>
 </file>
 
-<file path=ppt/slides/slide13.xml><?xml version="1.0" encoding="utf-8"?>
+<file path=ppt/slides/slide12.xml><?xml version="1.0" encoding="utf-8"?>
 <p:sld xmlns:a="http://schemas.openxmlformats.org/drawingml/2006/main" xmlns:r="http://schemas.openxmlformats.org/officeDocument/2006/relationships" xmlns:p="http://schemas.openxmlformats.org/presentationml/2006/main">
   <p:cSld>
     <p:spTree>
@@ -8146,7 +8447,7 @@
         </p:nvSpPr>
         <p:spPr>
           <a:xfrm>
-            <a:off x="990495" y="-12817"/>
+            <a:off x="990495" y="-294913"/>
             <a:ext cx="10360501" cy="1223963"/>
           </a:xfrm>
         </p:spPr>
@@ -8242,8 +8543,8 @@
         </p:nvSpPr>
         <p:spPr bwMode="auto">
           <a:xfrm>
-            <a:off x="837829" y="1103424"/>
-            <a:ext cx="6552727" cy="5339923"/>
+            <a:off x="837829" y="443567"/>
+            <a:ext cx="6552727" cy="5970865"/>
           </a:xfrm>
           <a:prstGeom prst="rect">
             <a:avLst/>
@@ -8307,6 +8608,34 @@
               <a:buNone/>
               <a:tabLst/>
             </a:pPr>
+            <a:endParaRPr kumimoji="0" lang="en-US" altLang="en-PK" sz="2100" b="0" i="0" u="none" strike="noStrike" cap="none" normalizeH="0" baseline="0" dirty="0">
+              <a:ln>
+                <a:noFill/>
+              </a:ln>
+              <a:solidFill>
+                <a:schemeClr val="tx1"/>
+              </a:solidFill>
+              <a:effectLst/>
+              <a:latin typeface="Arial" panose="020B0604020202020204" pitchFamily="34" charset="0"/>
+            </a:endParaRPr>
+          </a:p>
+          <a:p>
+            <a:pPr marL="0" marR="0" lvl="0" indent="0" algn="l" defTabSz="914400" rtl="0" eaLnBrk="0" fontAlgn="base" latinLnBrk="0" hangingPunct="0">
+              <a:lnSpc>
+                <a:spcPct val="100000"/>
+              </a:lnSpc>
+              <a:spcBef>
+                <a:spcPct val="0"/>
+              </a:spcBef>
+              <a:spcAft>
+                <a:spcPct val="0"/>
+              </a:spcAft>
+              <a:buClrTx/>
+              <a:buSzTx/>
+              <a:buFontTx/>
+              <a:buNone/>
+              <a:tabLst/>
+            </a:pPr>
             <a:endParaRPr kumimoji="0" lang="en-PK" altLang="en-PK" sz="2100" b="0" i="0" u="none" strike="noStrike" cap="none" normalizeH="0" baseline="0" dirty="0">
               <a:ln>
                 <a:noFill/>
@@ -8317,6 +8646,34 @@
               <a:effectLst/>
               <a:latin typeface="Arial" panose="020B0604020202020204" pitchFamily="34" charset="0"/>
             </a:endParaRPr>
+          </a:p>
+          <a:p>
+            <a:pPr defTabSz="914400" eaLnBrk="0" fontAlgn="base" hangingPunct="0">
+              <a:lnSpc>
+                <a:spcPct val="100000"/>
+              </a:lnSpc>
+              <a:spcBef>
+                <a:spcPct val="0"/>
+              </a:spcBef>
+              <a:spcAft>
+                <a:spcPct val="0"/>
+              </a:spcAft>
+              <a:buClrTx/>
+              <a:buSzTx/>
+            </a:pPr>
+            <a:r>
+              <a:rPr kumimoji="0" lang="en-US" altLang="en-PK" sz="2000" b="0" i="0" u="none" strike="noStrike" cap="none" normalizeH="0" baseline="0" dirty="0">
+                <a:ln>
+                  <a:noFill/>
+                </a:ln>
+                <a:solidFill>
+                  <a:schemeClr val="tx1"/>
+                </a:solidFill>
+                <a:effectLst/>
+                <a:latin typeface="Arial" panose="020B0604020202020204" pitchFamily="34" charset="0"/>
+              </a:rPr>
+              <a:t>FFT without Complex Numbers</a:t>
+            </a:r>
           </a:p>
           <a:p>
             <a:pPr defTabSz="914400" eaLnBrk="0" fontAlgn="base" hangingPunct="0">
@@ -8722,6 +9079,17 @@
               </a:rPr>
               <a:t>2x2 butterfly tile</a:t>
             </a:r>
+            <a:br>
+              <a:rPr lang="en-US" altLang="en-PK" sz="2000" b="1" dirty="0">
+                <a:latin typeface="Arial" panose="020B0604020202020204" pitchFamily="34" charset="0"/>
+              </a:rPr>
+            </a:br>
+            <a:r>
+              <a:rPr lang="en-US" altLang="en-PK" sz="2000" b="1" dirty="0">
+                <a:latin typeface="Arial" panose="020B0604020202020204" pitchFamily="34" charset="0"/>
+              </a:rPr>
+              <a:t>(4 Memory banks)</a:t>
+            </a:r>
             <a:endParaRPr kumimoji="0" lang="en-PK" altLang="en-PK" sz="2000" b="0" i="0" u="none" strike="noStrike" cap="none" normalizeH="0" baseline="0" dirty="0">
               <a:ln>
                 <a:noFill/>
@@ -8856,17 +9224,10 @@
               <a:buSzTx/>
             </a:pPr>
             <a:r>
-              <a:rPr kumimoji="0" lang="en-PK" altLang="en-PK" sz="2000" b="0" i="0" u="none" strike="noStrike" cap="none" normalizeH="0" baseline="0" dirty="0">
-                <a:ln>
-                  <a:noFill/>
-                </a:ln>
-                <a:solidFill>
-                  <a:schemeClr val="tx1"/>
-                </a:solidFill>
-                <a:effectLst/>
+              <a:rPr lang="en-PK" altLang="en-PK" sz="2000" dirty="0">
                 <a:latin typeface="Arial" panose="020B0604020202020204" pitchFamily="34" charset="0"/>
               </a:rPr>
-              <a:t>Four-bank conflict-free coefficient memory</a:t>
+              <a:t>q-specific shift-add modular reduction instead of Barrett reduction </a:t>
             </a:r>
             <a:endParaRPr kumimoji="0" lang="en-US" altLang="en-PK" sz="2000" b="0" i="0" u="none" strike="noStrike" cap="none" normalizeH="0" baseline="0" dirty="0">
               <a:ln>
@@ -8907,34 +9268,6 @@
               <a:effectLst/>
               <a:latin typeface="Arial" panose="020B0604020202020204" pitchFamily="34" charset="0"/>
             </a:endParaRPr>
-          </a:p>
-          <a:p>
-            <a:pPr defTabSz="914400" eaLnBrk="0" fontAlgn="base" hangingPunct="0">
-              <a:lnSpc>
-                <a:spcPct val="100000"/>
-              </a:lnSpc>
-              <a:spcBef>
-                <a:spcPct val="0"/>
-              </a:spcBef>
-              <a:spcAft>
-                <a:spcPct val="0"/>
-              </a:spcAft>
-              <a:buClrTx/>
-              <a:buSzTx/>
-            </a:pPr>
-            <a:r>
-              <a:rPr kumimoji="0" lang="en-PK" altLang="en-PK" sz="2000" b="0" i="0" u="none" strike="noStrike" cap="none" normalizeH="0" baseline="0" dirty="0">
-                <a:ln>
-                  <a:noFill/>
-                </a:ln>
-                <a:solidFill>
-                  <a:schemeClr val="tx1"/>
-                </a:solidFill>
-                <a:effectLst/>
-                <a:latin typeface="Arial" panose="020B0604020202020204" pitchFamily="34" charset="0"/>
-              </a:rPr>
-              <a:t>q-specific shift-add modular reduction instead of Barrett reduction </a:t>
-            </a:r>
           </a:p>
         </p:txBody>
       </p:sp>
@@ -8968,6 +9301,137 @@
           </a:prstGeom>
         </p:spPr>
       </p:pic>
+      <p:sp>
+        <p:nvSpPr>
+          <p:cNvPr id="2" name="Slide Number Placeholder 1">
+            <a:extLst>
+              <a:ext uri="{FF2B5EF4-FFF2-40B4-BE49-F238E27FC236}">
+                <a16:creationId xmlns:a16="http://schemas.microsoft.com/office/drawing/2014/main" id="{BA00F04C-A543-924D-E331-C8F03BFEF078}"/>
+              </a:ext>
+            </a:extLst>
+          </p:cNvPr>
+          <p:cNvSpPr>
+            <a:spLocks noGrp="1"/>
+          </p:cNvSpPr>
+          <p:nvPr>
+            <p:ph type="sldNum" sz="quarter" idx="12"/>
+          </p:nvPr>
+        </p:nvSpPr>
+        <p:spPr/>
+        <p:txBody>
+          <a:bodyPr/>
+          <a:lstStyle/>
+          <a:p>
+            <a:fld id="{C014DD1E-5D91-48A3-AD6D-45FBA980D106}" type="slidenum">
+              <a:rPr lang="en-PK" smtClean="0"/>
+              <a:t>12</a:t>
+            </a:fld>
+            <a:endParaRPr lang="en-PK"/>
+          </a:p>
+        </p:txBody>
+      </p:sp>
+      <mc:AlternateContent xmlns:mc="http://schemas.openxmlformats.org/markup-compatibility/2006">
+        <mc:Choice xmlns:p14="http://schemas.microsoft.com/office/powerpoint/2010/main" Requires="p14">
+          <p:contentPart p14:bwMode="auto" r:id="rId5">
+            <p14:nvContentPartPr>
+              <p14:cNvPr id="4" name="Ink 3">
+                <a:extLst>
+                  <a:ext uri="{FF2B5EF4-FFF2-40B4-BE49-F238E27FC236}">
+                    <a16:creationId xmlns:a16="http://schemas.microsoft.com/office/drawing/2014/main" id="{75EF114F-7C9B-C5C8-2A7E-A784BA16CFF5}"/>
+                  </a:ext>
+                </a:extLst>
+              </p14:cNvPr>
+              <p14:cNvContentPartPr/>
+              <p14:nvPr/>
+            </p14:nvContentPartPr>
+            <p14:xfrm>
+              <a:off x="1230379" y="6184507"/>
+              <a:ext cx="1983600" cy="132840"/>
+            </p14:xfrm>
+          </p:contentPart>
+        </mc:Choice>
+        <mc:Fallback>
+          <p:pic>
+            <p:nvPicPr>
+              <p:cNvPr id="4" name="Ink 3">
+                <a:extLst>
+                  <a:ext uri="{FF2B5EF4-FFF2-40B4-BE49-F238E27FC236}">
+                    <a16:creationId xmlns:a16="http://schemas.microsoft.com/office/drawing/2014/main" id="{75EF114F-7C9B-C5C8-2A7E-A784BA16CFF5}"/>
+                  </a:ext>
+                </a:extLst>
+              </p:cNvPr>
+              <p:cNvPicPr/>
+              <p:nvPr/>
+            </p:nvPicPr>
+            <p:blipFill>
+              <a:blip r:embed="rId6"/>
+              <a:stretch>
+                <a:fillRect/>
+              </a:stretch>
+            </p:blipFill>
+            <p:spPr>
+              <a:xfrm>
+                <a:off x="1176739" y="6076507"/>
+                <a:ext cx="2091240" cy="348480"/>
+              </a:xfrm>
+              <a:prstGeom prst="rect">
+                <a:avLst/>
+              </a:prstGeom>
+            </p:spPr>
+          </p:pic>
+        </mc:Fallback>
+      </mc:AlternateContent>
+      <mc:AlternateContent xmlns:mc="http://schemas.openxmlformats.org/markup-compatibility/2006">
+        <mc:Choice xmlns:p14="http://schemas.microsoft.com/office/powerpoint/2010/main" Requires="p14">
+          <p:contentPart p14:bwMode="auto" r:id="rId7">
+            <p14:nvContentPartPr>
+              <p14:cNvPr id="5" name="Ink 4">
+                <a:extLst>
+                  <a:ext uri="{FF2B5EF4-FFF2-40B4-BE49-F238E27FC236}">
+                    <a16:creationId xmlns:a16="http://schemas.microsoft.com/office/drawing/2014/main" id="{0D8E7942-D8DE-5F7A-EB3F-C7925F29000D}"/>
+                  </a:ext>
+                </a:extLst>
+              </p14:cNvPr>
+              <p14:cNvContentPartPr/>
+              <p14:nvPr/>
+            </p14:nvContentPartPr>
+            <p14:xfrm>
+              <a:off x="2716459" y="6186950"/>
+              <a:ext cx="598320" cy="9720"/>
+            </p14:xfrm>
+          </p:contentPart>
+        </mc:Choice>
+        <mc:Fallback>
+          <p:pic>
+            <p:nvPicPr>
+              <p:cNvPr id="5" name="Ink 4">
+                <a:extLst>
+                  <a:ext uri="{FF2B5EF4-FFF2-40B4-BE49-F238E27FC236}">
+                    <a16:creationId xmlns:a16="http://schemas.microsoft.com/office/drawing/2014/main" id="{0D8E7942-D8DE-5F7A-EB3F-C7925F29000D}"/>
+                  </a:ext>
+                </a:extLst>
+              </p:cNvPr>
+              <p:cNvPicPr/>
+              <p:nvPr/>
+            </p:nvPicPr>
+            <p:blipFill>
+              <a:blip r:embed="rId8"/>
+              <a:stretch>
+                <a:fillRect/>
+              </a:stretch>
+            </p:blipFill>
+            <p:spPr>
+              <a:xfrm>
+                <a:off x="2662459" y="6078950"/>
+                <a:ext cx="705960" cy="225360"/>
+              </a:xfrm>
+              <a:prstGeom prst="rect">
+                <a:avLst/>
+              </a:prstGeom>
+            </p:spPr>
+          </p:pic>
+        </mc:Fallback>
+      </mc:AlternateContent>
     </p:spTree>
     <p:extLst>
       <p:ext uri="{BB962C8B-B14F-4D97-AF65-F5344CB8AC3E}">
@@ -8993,7 +9457,7 @@
 </p:sld>
 </file>
 
-<file path=ppt/slides/slide14.xml><?xml version="1.0" encoding="utf-8"?>
+<file path=ppt/slides/slide13.xml><?xml version="1.0" encoding="utf-8"?>
 <p:sld xmlns:a="http://schemas.openxmlformats.org/drawingml/2006/main" xmlns:r="http://schemas.openxmlformats.org/officeDocument/2006/relationships" xmlns:p="http://schemas.openxmlformats.org/presentationml/2006/main">
   <p:cSld>
     <p:spTree>
@@ -9318,8 +9782,8 @@
         </p:nvSpPr>
         <p:spPr bwMode="auto">
           <a:xfrm>
-            <a:off x="963634" y="1124745"/>
-            <a:ext cx="9036042" cy="5909310"/>
+            <a:off x="932849" y="1111037"/>
+            <a:ext cx="8945824" cy="6093976"/>
           </a:xfrm>
           <a:prstGeom prst="rect">
             <a:avLst/>
@@ -9384,7 +9848,7 @@
               <a:tabLst/>
             </a:pPr>
             <a:r>
-              <a:rPr kumimoji="0" lang="en-PK" altLang="en-PK" sz="1800" b="0" i="0" u="none" strike="noStrike" cap="none" normalizeH="0" baseline="0" dirty="0">
+              <a:rPr kumimoji="0" lang="en-PK" altLang="en-PK" sz="1600" b="0" i="0" u="none" strike="noStrike" cap="none" normalizeH="0" baseline="0" dirty="0">
                 <a:ln>
                   <a:noFill/>
                 </a:ln>
@@ -9397,7 +9861,7 @@
               <a:t>Cover group samples each completed NTT transaction</a:t>
             </a:r>
             <a:br>
-              <a:rPr kumimoji="0" lang="en-US" altLang="en-PK" sz="1800" b="0" i="0" u="none" strike="noStrike" cap="none" normalizeH="0" baseline="0" dirty="0">
+              <a:rPr kumimoji="0" lang="en-US" altLang="en-PK" sz="1600" b="0" i="0" u="none" strike="noStrike" cap="none" normalizeH="0" baseline="0" dirty="0">
                 <a:ln>
                   <a:noFill/>
                 </a:ln>
@@ -9408,7 +9872,7 @@
                 <a:latin typeface="Arial" panose="020B0604020202020204" pitchFamily="34" charset="0"/>
               </a:rPr>
             </a:br>
-            <a:endParaRPr kumimoji="0" lang="en-PK" altLang="en-PK" sz="1800" b="0" i="0" u="none" strike="noStrike" cap="none" normalizeH="0" baseline="0" dirty="0">
+            <a:endParaRPr kumimoji="0" lang="en-PK" altLang="en-PK" sz="1600" b="0" i="0" u="none" strike="noStrike" cap="none" normalizeH="0" baseline="0" dirty="0">
               <a:ln>
                 <a:noFill/>
               </a:ln>
@@ -9437,7 +9901,7 @@
               <a:tabLst/>
             </a:pPr>
             <a:r>
-              <a:rPr kumimoji="0" lang="en-PK" altLang="en-PK" sz="1800" b="0" i="0" u="none" strike="noStrike" cap="none" normalizeH="0" baseline="0" dirty="0">
+              <a:rPr kumimoji="0" lang="en-PK" altLang="en-PK" sz="1600" b="0" i="0" u="none" strike="noStrike" cap="none" normalizeH="0" baseline="0" dirty="0">
                 <a:ln>
                   <a:noFill/>
                 </a:ln>
@@ -9462,7 +9926,7 @@
               <a:buChar char="•"/>
             </a:pPr>
             <a:r>
-              <a:rPr kumimoji="0" lang="en-PK" altLang="en-PK" sz="1800" b="0" i="0" u="none" strike="noStrike" cap="none" normalizeH="0" baseline="0" dirty="0">
+              <a:rPr kumimoji="0" lang="en-PK" altLang="en-PK" sz="1600" b="0" i="0" u="none" strike="noStrike" cap="none" normalizeH="0" baseline="0" dirty="0">
                 <a:ln>
                   <a:noFill/>
                 </a:ln>
@@ -9487,7 +9951,7 @@
               <a:buChar char="•"/>
             </a:pPr>
             <a:r>
-              <a:rPr kumimoji="0" lang="en-PK" altLang="en-PK" sz="1800" b="0" i="0" u="none" strike="noStrike" cap="none" normalizeH="0" baseline="0" dirty="0">
+              <a:rPr kumimoji="0" lang="en-PK" altLang="en-PK" sz="1600" b="0" i="0" u="none" strike="noStrike" cap="none" normalizeH="0" baseline="0" dirty="0">
                 <a:ln>
                   <a:noFill/>
                 </a:ln>
@@ -9512,7 +9976,7 @@
               <a:buChar char="•"/>
             </a:pPr>
             <a:r>
-              <a:rPr kumimoji="0" lang="en-PK" altLang="en-PK" sz="1800" b="0" i="0" u="none" strike="noStrike" cap="none" normalizeH="0" baseline="0" dirty="0">
+              <a:rPr kumimoji="0" lang="en-PK" altLang="en-PK" sz="1600" b="0" i="0" u="none" strike="noStrike" cap="none" normalizeH="0" baseline="0" dirty="0">
                 <a:ln>
                   <a:noFill/>
                 </a:ln>
@@ -9537,7 +10001,7 @@
               <a:buChar char="•"/>
             </a:pPr>
             <a:r>
-              <a:rPr kumimoji="0" lang="en-PK" altLang="en-PK" sz="1800" b="0" i="0" u="none" strike="noStrike" cap="none" normalizeH="0" baseline="0" dirty="0">
+              <a:rPr kumimoji="0" lang="en-PK" altLang="en-PK" sz="1600" b="0" i="0" u="none" strike="noStrike" cap="none" normalizeH="0" baseline="0" dirty="0">
                 <a:ln>
                   <a:noFill/>
                 </a:ln>
@@ -9550,7 +10014,7 @@
               <a:t>Output range: coefficients reduced modulo q</a:t>
             </a:r>
             <a:br>
-              <a:rPr kumimoji="0" lang="en-US" altLang="en-PK" sz="1800" b="0" i="0" u="none" strike="noStrike" cap="none" normalizeH="0" baseline="0" dirty="0">
+              <a:rPr kumimoji="0" lang="en-US" altLang="en-PK" sz="1600" b="0" i="0" u="none" strike="noStrike" cap="none" normalizeH="0" baseline="0" dirty="0">
                 <a:ln>
                   <a:noFill/>
                 </a:ln>
@@ -9561,7 +10025,7 @@
                 <a:latin typeface="Arial" panose="020B0604020202020204" pitchFamily="34" charset="0"/>
               </a:rPr>
             </a:br>
-            <a:endParaRPr kumimoji="0" lang="en-PK" altLang="en-PK" sz="1800" b="0" i="0" u="none" strike="noStrike" cap="none" normalizeH="0" baseline="0" dirty="0">
+            <a:endParaRPr kumimoji="0" lang="en-PK" altLang="en-PK" sz="1600" b="0" i="0" u="none" strike="noStrike" cap="none" normalizeH="0" baseline="0" dirty="0">
               <a:ln>
                 <a:noFill/>
               </a:ln>
@@ -9590,7 +10054,7 @@
               <a:tabLst/>
             </a:pPr>
             <a:r>
-              <a:rPr kumimoji="0" lang="en-PK" altLang="en-PK" sz="1800" b="0" i="0" u="none" strike="noStrike" cap="none" normalizeH="0" baseline="0" dirty="0">
+              <a:rPr kumimoji="0" lang="en-PK" altLang="en-PK" sz="1600" b="0" i="0" u="none" strike="noStrike" cap="none" normalizeH="0" baseline="0" dirty="0">
                 <a:ln>
                   <a:noFill/>
                 </a:ln>
@@ -9615,7 +10079,7 @@
               <a:buChar char="•"/>
             </a:pPr>
             <a:r>
-              <a:rPr kumimoji="0" lang="en-PK" altLang="en-PK" sz="1800" b="0" i="0" u="none" strike="noStrike" cap="none" normalizeH="0" baseline="0" dirty="0">
+              <a:rPr kumimoji="0" lang="en-PK" altLang="en-PK" sz="1600" b="0" i="0" u="none" strike="noStrike" cap="none" normalizeH="0" baseline="0" dirty="0">
                 <a:ln>
                   <a:noFill/>
                 </a:ln>
@@ -9640,7 +10104,7 @@
               <a:buChar char="•"/>
             </a:pPr>
             <a:r>
-              <a:rPr kumimoji="0" lang="en-PK" altLang="en-PK" sz="1800" b="0" i="0" u="none" strike="noStrike" cap="none" normalizeH="0" baseline="0" dirty="0">
+              <a:rPr kumimoji="0" lang="en-PK" altLang="en-PK" sz="1600" b="0" i="0" u="none" strike="noStrike" cap="none" normalizeH="0" baseline="0" dirty="0">
                 <a:ln>
                   <a:noFill/>
                 </a:ln>
@@ -9665,7 +10129,7 @@
               <a:buChar char="•"/>
             </a:pPr>
             <a:r>
-              <a:rPr kumimoji="0" lang="en-PK" altLang="en-PK" sz="1800" b="0" i="0" u="none" strike="noStrike" cap="none" normalizeH="0" baseline="0" dirty="0">
+              <a:rPr kumimoji="0" lang="en-PK" altLang="en-PK" sz="1600" b="0" i="0" u="none" strike="noStrike" cap="none" normalizeH="0" baseline="0" dirty="0">
                 <a:ln>
                   <a:noFill/>
                 </a:ln>
@@ -9678,7 +10142,7 @@
               <a:t>transform case x edge case</a:t>
             </a:r>
             <a:br>
-              <a:rPr kumimoji="0" lang="en-US" altLang="en-PK" sz="1800" b="0" i="0" u="none" strike="noStrike" cap="none" normalizeH="0" baseline="0" dirty="0">
+              <a:rPr kumimoji="0" lang="en-US" altLang="en-PK" sz="1600" b="0" i="0" u="none" strike="noStrike" cap="none" normalizeH="0" baseline="0" dirty="0">
                 <a:ln>
                   <a:noFill/>
                 </a:ln>
@@ -9689,7 +10153,7 @@
                 <a:latin typeface="Arial" panose="020B0604020202020204" pitchFamily="34" charset="0"/>
               </a:rPr>
             </a:br>
-            <a:endParaRPr kumimoji="0" lang="en-PK" altLang="en-PK" sz="1800" b="0" i="0" u="none" strike="noStrike" cap="none" normalizeH="0" baseline="0" dirty="0">
+            <a:endParaRPr kumimoji="0" lang="en-PK" altLang="en-PK" sz="1600" b="0" i="0" u="none" strike="noStrike" cap="none" normalizeH="0" baseline="0" dirty="0">
               <a:ln>
                 <a:noFill/>
               </a:ln>
@@ -9712,17 +10176,17 @@
               <a:buChar char="•"/>
             </a:pPr>
             <a:r>
-              <a:rPr lang="en-US" altLang="en-PK" sz="1800" dirty="0">
+              <a:rPr lang="en-US" altLang="en-PK" sz="1600" dirty="0">
                 <a:latin typeface="Arial" panose="020B0604020202020204" pitchFamily="34" charset="0"/>
               </a:rPr>
               <a:t>Verified against System Verilog golden model</a:t>
             </a:r>
             <a:br>
-              <a:rPr lang="en-US" altLang="en-PK" sz="1800" dirty="0">
+              <a:rPr lang="en-US" altLang="en-PK" sz="1600" dirty="0">
                 <a:latin typeface="Arial" panose="020B0604020202020204" pitchFamily="34" charset="0"/>
               </a:rPr>
             </a:br>
-            <a:endParaRPr lang="en-US" altLang="en-PK" sz="1800" dirty="0">
+            <a:endParaRPr lang="en-US" altLang="en-PK" sz="1600" dirty="0">
               <a:latin typeface="Arial" panose="020B0604020202020204" pitchFamily="34" charset="0"/>
             </a:endParaRPr>
           </a:p>
@@ -9732,7 +10196,7 @@
               <a:buChar char="•"/>
             </a:pPr>
             <a:r>
-              <a:rPr lang="en-US" sz="1800" dirty="0"/>
+              <a:rPr lang="en-US" sz="1600" dirty="0"/>
               <a:t>Results:</a:t>
             </a:r>
           </a:p>
@@ -9742,11 +10206,11 @@
               <a:buChar char="•"/>
             </a:pPr>
             <a:r>
-              <a:rPr lang="en-US" sz="1800" b="1" dirty="0"/>
+              <a:rPr lang="en-US" sz="1600" b="1" dirty="0"/>
               <a:t>53/53</a:t>
             </a:r>
             <a:r>
-              <a:rPr lang="en-US" sz="1800" dirty="0"/>
+              <a:rPr lang="en-US" sz="1600" dirty="0"/>
               <a:t> UVM tests passed</a:t>
             </a:r>
           </a:p>
@@ -9756,11 +10220,11 @@
               <a:buChar char="•"/>
             </a:pPr>
             <a:r>
-              <a:rPr lang="en-US" sz="1800" b="1" dirty="0"/>
+              <a:rPr lang="en-US" sz="1600" b="1" dirty="0"/>
               <a:t>100%</a:t>
             </a:r>
             <a:r>
-              <a:rPr lang="en-US" sz="1800" dirty="0"/>
+              <a:rPr lang="en-US" sz="1600" dirty="0"/>
               <a:t> functional coverage</a:t>
             </a:r>
           </a:p>
@@ -9770,13 +10234,55 @@
               <a:buChar char="•"/>
             </a:pPr>
             <a:r>
-              <a:rPr lang="en-US" sz="1800" dirty="0"/>
+              <a:rPr lang="en-US" sz="1600" dirty="0"/>
               <a:t>Fmax: </a:t>
             </a:r>
             <a:r>
-              <a:rPr lang="en-US" sz="1800" b="1" dirty="0"/>
+              <a:rPr lang="en-US" sz="1600" b="1" dirty="0"/>
               <a:t>75.44 MHz (Cyclone V)</a:t>
             </a:r>
+          </a:p>
+          <a:p>
+            <a:pPr marL="895243" lvl="1" indent="-285750">
+              <a:buFont typeface="Arial" panose="020B0604020202020204" pitchFamily="34" charset="0"/>
+              <a:buChar char="•"/>
+            </a:pPr>
+            <a:r>
+              <a:rPr lang="en-US" sz="1600" b="1" dirty="0"/>
+              <a:t>ALMS: 2,313 , DSPS: 6 , M10K: 18</a:t>
+            </a:r>
+          </a:p>
+          <a:p>
+            <a:pPr marL="895243" lvl="1" indent="-285750">
+              <a:buFont typeface="Arial" panose="020B0604020202020204" pitchFamily="34" charset="0"/>
+              <a:buChar char="•"/>
+            </a:pPr>
+            <a:r>
+              <a:rPr lang="en-US" sz="1600" b="1" dirty="0"/>
+              <a:t>Latency 299 </a:t>
+            </a:r>
+            <a:r>
+              <a:rPr lang="en-US" sz="1600" b="1" dirty="0" err="1"/>
+              <a:t>cyc</a:t>
+            </a:r>
+            <a:r>
+              <a:rPr lang="en-US" sz="1600" b="1" dirty="0"/>
+              <a:t>/</a:t>
+            </a:r>
+            <a:r>
+              <a:rPr lang="en-US" sz="1600" b="1" dirty="0" err="1"/>
+              <a:t>ntt</a:t>
+            </a:r>
+            <a:r>
+              <a:rPr lang="en-US" sz="1600" b="1" dirty="0"/>
+              <a:t> , 3.96 us </a:t>
+            </a:r>
+          </a:p>
+          <a:p>
+            <a:pPr marL="895243" lvl="1" indent="-285750">
+              <a:buFont typeface="Arial" panose="020B0604020202020204" pitchFamily="34" charset="0"/>
+              <a:buChar char="•"/>
+            </a:pPr>
             <a:endParaRPr lang="en-US" sz="1800" dirty="0"/>
           </a:p>
           <a:p>
@@ -9826,10 +10332,10 @@
         <mc:Choice Requires="p14">
           <p:contentPart p14:bwMode="auto" r:id="rId6">
             <p14:nvContentPartPr>
-              <p14:cNvPr id="8" name="Ink 7">
+              <p14:cNvPr id="2" name="Ink 1">
                 <a:extLst>
                   <a:ext uri="{FF2B5EF4-FFF2-40B4-BE49-F238E27FC236}">
-                    <a16:creationId xmlns:a16="http://schemas.microsoft.com/office/drawing/2014/main" id="{B94697FB-D84F-9A59-4E7F-8B1178D598CE}"/>
+                    <a16:creationId xmlns:a16="http://schemas.microsoft.com/office/drawing/2014/main" id="{780E1537-1C67-C619-58E5-5E18857747ED}"/>
                   </a:ext>
                 </a:extLst>
               </p14:cNvPr>
@@ -9837,18 +10343,18 @@
               <p14:nvPr/>
             </p14:nvContentPartPr>
             <p14:xfrm>
-              <a:off x="1956859" y="5733787"/>
-              <a:ext cx="474480" cy="3960"/>
+              <a:off x="1939579" y="5186776"/>
+              <a:ext cx="494640" cy="18720"/>
             </p14:xfrm>
           </p:contentPart>
         </mc:Choice>
         <mc:Fallback xmlns="">
           <p:pic>
             <p:nvPicPr>
-              <p:cNvPr id="8" name="Ink 7">
+              <p:cNvPr id="2" name="Ink 1">
                 <a:extLst>
                   <a:ext uri="{FF2B5EF4-FFF2-40B4-BE49-F238E27FC236}">
-                    <a16:creationId xmlns:a16="http://schemas.microsoft.com/office/drawing/2014/main" id="{B94697FB-D84F-9A59-4E7F-8B1178D598CE}"/>
+                    <a16:creationId xmlns:a16="http://schemas.microsoft.com/office/drawing/2014/main" id="{780E1537-1C67-C619-58E5-5E18857747ED}"/>
                   </a:ext>
                 </a:extLst>
               </p:cNvPr>
@@ -9863,8 +10369,8 @@
             </p:blipFill>
             <p:spPr>
               <a:xfrm>
-                <a:off x="1902859" y="5626147"/>
-                <a:ext cx="582120" cy="219600"/>
+                <a:off x="1885939" y="5078776"/>
+                <a:ext cx="602280" cy="234360"/>
               </a:xfrm>
               <a:prstGeom prst="rect">
                 <a:avLst/>
@@ -9877,10 +10383,10 @@
         <mc:Choice Requires="p14">
           <p:contentPart p14:bwMode="auto" r:id="rId8">
             <p14:nvContentPartPr>
-              <p14:cNvPr id="10" name="Ink 9">
+              <p14:cNvPr id="3" name="Ink 2">
                 <a:extLst>
                   <a:ext uri="{FF2B5EF4-FFF2-40B4-BE49-F238E27FC236}">
-                    <a16:creationId xmlns:a16="http://schemas.microsoft.com/office/drawing/2014/main" id="{D8066DAB-4C50-F88C-73D9-44B48EA23705}"/>
+                    <a16:creationId xmlns:a16="http://schemas.microsoft.com/office/drawing/2014/main" id="{FBC4F795-6472-3BE0-A8A5-F2A00E3EDAA5}"/>
                   </a:ext>
                 </a:extLst>
               </p14:cNvPr>
@@ -9888,18 +10394,18 @@
               <p14:nvPr/>
             </p14:nvContentPartPr>
             <p14:xfrm>
-              <a:off x="2007979" y="6005947"/>
-              <a:ext cx="516960" cy="36000"/>
+              <a:off x="1922659" y="5434456"/>
+              <a:ext cx="443520" cy="27360"/>
             </p14:xfrm>
           </p:contentPart>
         </mc:Choice>
         <mc:Fallback xmlns="">
           <p:pic>
             <p:nvPicPr>
-              <p:cNvPr id="10" name="Ink 9">
+              <p:cNvPr id="3" name="Ink 2">
                 <a:extLst>
                   <a:ext uri="{FF2B5EF4-FFF2-40B4-BE49-F238E27FC236}">
-                    <a16:creationId xmlns:a16="http://schemas.microsoft.com/office/drawing/2014/main" id="{D8066DAB-4C50-F88C-73D9-44B48EA23705}"/>
+                    <a16:creationId xmlns:a16="http://schemas.microsoft.com/office/drawing/2014/main" id="{FBC4F795-6472-3BE0-A8A5-F2A00E3EDAA5}"/>
                   </a:ext>
                 </a:extLst>
               </p:cNvPr>
@@ -9914,8 +10420,8 @@
             </p:blipFill>
             <p:spPr>
               <a:xfrm>
-                <a:off x="1953979" y="5897947"/>
-                <a:ext cx="624600" cy="251640"/>
+                <a:off x="1868659" y="5326816"/>
+                <a:ext cx="551160" cy="243000"/>
               </a:xfrm>
               <a:prstGeom prst="rect">
                 <a:avLst/>
@@ -9928,10 +10434,10 @@
         <mc:Choice Requires="p14">
           <p:contentPart p14:bwMode="auto" r:id="rId10">
             <p14:nvContentPartPr>
-              <p14:cNvPr id="12" name="Ink 11">
+              <p14:cNvPr id="6" name="Ink 5">
                 <a:extLst>
                   <a:ext uri="{FF2B5EF4-FFF2-40B4-BE49-F238E27FC236}">
-                    <a16:creationId xmlns:a16="http://schemas.microsoft.com/office/drawing/2014/main" id="{BC85519B-500D-D3E7-D468-5B578B197BD5}"/>
+                    <a16:creationId xmlns:a16="http://schemas.microsoft.com/office/drawing/2014/main" id="{9E44A958-FB42-E4F7-0844-E2B5A7343D95}"/>
                   </a:ext>
                 </a:extLst>
               </p14:cNvPr>
@@ -9939,18 +10445,18 @@
               <p14:nvPr/>
             </p14:nvContentPartPr>
             <p14:xfrm>
-              <a:off x="2640139" y="6289267"/>
-              <a:ext cx="880560" cy="360"/>
+              <a:off x="2495059" y="5673856"/>
+              <a:ext cx="828360" cy="18000"/>
             </p14:xfrm>
           </p:contentPart>
         </mc:Choice>
         <mc:Fallback xmlns="">
           <p:pic>
             <p:nvPicPr>
-              <p:cNvPr id="12" name="Ink 11">
+              <p:cNvPr id="6" name="Ink 5">
                 <a:extLst>
                   <a:ext uri="{FF2B5EF4-FFF2-40B4-BE49-F238E27FC236}">
-                    <a16:creationId xmlns:a16="http://schemas.microsoft.com/office/drawing/2014/main" id="{BC85519B-500D-D3E7-D468-5B578B197BD5}"/>
+                    <a16:creationId xmlns:a16="http://schemas.microsoft.com/office/drawing/2014/main" id="{9E44A958-FB42-E4F7-0844-E2B5A7343D95}"/>
                   </a:ext>
                 </a:extLst>
               </p:cNvPr>
@@ -9965,8 +10471,292 @@
             </p:blipFill>
             <p:spPr>
               <a:xfrm>
-                <a:off x="2586139" y="6181267"/>
-                <a:ext cx="988200" cy="216000"/>
+                <a:off x="2441059" y="5565856"/>
+                <a:ext cx="936000" cy="233640"/>
+              </a:xfrm>
+              <a:prstGeom prst="rect">
+                <a:avLst/>
+              </a:prstGeom>
+            </p:spPr>
+          </p:pic>
+        </mc:Fallback>
+      </mc:AlternateContent>
+      <mc:AlternateContent xmlns:mc="http://schemas.openxmlformats.org/markup-compatibility/2006" xmlns:p14="http://schemas.microsoft.com/office/powerpoint/2010/main">
+        <mc:Choice Requires="p14">
+          <p:contentPart p14:bwMode="auto" r:id="rId12">
+            <p14:nvContentPartPr>
+              <p14:cNvPr id="7" name="Ink 6">
+                <a:extLst>
+                  <a:ext uri="{FF2B5EF4-FFF2-40B4-BE49-F238E27FC236}">
+                    <a16:creationId xmlns:a16="http://schemas.microsoft.com/office/drawing/2014/main" id="{156672FB-FFA4-62E7-FCEA-1CC02A0AB234}"/>
+                  </a:ext>
+                </a:extLst>
+              </p14:cNvPr>
+              <p14:cNvContentPartPr/>
+              <p14:nvPr/>
+            </p14:nvContentPartPr>
+            <p14:xfrm>
+              <a:off x="2537899" y="5921536"/>
+              <a:ext cx="400680" cy="26280"/>
+            </p14:xfrm>
+          </p:contentPart>
+        </mc:Choice>
+        <mc:Fallback xmlns="">
+          <p:pic>
+            <p:nvPicPr>
+              <p:cNvPr id="7" name="Ink 6">
+                <a:extLst>
+                  <a:ext uri="{FF2B5EF4-FFF2-40B4-BE49-F238E27FC236}">
+                    <a16:creationId xmlns:a16="http://schemas.microsoft.com/office/drawing/2014/main" id="{156672FB-FFA4-62E7-FCEA-1CC02A0AB234}"/>
+                  </a:ext>
+                </a:extLst>
+              </p:cNvPr>
+              <p:cNvPicPr/>
+              <p:nvPr/>
+            </p:nvPicPr>
+            <p:blipFill>
+              <a:blip r:embed="rId13"/>
+              <a:stretch>
+                <a:fillRect/>
+              </a:stretch>
+            </p:blipFill>
+            <p:spPr>
+              <a:xfrm>
+                <a:off x="2483899" y="5813896"/>
+                <a:ext cx="508320" cy="241920"/>
+              </a:xfrm>
+              <a:prstGeom prst="rect">
+                <a:avLst/>
+              </a:prstGeom>
+            </p:spPr>
+          </p:pic>
+        </mc:Fallback>
+      </mc:AlternateContent>
+      <mc:AlternateContent xmlns:mc="http://schemas.openxmlformats.org/markup-compatibility/2006" xmlns:p14="http://schemas.microsoft.com/office/powerpoint/2010/main">
+        <mc:Choice Requires="p14">
+          <p:contentPart p14:bwMode="auto" r:id="rId14">
+            <p14:nvContentPartPr>
+              <p14:cNvPr id="11" name="Ink 10">
+                <a:extLst>
+                  <a:ext uri="{FF2B5EF4-FFF2-40B4-BE49-F238E27FC236}">
+                    <a16:creationId xmlns:a16="http://schemas.microsoft.com/office/drawing/2014/main" id="{8ECE5CC2-E3DC-E6AA-F80E-A03FD573E1A3}"/>
+                  </a:ext>
+                </a:extLst>
+              </p14:cNvPr>
+              <p14:cNvContentPartPr/>
+              <p14:nvPr/>
+            </p14:nvContentPartPr>
+            <p14:xfrm>
+              <a:off x="3691699" y="5921896"/>
+              <a:ext cx="10440" cy="13320"/>
+            </p14:xfrm>
+          </p:contentPart>
+        </mc:Choice>
+        <mc:Fallback xmlns="">
+          <p:pic>
+            <p:nvPicPr>
+              <p:cNvPr id="11" name="Ink 10">
+                <a:extLst>
+                  <a:ext uri="{FF2B5EF4-FFF2-40B4-BE49-F238E27FC236}">
+                    <a16:creationId xmlns:a16="http://schemas.microsoft.com/office/drawing/2014/main" id="{8ECE5CC2-E3DC-E6AA-F80E-A03FD573E1A3}"/>
+                  </a:ext>
+                </a:extLst>
+              </p:cNvPr>
+              <p:cNvPicPr/>
+              <p:nvPr/>
+            </p:nvPicPr>
+            <p:blipFill>
+              <a:blip r:embed="rId15"/>
+              <a:stretch>
+                <a:fillRect/>
+              </a:stretch>
+            </p:blipFill>
+            <p:spPr>
+              <a:xfrm>
+                <a:off x="3637699" y="5813896"/>
+                <a:ext cx="118080" cy="228960"/>
+              </a:xfrm>
+              <a:prstGeom prst="rect">
+                <a:avLst/>
+              </a:prstGeom>
+            </p:spPr>
+          </p:pic>
+        </mc:Fallback>
+      </mc:AlternateContent>
+      <mc:AlternateContent xmlns:mc="http://schemas.openxmlformats.org/markup-compatibility/2006" xmlns:p14="http://schemas.microsoft.com/office/powerpoint/2010/main">
+        <mc:Choice Requires="p14">
+          <p:contentPart p14:bwMode="auto" r:id="rId16">
+            <p14:nvContentPartPr>
+              <p14:cNvPr id="15" name="Ink 14">
+                <a:extLst>
+                  <a:ext uri="{FF2B5EF4-FFF2-40B4-BE49-F238E27FC236}">
+                    <a16:creationId xmlns:a16="http://schemas.microsoft.com/office/drawing/2014/main" id="{EC24B37E-1CE2-7C58-2CB1-E78823D0AFCC}"/>
+                  </a:ext>
+                </a:extLst>
+              </p14:cNvPr>
+              <p14:cNvContentPartPr/>
+              <p14:nvPr/>
+            </p14:nvContentPartPr>
+            <p14:xfrm>
+              <a:off x="4545979" y="5921896"/>
+              <a:ext cx="196200" cy="18000"/>
+            </p14:xfrm>
+          </p:contentPart>
+        </mc:Choice>
+        <mc:Fallback xmlns="">
+          <p:pic>
+            <p:nvPicPr>
+              <p:cNvPr id="15" name="Ink 14">
+                <a:extLst>
+                  <a:ext uri="{FF2B5EF4-FFF2-40B4-BE49-F238E27FC236}">
+                    <a16:creationId xmlns:a16="http://schemas.microsoft.com/office/drawing/2014/main" id="{EC24B37E-1CE2-7C58-2CB1-E78823D0AFCC}"/>
+                  </a:ext>
+                </a:extLst>
+              </p:cNvPr>
+              <p:cNvPicPr/>
+              <p:nvPr/>
+            </p:nvPicPr>
+            <p:blipFill>
+              <a:blip r:embed="rId17"/>
+              <a:stretch>
+                <a:fillRect/>
+              </a:stretch>
+            </p:blipFill>
+            <p:spPr>
+              <a:xfrm>
+                <a:off x="4491979" y="5813896"/>
+                <a:ext cx="303840" cy="233640"/>
+              </a:xfrm>
+              <a:prstGeom prst="rect">
+                <a:avLst/>
+              </a:prstGeom>
+            </p:spPr>
+          </p:pic>
+        </mc:Fallback>
+      </mc:AlternateContent>
+      <mc:AlternateContent xmlns:mc="http://schemas.openxmlformats.org/markup-compatibility/2006" xmlns:p14="http://schemas.microsoft.com/office/powerpoint/2010/main">
+        <mc:Choice Requires="p14">
+          <p:contentPart p14:bwMode="auto" r:id="rId18">
+            <p14:nvContentPartPr>
+              <p14:cNvPr id="16" name="Ink 15">
+                <a:extLst>
+                  <a:ext uri="{FF2B5EF4-FFF2-40B4-BE49-F238E27FC236}">
+                    <a16:creationId xmlns:a16="http://schemas.microsoft.com/office/drawing/2014/main" id="{AA4529CE-4772-F157-7163-9DE8F6CB4A69}"/>
+                  </a:ext>
+                </a:extLst>
+              </p14:cNvPr>
+              <p14:cNvContentPartPr/>
+              <p14:nvPr/>
+            </p14:nvContentPartPr>
+            <p14:xfrm>
+              <a:off x="2666059" y="6195496"/>
+              <a:ext cx="1306800" cy="360"/>
+            </p14:xfrm>
+          </p:contentPart>
+        </mc:Choice>
+        <mc:Fallback xmlns="">
+          <p:pic>
+            <p:nvPicPr>
+              <p:cNvPr id="16" name="Ink 15">
+                <a:extLst>
+                  <a:ext uri="{FF2B5EF4-FFF2-40B4-BE49-F238E27FC236}">
+                    <a16:creationId xmlns:a16="http://schemas.microsoft.com/office/drawing/2014/main" id="{AA4529CE-4772-F157-7163-9DE8F6CB4A69}"/>
+                  </a:ext>
+                </a:extLst>
+              </p:cNvPr>
+              <p:cNvPicPr/>
+              <p:nvPr/>
+            </p:nvPicPr>
+            <p:blipFill>
+              <a:blip r:embed="rId19"/>
+              <a:stretch>
+                <a:fillRect/>
+              </a:stretch>
+            </p:blipFill>
+            <p:spPr>
+              <a:xfrm>
+                <a:off x="2612419" y="6087496"/>
+                <a:ext cx="1414440" cy="216000"/>
+              </a:xfrm>
+              <a:prstGeom prst="rect">
+                <a:avLst/>
+              </a:prstGeom>
+            </p:spPr>
+          </p:pic>
+        </mc:Fallback>
+      </mc:AlternateContent>
+      <p:sp>
+        <p:nvSpPr>
+          <p:cNvPr id="17" name="Slide Number Placeholder 16">
+            <a:extLst>
+              <a:ext uri="{FF2B5EF4-FFF2-40B4-BE49-F238E27FC236}">
+                <a16:creationId xmlns:a16="http://schemas.microsoft.com/office/drawing/2014/main" id="{FC0C4B4C-8D68-FB53-C2BD-F26979A59412}"/>
+              </a:ext>
+            </a:extLst>
+          </p:cNvPr>
+          <p:cNvSpPr>
+            <a:spLocks noGrp="1"/>
+          </p:cNvSpPr>
+          <p:nvPr>
+            <p:ph type="sldNum" sz="quarter" idx="12"/>
+          </p:nvPr>
+        </p:nvSpPr>
+        <p:spPr/>
+        <p:txBody>
+          <a:bodyPr/>
+          <a:lstStyle/>
+          <a:p>
+            <a:fld id="{C014DD1E-5D91-48A3-AD6D-45FBA980D106}" type="slidenum">
+              <a:rPr lang="en-PK" smtClean="0"/>
+              <a:t>13</a:t>
+            </a:fld>
+            <a:endParaRPr lang="en-PK"/>
+          </a:p>
+        </p:txBody>
+      </p:sp>
+      <mc:AlternateContent xmlns:mc="http://schemas.openxmlformats.org/markup-compatibility/2006">
+        <mc:Choice xmlns:p14="http://schemas.microsoft.com/office/powerpoint/2010/main" Requires="p14">
+          <p:contentPart p14:bwMode="auto" r:id="rId20">
+            <p14:nvContentPartPr>
+              <p14:cNvPr id="8" name="Ink 7">
+                <a:extLst>
+                  <a:ext uri="{FF2B5EF4-FFF2-40B4-BE49-F238E27FC236}">
+                    <a16:creationId xmlns:a16="http://schemas.microsoft.com/office/drawing/2014/main" id="{FF88CEAB-EE71-3EDE-389B-8002AF7BFB9B}"/>
+                  </a:ext>
+                </a:extLst>
+              </p14:cNvPr>
+              <p14:cNvContentPartPr/>
+              <p14:nvPr/>
+            </p14:nvContentPartPr>
+            <p14:xfrm>
+              <a:off x="3990499" y="6169310"/>
+              <a:ext cx="398880" cy="81000"/>
+            </p14:xfrm>
+          </p:contentPart>
+        </mc:Choice>
+        <mc:Fallback>
+          <p:pic>
+            <p:nvPicPr>
+              <p:cNvPr id="8" name="Ink 7">
+                <a:extLst>
+                  <a:ext uri="{FF2B5EF4-FFF2-40B4-BE49-F238E27FC236}">
+                    <a16:creationId xmlns:a16="http://schemas.microsoft.com/office/drawing/2014/main" id="{FF88CEAB-EE71-3EDE-389B-8002AF7BFB9B}"/>
+                  </a:ext>
+                </a:extLst>
+              </p:cNvPr>
+              <p:cNvPicPr/>
+              <p:nvPr/>
+            </p:nvPicPr>
+            <p:blipFill>
+              <a:blip r:embed="rId21"/>
+              <a:stretch>
+                <a:fillRect/>
+              </a:stretch>
+            </p:blipFill>
+            <p:spPr>
+              <a:xfrm>
+                <a:off x="3936499" y="6061670"/>
+                <a:ext cx="506520" cy="296640"/>
               </a:xfrm>
               <a:prstGeom prst="rect">
                 <a:avLst/>
@@ -10000,7 +10790,7 @@
 </p:sld>
 </file>
 
-<file path=ppt/slides/slide15.xml><?xml version="1.0" encoding="utf-8"?>
+<file path=ppt/slides/slide14.xml><?xml version="1.0" encoding="utf-8"?>
 <p:sld xmlns:a="http://schemas.openxmlformats.org/drawingml/2006/main" xmlns:r="http://schemas.openxmlformats.org/officeDocument/2006/relationships" xmlns:p="http://schemas.openxmlformats.org/presentationml/2006/main">
   <p:cSld>
     <p:spTree>
@@ -10333,6 +11123,35 @@
           </a:prstGeom>
         </p:spPr>
       </p:pic>
+      <p:sp>
+        <p:nvSpPr>
+          <p:cNvPr id="2" name="Slide Number Placeholder 1">
+            <a:extLst>
+              <a:ext uri="{FF2B5EF4-FFF2-40B4-BE49-F238E27FC236}">
+                <a16:creationId xmlns:a16="http://schemas.microsoft.com/office/drawing/2014/main" id="{433B2BD5-EA07-54F4-4454-E3B621C5BC41}"/>
+              </a:ext>
+            </a:extLst>
+          </p:cNvPr>
+          <p:cNvSpPr>
+            <a:spLocks noGrp="1"/>
+          </p:cNvSpPr>
+          <p:nvPr>
+            <p:ph type="sldNum" sz="quarter" idx="12"/>
+          </p:nvPr>
+        </p:nvSpPr>
+        <p:spPr/>
+        <p:txBody>
+          <a:bodyPr/>
+          <a:lstStyle/>
+          <a:p>
+            <a:fld id="{C014DD1E-5D91-48A3-AD6D-45FBA980D106}" type="slidenum">
+              <a:rPr lang="en-PK" smtClean="0"/>
+              <a:t>14</a:t>
+            </a:fld>
+            <a:endParaRPr lang="en-PK"/>
+          </a:p>
+        </p:txBody>
+      </p:sp>
     </p:spTree>
     <p:extLst>
       <p:ext uri="{BB962C8B-B14F-4D97-AF65-F5344CB8AC3E}">
@@ -10358,7 +11177,831 @@
 </p:sld>
 </file>
 
+<file path=ppt/slides/slide15.xml><?xml version="1.0" encoding="utf-8"?>
+<p:sld xmlns:a="http://schemas.openxmlformats.org/drawingml/2006/main" xmlns:r="http://schemas.openxmlformats.org/officeDocument/2006/relationships" xmlns:p="http://schemas.openxmlformats.org/presentationml/2006/main">
+  <p:cSld>
+    <p:spTree>
+      <p:nvGrpSpPr>
+        <p:cNvPr id="1" name=""/>
+        <p:cNvGrpSpPr/>
+        <p:nvPr/>
+      </p:nvGrpSpPr>
+      <p:grpSpPr>
+        <a:xfrm>
+          <a:off x="0" y="0"/>
+          <a:ext cx="0" cy="0"/>
+          <a:chOff x="0" y="0"/>
+          <a:chExt cx="0" cy="0"/>
+        </a:xfrm>
+      </p:grpSpPr>
+      <p:sp>
+        <p:nvSpPr>
+          <p:cNvPr id="2" name="Title 1">
+            <a:extLst>
+              <a:ext uri="{FF2B5EF4-FFF2-40B4-BE49-F238E27FC236}">
+                <a16:creationId xmlns:a16="http://schemas.microsoft.com/office/drawing/2014/main" id="{9B55F224-2290-22B5-7515-4AF5CF6013DE}"/>
+              </a:ext>
+            </a:extLst>
+          </p:cNvPr>
+          <p:cNvSpPr>
+            <a:spLocks noGrp="1"/>
+          </p:cNvSpPr>
+          <p:nvPr>
+            <p:ph type="title"/>
+          </p:nvPr>
+        </p:nvSpPr>
+        <p:spPr>
+          <a:xfrm>
+            <a:off x="2494012" y="290118"/>
+            <a:ext cx="10288493" cy="347556"/>
+          </a:xfrm>
+        </p:spPr>
+        <p:txBody>
+          <a:bodyPr>
+            <a:normAutofit fontScale="90000"/>
+          </a:bodyPr>
+          <a:lstStyle/>
+          <a:p>
+            <a:r>
+              <a:rPr lang="en-US" dirty="0">
+                <a:solidFill>
+                  <a:schemeClr val="accent1">
+                    <a:lumMod val="20000"/>
+                    <a:lumOff val="80000"/>
+                  </a:schemeClr>
+                </a:solidFill>
+              </a:rPr>
+              <a:t>Comparison with published designs</a:t>
+            </a:r>
+            <a:endParaRPr lang="en-PK" dirty="0">
+              <a:solidFill>
+                <a:schemeClr val="accent1">
+                  <a:lumMod val="20000"/>
+                  <a:lumOff val="80000"/>
+                </a:schemeClr>
+              </a:solidFill>
+            </a:endParaRPr>
+          </a:p>
+        </p:txBody>
+      </p:sp>
+      <p:sp>
+        <p:nvSpPr>
+          <p:cNvPr id="3" name="Text Placeholder 2">
+            <a:extLst>
+              <a:ext uri="{FF2B5EF4-FFF2-40B4-BE49-F238E27FC236}">
+                <a16:creationId xmlns:a16="http://schemas.microsoft.com/office/drawing/2014/main" id="{48BD2F19-1F30-1047-D4B2-E2E1CD344CF8}"/>
+              </a:ext>
+            </a:extLst>
+          </p:cNvPr>
+          <p:cNvSpPr>
+            <a:spLocks noGrp="1"/>
+          </p:cNvSpPr>
+          <p:nvPr>
+            <p:ph type="body" idx="1"/>
+          </p:nvPr>
+        </p:nvSpPr>
+        <p:spPr>
+          <a:xfrm>
+            <a:off x="837828" y="1543094"/>
+            <a:ext cx="5082740" cy="914400"/>
+          </a:xfrm>
+        </p:spPr>
+        <p:txBody>
+          <a:bodyPr/>
+          <a:lstStyle/>
+          <a:p>
+            <a:r>
+              <a:rPr lang="en-US" u="sng" dirty="0">
+                <a:solidFill>
+                  <a:schemeClr val="accent1">
+                    <a:lumMod val="60000"/>
+                    <a:lumOff val="40000"/>
+                  </a:schemeClr>
+                </a:solidFill>
+              </a:rPr>
+              <a:t>NTT</a:t>
+            </a:r>
+            <a:endParaRPr lang="en-PK" u="sng" dirty="0">
+              <a:solidFill>
+                <a:schemeClr val="accent1">
+                  <a:lumMod val="60000"/>
+                  <a:lumOff val="40000"/>
+                </a:schemeClr>
+              </a:solidFill>
+            </a:endParaRPr>
+          </a:p>
+        </p:txBody>
+      </p:sp>
+      <p:pic>
+        <p:nvPicPr>
+          <p:cNvPr id="8" name="Content Placeholder 7">
+            <a:extLst>
+              <a:ext uri="{FF2B5EF4-FFF2-40B4-BE49-F238E27FC236}">
+                <a16:creationId xmlns:a16="http://schemas.microsoft.com/office/drawing/2014/main" id="{72415B74-0189-2A25-1CD5-B2A48FD6A752}"/>
+              </a:ext>
+            </a:extLst>
+          </p:cNvPr>
+          <p:cNvPicPr>
+            <a:picLocks noGrp="1" noChangeAspect="1"/>
+          </p:cNvPicPr>
+          <p:nvPr>
+            <p:ph sz="half" idx="2"/>
+          </p:nvPr>
+        </p:nvPicPr>
+        <p:blipFill>
+          <a:blip r:embed="rId2">
+            <a:extLst>
+              <a:ext uri="{28A0092B-C50C-407E-A947-70E740481C1C}">
+                <a14:useLocalDpi xmlns:a14="http://schemas.microsoft.com/office/drawing/2010/main" val="0"/>
+              </a:ext>
+            </a:extLst>
+          </a:blip>
+          <a:stretch>
+            <a:fillRect/>
+          </a:stretch>
+        </p:blipFill>
+        <p:spPr>
+          <a:xfrm>
+            <a:off x="1845698" y="764704"/>
+            <a:ext cx="10098791" cy="3288076"/>
+          </a:xfrm>
+        </p:spPr>
+      </p:pic>
+      <p:sp>
+        <p:nvSpPr>
+          <p:cNvPr id="5" name="Text Placeholder 4">
+            <a:extLst>
+              <a:ext uri="{FF2B5EF4-FFF2-40B4-BE49-F238E27FC236}">
+                <a16:creationId xmlns:a16="http://schemas.microsoft.com/office/drawing/2014/main" id="{000D0F7B-43DE-49E6-4610-E08AF7B7BBB3}"/>
+              </a:ext>
+            </a:extLst>
+          </p:cNvPr>
+          <p:cNvSpPr>
+            <a:spLocks noGrp="1"/>
+          </p:cNvSpPr>
+          <p:nvPr>
+            <p:ph type="body" sz="quarter" idx="3"/>
+          </p:nvPr>
+        </p:nvSpPr>
+        <p:spPr>
+          <a:xfrm>
+            <a:off x="477788" y="4942808"/>
+            <a:ext cx="5082740" cy="914400"/>
+          </a:xfrm>
+        </p:spPr>
+        <p:txBody>
+          <a:bodyPr/>
+          <a:lstStyle/>
+          <a:p>
+            <a:r>
+              <a:rPr lang="en-US" u="sng" dirty="0">
+                <a:solidFill>
+                  <a:schemeClr val="accent1">
+                    <a:lumMod val="60000"/>
+                    <a:lumOff val="40000"/>
+                  </a:schemeClr>
+                </a:solidFill>
+              </a:rPr>
+              <a:t>KECCAK</a:t>
+            </a:r>
+            <a:endParaRPr lang="en-PK" u="sng" dirty="0">
+              <a:solidFill>
+                <a:schemeClr val="accent1">
+                  <a:lumMod val="60000"/>
+                  <a:lumOff val="40000"/>
+                </a:schemeClr>
+              </a:solidFill>
+            </a:endParaRPr>
+          </a:p>
+        </p:txBody>
+      </p:sp>
+      <p:pic>
+        <p:nvPicPr>
+          <p:cNvPr id="10" name="Picture 9">
+            <a:extLst>
+              <a:ext uri="{FF2B5EF4-FFF2-40B4-BE49-F238E27FC236}">
+                <a16:creationId xmlns:a16="http://schemas.microsoft.com/office/drawing/2014/main" id="{371ABDDF-58F5-E084-85AD-EF0DAFCE3262}"/>
+              </a:ext>
+            </a:extLst>
+          </p:cNvPr>
+          <p:cNvPicPr>
+            <a:picLocks noChangeAspect="1"/>
+          </p:cNvPicPr>
+          <p:nvPr/>
+        </p:nvPicPr>
+        <p:blipFill>
+          <a:blip r:embed="rId3">
+            <a:extLst>
+              <a:ext uri="{28A0092B-C50C-407E-A947-70E740481C1C}">
+                <a14:useLocalDpi xmlns:a14="http://schemas.microsoft.com/office/drawing/2010/main" val="0"/>
+              </a:ext>
+            </a:extLst>
+          </a:blip>
+          <a:stretch>
+            <a:fillRect/>
+          </a:stretch>
+        </p:blipFill>
+        <p:spPr>
+          <a:xfrm>
+            <a:off x="1845698" y="4028102"/>
+            <a:ext cx="10098793" cy="2474617"/>
+          </a:xfrm>
+          <a:prstGeom prst="rect">
+            <a:avLst/>
+          </a:prstGeom>
+        </p:spPr>
+      </p:pic>
+      <p:sp>
+        <p:nvSpPr>
+          <p:cNvPr id="11" name="Slide Number Placeholder 10">
+            <a:extLst>
+              <a:ext uri="{FF2B5EF4-FFF2-40B4-BE49-F238E27FC236}">
+                <a16:creationId xmlns:a16="http://schemas.microsoft.com/office/drawing/2014/main" id="{0758737C-B464-0CC3-63A2-A322617E3F6A}"/>
+              </a:ext>
+            </a:extLst>
+          </p:cNvPr>
+          <p:cNvSpPr>
+            <a:spLocks noGrp="1"/>
+          </p:cNvSpPr>
+          <p:nvPr>
+            <p:ph type="sldNum" sz="quarter" idx="12"/>
+          </p:nvPr>
+        </p:nvSpPr>
+        <p:spPr/>
+        <p:txBody>
+          <a:bodyPr/>
+          <a:lstStyle/>
+          <a:p>
+            <a:fld id="{C014DD1E-5D91-48A3-AD6D-45FBA980D106}" type="slidenum">
+              <a:rPr lang="en-PK" smtClean="0"/>
+              <a:t>15</a:t>
+            </a:fld>
+            <a:endParaRPr lang="en-PK"/>
+          </a:p>
+        </p:txBody>
+      </p:sp>
+    </p:spTree>
+    <p:extLst>
+      <p:ext uri="{BB962C8B-B14F-4D97-AF65-F5344CB8AC3E}">
+        <p14:creationId xmlns:p14="http://schemas.microsoft.com/office/powerpoint/2010/main" val="3846308083"/>
+      </p:ext>
+    </p:extLst>
+  </p:cSld>
+  <p:clrMapOvr>
+    <a:masterClrMapping/>
+  </p:clrMapOvr>
+  <mc:AlternateContent xmlns:mc="http://schemas.openxmlformats.org/markup-compatibility/2006" xmlns:p14="http://schemas.microsoft.com/office/powerpoint/2010/main">
+    <mc:Choice Requires="p14">
+      <p:transition spd="med" p14:dur="700">
+        <p:fade/>
+      </p:transition>
+    </mc:Choice>
+    <mc:Fallback xmlns="">
+      <p:transition spd="med">
+        <p:fade/>
+      </p:transition>
+    </mc:Fallback>
+  </mc:AlternateContent>
+  <p:timing>
+    <p:tnLst>
+      <p:par>
+        <p:cTn id="1" dur="indefinite" restart="never" nodeType="tmRoot">
+          <p:childTnLst>
+            <p:seq concurrent="1" nextAc="seek">
+              <p:cTn id="2" dur="indefinite" nodeType="mainSeq">
+                <p:childTnLst>
+                  <p:par>
+                    <p:cTn id="3" fill="hold">
+                      <p:stCondLst>
+                        <p:cond delay="indefinite"/>
+                      </p:stCondLst>
+                      <p:childTnLst>
+                        <p:par>
+                          <p:cTn id="4" fill="hold">
+                            <p:stCondLst>
+                              <p:cond delay="0"/>
+                            </p:stCondLst>
+                            <p:childTnLst>
+                              <p:par>
+                                <p:cTn id="5" presetID="1" presetClass="entr" presetSubtype="0" fill="hold" grpId="0" nodeType="clickEffect">
+                                  <p:stCondLst>
+                                    <p:cond delay="0"/>
+                                  </p:stCondLst>
+                                  <p:childTnLst>
+                                    <p:set>
+                                      <p:cBhvr>
+                                        <p:cTn id="6" dur="1" fill="hold">
+                                          <p:stCondLst>
+                                            <p:cond delay="0"/>
+                                          </p:stCondLst>
+                                        </p:cTn>
+                                        <p:tgtEl>
+                                          <p:spTgt spid="3">
+                                            <p:txEl>
+                                              <p:pRg st="0" end="0"/>
+                                            </p:txEl>
+                                          </p:spTgt>
+                                        </p:tgtEl>
+                                        <p:attrNameLst>
+                                          <p:attrName>style.visibility</p:attrName>
+                                        </p:attrNameLst>
+                                      </p:cBhvr>
+                                      <p:to>
+                                        <p:strVal val="visible"/>
+                                      </p:to>
+                                    </p:set>
+                                  </p:childTnLst>
+                                </p:cTn>
+                              </p:par>
+                            </p:childTnLst>
+                          </p:cTn>
+                        </p:par>
+                      </p:childTnLst>
+                    </p:cTn>
+                  </p:par>
+                  <p:par>
+                    <p:cTn id="7" fill="hold">
+                      <p:stCondLst>
+                        <p:cond delay="indefinite"/>
+                      </p:stCondLst>
+                      <p:childTnLst>
+                        <p:par>
+                          <p:cTn id="8" fill="hold">
+                            <p:stCondLst>
+                              <p:cond delay="0"/>
+                            </p:stCondLst>
+                            <p:childTnLst>
+                              <p:par>
+                                <p:cTn id="9" presetID="1" presetClass="entr" presetSubtype="0" fill="hold" nodeType="clickEffect">
+                                  <p:stCondLst>
+                                    <p:cond delay="0"/>
+                                  </p:stCondLst>
+                                  <p:childTnLst>
+                                    <p:set>
+                                      <p:cBhvr>
+                                        <p:cTn id="10" dur="1" fill="hold">
+                                          <p:stCondLst>
+                                            <p:cond delay="0"/>
+                                          </p:stCondLst>
+                                        </p:cTn>
+                                        <p:tgtEl>
+                                          <p:spTgt spid="8"/>
+                                        </p:tgtEl>
+                                        <p:attrNameLst>
+                                          <p:attrName>style.visibility</p:attrName>
+                                        </p:attrNameLst>
+                                      </p:cBhvr>
+                                      <p:to>
+                                        <p:strVal val="visible"/>
+                                      </p:to>
+                                    </p:set>
+                                  </p:childTnLst>
+                                </p:cTn>
+                              </p:par>
+                            </p:childTnLst>
+                          </p:cTn>
+                        </p:par>
+                      </p:childTnLst>
+                    </p:cTn>
+                  </p:par>
+                  <p:par>
+                    <p:cTn id="11" fill="hold">
+                      <p:stCondLst>
+                        <p:cond delay="indefinite"/>
+                      </p:stCondLst>
+                      <p:childTnLst>
+                        <p:par>
+                          <p:cTn id="12" fill="hold">
+                            <p:stCondLst>
+                              <p:cond delay="0"/>
+                            </p:stCondLst>
+                            <p:childTnLst>
+                              <p:par>
+                                <p:cTn id="13" presetID="1" presetClass="entr" presetSubtype="0" fill="hold" grpId="0" nodeType="clickEffect">
+                                  <p:stCondLst>
+                                    <p:cond delay="0"/>
+                                  </p:stCondLst>
+                                  <p:childTnLst>
+                                    <p:set>
+                                      <p:cBhvr>
+                                        <p:cTn id="14" dur="1" fill="hold">
+                                          <p:stCondLst>
+                                            <p:cond delay="0"/>
+                                          </p:stCondLst>
+                                        </p:cTn>
+                                        <p:tgtEl>
+                                          <p:spTgt spid="5">
+                                            <p:txEl>
+                                              <p:pRg st="0" end="0"/>
+                                            </p:txEl>
+                                          </p:spTgt>
+                                        </p:tgtEl>
+                                        <p:attrNameLst>
+                                          <p:attrName>style.visibility</p:attrName>
+                                        </p:attrNameLst>
+                                      </p:cBhvr>
+                                      <p:to>
+                                        <p:strVal val="visible"/>
+                                      </p:to>
+                                    </p:set>
+                                  </p:childTnLst>
+                                </p:cTn>
+                              </p:par>
+                            </p:childTnLst>
+                          </p:cTn>
+                        </p:par>
+                      </p:childTnLst>
+                    </p:cTn>
+                  </p:par>
+                  <p:par>
+                    <p:cTn id="15" fill="hold">
+                      <p:stCondLst>
+                        <p:cond delay="indefinite"/>
+                      </p:stCondLst>
+                      <p:childTnLst>
+                        <p:par>
+                          <p:cTn id="16" fill="hold">
+                            <p:stCondLst>
+                              <p:cond delay="0"/>
+                            </p:stCondLst>
+                            <p:childTnLst>
+                              <p:par>
+                                <p:cTn id="17" presetID="1" presetClass="entr" presetSubtype="0" fill="hold" nodeType="clickEffect">
+                                  <p:stCondLst>
+                                    <p:cond delay="0"/>
+                                  </p:stCondLst>
+                                  <p:childTnLst>
+                                    <p:set>
+                                      <p:cBhvr>
+                                        <p:cTn id="18" dur="1" fill="hold">
+                                          <p:stCondLst>
+                                            <p:cond delay="0"/>
+                                          </p:stCondLst>
+                                        </p:cTn>
+                                        <p:tgtEl>
+                                          <p:spTgt spid="10"/>
+                                        </p:tgtEl>
+                                        <p:attrNameLst>
+                                          <p:attrName>style.visibility</p:attrName>
+                                        </p:attrNameLst>
+                                      </p:cBhvr>
+                                      <p:to>
+                                        <p:strVal val="visible"/>
+                                      </p:to>
+                                    </p:set>
+                                  </p:childTnLst>
+                                </p:cTn>
+                              </p:par>
+                            </p:childTnLst>
+                          </p:cTn>
+                        </p:par>
+                      </p:childTnLst>
+                    </p:cTn>
+                  </p:par>
+                </p:childTnLst>
+              </p:cTn>
+              <p:prevCondLst>
+                <p:cond evt="onPrev" delay="0">
+                  <p:tgtEl>
+                    <p:sldTgt/>
+                  </p:tgtEl>
+                </p:cond>
+              </p:prevCondLst>
+              <p:nextCondLst>
+                <p:cond evt="onNext" delay="0">
+                  <p:tgtEl>
+                    <p:sldTgt/>
+                  </p:tgtEl>
+                </p:cond>
+              </p:nextCondLst>
+            </p:seq>
+          </p:childTnLst>
+        </p:cTn>
+      </p:par>
+    </p:tnLst>
+    <p:bldLst>
+      <p:bldP spid="3" grpId="0" build="p"/>
+      <p:bldP spid="5" grpId="0" build="p"/>
+    </p:bldLst>
+  </p:timing>
+</p:sld>
+</file>
+
 <file path=ppt/slides/slide16.xml><?xml version="1.0" encoding="utf-8"?>
+<p:sld xmlns:a="http://schemas.openxmlformats.org/drawingml/2006/main" xmlns:r="http://schemas.openxmlformats.org/officeDocument/2006/relationships" xmlns:p="http://schemas.openxmlformats.org/presentationml/2006/main">
+  <p:cSld>
+    <p:spTree>
+      <p:nvGrpSpPr>
+        <p:cNvPr id="1" name="">
+          <a:extLst>
+            <a:ext uri="{FF2B5EF4-FFF2-40B4-BE49-F238E27FC236}">
+              <a16:creationId xmlns:a16="http://schemas.microsoft.com/office/drawing/2014/main" id="{1E588C02-93AB-473C-747C-A4F5651B35D9}"/>
+            </a:ext>
+          </a:extLst>
+        </p:cNvPr>
+        <p:cNvGrpSpPr/>
+        <p:nvPr/>
+      </p:nvGrpSpPr>
+      <p:grpSpPr>
+        <a:xfrm>
+          <a:off x="0" y="0"/>
+          <a:ext cx="0" cy="0"/>
+          <a:chOff x="0" y="0"/>
+          <a:chExt cx="0" cy="0"/>
+        </a:xfrm>
+      </p:grpSpPr>
+      <p:sp>
+        <p:nvSpPr>
+          <p:cNvPr id="13" name="Title 12">
+            <a:extLst>
+              <a:ext uri="{FF2B5EF4-FFF2-40B4-BE49-F238E27FC236}">
+                <a16:creationId xmlns:a16="http://schemas.microsoft.com/office/drawing/2014/main" id="{CE05EE48-4084-24CC-7765-71EEC46FE920}"/>
+              </a:ext>
+            </a:extLst>
+          </p:cNvPr>
+          <p:cNvSpPr>
+            <a:spLocks noGrp="1"/>
+          </p:cNvSpPr>
+          <p:nvPr>
+            <p:ph type="title"/>
+          </p:nvPr>
+        </p:nvSpPr>
+        <p:spPr/>
+        <p:txBody>
+          <a:bodyPr>
+            <a:normAutofit/>
+          </a:bodyPr>
+          <a:lstStyle/>
+          <a:p>
+            <a:br>
+              <a:rPr lang="en-US" dirty="0"/>
+            </a:br>
+            <a:r>
+              <a:rPr lang="en-US" dirty="0">
+                <a:solidFill>
+                  <a:schemeClr val="accent1">
+                    <a:lumMod val="20000"/>
+                    <a:lumOff val="80000"/>
+                  </a:schemeClr>
+                </a:solidFill>
+              </a:rPr>
+              <a:t>Remaining Work</a:t>
+            </a:r>
+          </a:p>
+        </p:txBody>
+      </p:sp>
+      <p:sp>
+        <p:nvSpPr>
+          <p:cNvPr id="14" name="Content Placeholder 13">
+            <a:extLst>
+              <a:ext uri="{FF2B5EF4-FFF2-40B4-BE49-F238E27FC236}">
+                <a16:creationId xmlns:a16="http://schemas.microsoft.com/office/drawing/2014/main" id="{E7E7F377-7CA7-914C-2C92-DCD17FBD03D1}"/>
+              </a:ext>
+            </a:extLst>
+          </p:cNvPr>
+          <p:cNvSpPr>
+            <a:spLocks noGrp="1"/>
+          </p:cNvSpPr>
+          <p:nvPr>
+            <p:ph idx="1"/>
+          </p:nvPr>
+        </p:nvSpPr>
+        <p:spPr/>
+        <p:txBody>
+          <a:bodyPr>
+            <a:normAutofit/>
+          </a:bodyPr>
+          <a:lstStyle/>
+          <a:p>
+            <a:r>
+              <a:rPr lang="en-US" sz="2100" dirty="0"/>
+              <a:t>Sampler</a:t>
+            </a:r>
+          </a:p>
+          <a:p>
+            <a:r>
+              <a:rPr lang="en-US" sz="2100" dirty="0"/>
+              <a:t>Rounding/decomposition logic</a:t>
+            </a:r>
+          </a:p>
+          <a:p>
+            <a:r>
+              <a:rPr lang="en-US" sz="2100" dirty="0" err="1"/>
+              <a:t>Dilithium</a:t>
+            </a:r>
+            <a:r>
+              <a:rPr lang="en-US" sz="2100" dirty="0"/>
+              <a:t> Main Controller and Module Integration</a:t>
+            </a:r>
+          </a:p>
+          <a:p>
+            <a:r>
+              <a:rPr lang="en-US" sz="2100" dirty="0"/>
+              <a:t>Complete </a:t>
+            </a:r>
+            <a:r>
+              <a:rPr lang="en-US" sz="2100" dirty="0" err="1"/>
+              <a:t>Dilithium</a:t>
+            </a:r>
+            <a:r>
+              <a:rPr lang="en-US" sz="2100" dirty="0"/>
+              <a:t> </a:t>
+            </a:r>
+            <a:r>
+              <a:rPr lang="en-US" sz="2100" dirty="0" err="1"/>
+              <a:t>Verfication</a:t>
+            </a:r>
+            <a:r>
+              <a:rPr lang="en-US" sz="2100" dirty="0"/>
+              <a:t> and Synthesis</a:t>
+            </a:r>
+          </a:p>
+          <a:p>
+            <a:r>
+              <a:rPr lang="en-US" sz="2100" dirty="0"/>
+              <a:t>end-to-end ML-DSA KAT verification</a:t>
+            </a:r>
+          </a:p>
+          <a:p>
+            <a:endParaRPr lang="en-US" sz="2100" dirty="0"/>
+          </a:p>
+        </p:txBody>
+      </p:sp>
+      <p:sp>
+        <p:nvSpPr>
+          <p:cNvPr id="3" name="Rectangle 2">
+            <a:extLst>
+              <a:ext uri="{FF2B5EF4-FFF2-40B4-BE49-F238E27FC236}">
+                <a16:creationId xmlns:a16="http://schemas.microsoft.com/office/drawing/2014/main" id="{F0CF72F7-4312-1EEA-60FC-E9111612340E}"/>
+              </a:ext>
+            </a:extLst>
+          </p:cNvPr>
+          <p:cNvSpPr>
+            <a:spLocks noChangeArrowheads="1"/>
+          </p:cNvSpPr>
+          <p:nvPr/>
+        </p:nvSpPr>
+        <p:spPr bwMode="auto">
+          <a:xfrm>
+            <a:off x="5734372" y="916966"/>
+            <a:ext cx="184731" cy="646331"/>
+          </a:xfrm>
+          <a:prstGeom prst="rect">
+            <a:avLst/>
+          </a:prstGeom>
+          <a:noFill/>
+          <a:ln>
+            <a:noFill/>
+          </a:ln>
+          <a:effectLst/>
+          <a:extLst>
+            <a:ext uri="{909E8E84-426E-40DD-AFC4-6F175D3DCCD1}">
+              <a14:hiddenFill xmlns:a14="http://schemas.microsoft.com/office/drawing/2010/main">
+                <a:solidFill>
+                  <a:schemeClr val="accent1"/>
+                </a:solidFill>
+              </a14:hiddenFill>
+            </a:ext>
+            <a:ext uri="{91240B29-F687-4F45-9708-019B960494DF}">
+              <a14:hiddenLine xmlns:a14="http://schemas.microsoft.com/office/drawing/2010/main" w="9525">
+                <a:solidFill>
+                  <a:schemeClr val="tx1"/>
+                </a:solidFill>
+                <a:miter lim="800000"/>
+                <a:headEnd/>
+                <a:tailEnd/>
+              </a14:hiddenLine>
+            </a:ext>
+            <a:ext uri="{AF507438-7753-43E0-B8FC-AC1667EBCBE1}">
+              <a14:hiddenEffects xmlns:a14="http://schemas.microsoft.com/office/drawing/2010/main">
+                <a:effectLst>
+                  <a:outerShdw dist="35921" dir="2700000" algn="ctr" rotWithShape="0">
+                    <a:schemeClr val="bg2"/>
+                  </a:outerShdw>
+                </a:effectLst>
+              </a14:hiddenEffects>
+            </a:ext>
+          </a:extLst>
+        </p:spPr>
+        <p:txBody>
+          <a:bodyPr vert="horz" wrap="none" lIns="91440" tIns="45720" rIns="91440" bIns="45720" numCol="1" anchor="ctr" anchorCtr="0" compatLnSpc="1">
+            <a:prstTxWarp prst="textNoShape">
+              <a:avLst/>
+            </a:prstTxWarp>
+            <a:spAutoFit/>
+          </a:bodyPr>
+          <a:lstStyle/>
+          <a:p>
+            <a:pPr marL="0" marR="0" lvl="0" indent="0" algn="l" defTabSz="914400" rtl="0" eaLnBrk="0" fontAlgn="base" latinLnBrk="0" hangingPunct="0">
+              <a:lnSpc>
+                <a:spcPct val="100000"/>
+              </a:lnSpc>
+              <a:spcBef>
+                <a:spcPct val="0"/>
+              </a:spcBef>
+              <a:spcAft>
+                <a:spcPct val="0"/>
+              </a:spcAft>
+              <a:buClrTx/>
+              <a:buSzTx/>
+              <a:buFontTx/>
+              <a:buNone/>
+              <a:tabLst/>
+            </a:pPr>
+            <a:endParaRPr kumimoji="0" lang="en-PK" altLang="en-PK" sz="1800" b="0" i="0" u="none" strike="noStrike" cap="none" normalizeH="0" baseline="0" dirty="0">
+              <a:ln>
+                <a:noFill/>
+              </a:ln>
+              <a:solidFill>
+                <a:schemeClr val="tx1"/>
+              </a:solidFill>
+              <a:effectLst/>
+              <a:latin typeface="Arial" panose="020B0604020202020204" pitchFamily="34" charset="0"/>
+            </a:endParaRPr>
+          </a:p>
+          <a:p>
+            <a:pPr marL="0" marR="0" lvl="0" indent="0" algn="l" defTabSz="914400" rtl="0" eaLnBrk="0" fontAlgn="base" latinLnBrk="0" hangingPunct="0">
+              <a:lnSpc>
+                <a:spcPct val="100000"/>
+              </a:lnSpc>
+              <a:spcBef>
+                <a:spcPct val="0"/>
+              </a:spcBef>
+              <a:spcAft>
+                <a:spcPct val="0"/>
+              </a:spcAft>
+              <a:buClrTx/>
+              <a:buSzTx/>
+              <a:tabLst/>
+            </a:pPr>
+            <a:endParaRPr kumimoji="0" lang="en-PK" altLang="en-PK" sz="1800" b="0" i="0" u="none" strike="noStrike" cap="none" normalizeH="0" baseline="0" dirty="0">
+              <a:ln>
+                <a:noFill/>
+              </a:ln>
+              <a:solidFill>
+                <a:schemeClr val="tx1"/>
+              </a:solidFill>
+              <a:effectLst/>
+              <a:latin typeface="Arial" panose="020B0604020202020204" pitchFamily="34" charset="0"/>
+            </a:endParaRPr>
+          </a:p>
+        </p:txBody>
+      </p:sp>
+      <p:sp>
+        <p:nvSpPr>
+          <p:cNvPr id="4" name="Slide Number Placeholder 3">
+            <a:extLst>
+              <a:ext uri="{FF2B5EF4-FFF2-40B4-BE49-F238E27FC236}">
+                <a16:creationId xmlns:a16="http://schemas.microsoft.com/office/drawing/2014/main" id="{6BE4D132-2D55-6E3B-B19C-261F4C8B8AEA}"/>
+              </a:ext>
+            </a:extLst>
+          </p:cNvPr>
+          <p:cNvSpPr>
+            <a:spLocks noGrp="1"/>
+          </p:cNvSpPr>
+          <p:nvPr>
+            <p:ph type="sldNum" sz="quarter" idx="12"/>
+          </p:nvPr>
+        </p:nvSpPr>
+        <p:spPr/>
+        <p:txBody>
+          <a:bodyPr/>
+          <a:lstStyle/>
+          <a:p>
+            <a:fld id="{C014DD1E-5D91-48A3-AD6D-45FBA980D106}" type="slidenum">
+              <a:rPr lang="en-PK" smtClean="0"/>
+              <a:t>16</a:t>
+            </a:fld>
+            <a:endParaRPr lang="en-PK"/>
+          </a:p>
+        </p:txBody>
+      </p:sp>
+    </p:spTree>
+    <p:extLst>
+      <p:ext uri="{BB962C8B-B14F-4D97-AF65-F5344CB8AC3E}">
+        <p14:creationId xmlns:p14="http://schemas.microsoft.com/office/powerpoint/2010/main" val="266761052"/>
+      </p:ext>
+    </p:extLst>
+  </p:cSld>
+  <p:clrMapOvr>
+    <a:masterClrMapping/>
+  </p:clrMapOvr>
+  <mc:AlternateContent xmlns:mc="http://schemas.openxmlformats.org/markup-compatibility/2006" xmlns:p14="http://schemas.microsoft.com/office/powerpoint/2010/main">
+    <mc:Choice Requires="p14">
+      <p:transition spd="med" p14:dur="700">
+        <p:fade/>
+      </p:transition>
+    </mc:Choice>
+    <mc:Fallback xmlns="">
+      <p:transition spd="med">
+        <p:fade/>
+      </p:transition>
+    </mc:Fallback>
+  </mc:AlternateContent>
+</p:sld>
+</file>
+
+<file path=ppt/slides/slide17.xml><?xml version="1.0" encoding="utf-8"?>
 <p:sld xmlns:a="http://schemas.openxmlformats.org/drawingml/2006/main" xmlns:r="http://schemas.openxmlformats.org/officeDocument/2006/relationships" xmlns:p="http://schemas.openxmlformats.org/presentationml/2006/main">
   <p:cSld>
     <p:spTree>
@@ -10426,12 +12069,41 @@
           </a:p>
         </p:txBody>
       </p:sp>
+      <p:sp>
+        <p:nvSpPr>
+          <p:cNvPr id="3" name="Slide Number Placeholder 2">
+            <a:extLst>
+              <a:ext uri="{FF2B5EF4-FFF2-40B4-BE49-F238E27FC236}">
+                <a16:creationId xmlns:a16="http://schemas.microsoft.com/office/drawing/2014/main" id="{B9382DD5-6E8D-64EF-EA9F-6C0C00D659A5}"/>
+              </a:ext>
+            </a:extLst>
+          </p:cNvPr>
+          <p:cNvSpPr>
+            <a:spLocks noGrp="1"/>
+          </p:cNvSpPr>
+          <p:nvPr>
+            <p:ph type="sldNum" sz="quarter" idx="12"/>
+          </p:nvPr>
+        </p:nvSpPr>
+        <p:spPr/>
+        <p:txBody>
+          <a:bodyPr/>
+          <a:lstStyle/>
+          <a:p>
+            <a:fld id="{C014DD1E-5D91-48A3-AD6D-45FBA980D106}" type="slidenum">
+              <a:rPr lang="en-PK" smtClean="0"/>
+              <a:t>17</a:t>
+            </a:fld>
+            <a:endParaRPr lang="en-PK"/>
+          </a:p>
+        </p:txBody>
+      </p:sp>
       <p:pic>
         <p:nvPicPr>
-          <p:cNvPr id="9" name="Picture 8">
+          <p:cNvPr id="7" name="Picture 6">
             <a:extLst>
               <a:ext uri="{FF2B5EF4-FFF2-40B4-BE49-F238E27FC236}">
-                <a16:creationId xmlns:a16="http://schemas.microsoft.com/office/drawing/2014/main" id="{D562977B-5F06-12E1-E0CA-469A0EF301FF}"/>
+                <a16:creationId xmlns:a16="http://schemas.microsoft.com/office/drawing/2014/main" id="{56E51291-FA9D-B0EC-FF08-BA71A36C286B}"/>
               </a:ext>
             </a:extLst>
           </p:cNvPr>
@@ -10448,22 +12120,22 @@
         </p:blipFill>
         <p:spPr>
           <a:xfrm>
-            <a:off x="1917948" y="775054"/>
-            <a:ext cx="7692684" cy="5754834"/>
+            <a:off x="1413892" y="908720"/>
+            <a:ext cx="8591308" cy="5534797"/>
           </a:xfrm>
           <a:prstGeom prst="rect">
             <a:avLst/>
           </a:prstGeom>
         </p:spPr>
       </p:pic>
-      <mc:AlternateContent xmlns:mc="http://schemas.openxmlformats.org/markup-compatibility/2006" xmlns:p14="http://schemas.microsoft.com/office/powerpoint/2010/main">
-        <mc:Choice Requires="p14">
+      <mc:AlternateContent xmlns:mc="http://schemas.openxmlformats.org/markup-compatibility/2006">
+        <mc:Choice xmlns:p14="http://schemas.microsoft.com/office/powerpoint/2010/main" Requires="p14">
           <p:contentPart p14:bwMode="auto" r:id="rId3">
             <p14:nvContentPartPr>
-              <p14:cNvPr id="4" name="Ink 3">
+              <p14:cNvPr id="12" name="Ink 11">
                 <a:extLst>
                   <a:ext uri="{FF2B5EF4-FFF2-40B4-BE49-F238E27FC236}">
-                    <a16:creationId xmlns:a16="http://schemas.microsoft.com/office/drawing/2014/main" id="{A3634201-1AD0-25CB-BD8E-019E4845CAA4}"/>
+                    <a16:creationId xmlns:a16="http://schemas.microsoft.com/office/drawing/2014/main" id="{DA29C9C6-63AD-C4DC-E629-575E7121F258}"/>
                   </a:ext>
                 </a:extLst>
               </p14:cNvPr>
@@ -10471,18 +12143,18 @@
               <p14:nvPr/>
             </p14:nvContentPartPr>
             <p14:xfrm>
-              <a:off x="4042699" y="1861533"/>
-              <a:ext cx="2716920" cy="395640"/>
+              <a:off x="3691699" y="1990773"/>
+              <a:ext cx="3008880" cy="720"/>
             </p14:xfrm>
           </p:contentPart>
         </mc:Choice>
-        <mc:Fallback xmlns="">
+        <mc:Fallback>
           <p:pic>
             <p:nvPicPr>
-              <p:cNvPr id="4" name="Ink 3">
+              <p:cNvPr id="12" name="Ink 11">
                 <a:extLst>
                   <a:ext uri="{FF2B5EF4-FFF2-40B4-BE49-F238E27FC236}">
-                    <a16:creationId xmlns:a16="http://schemas.microsoft.com/office/drawing/2014/main" id="{A3634201-1AD0-25CB-BD8E-019E4845CAA4}"/>
+                    <a16:creationId xmlns:a16="http://schemas.microsoft.com/office/drawing/2014/main" id="{DA29C9C6-63AD-C4DC-E629-575E7121F258}"/>
                   </a:ext>
                 </a:extLst>
               </p:cNvPr>
@@ -10497,8 +12169,8 @@
             </p:blipFill>
             <p:spPr>
               <a:xfrm>
-                <a:off x="3988699" y="1753533"/>
-                <a:ext cx="2824560" cy="611280"/>
+                <a:off x="3637699" y="1774773"/>
+                <a:ext cx="3116520" cy="432000"/>
               </a:xfrm>
               <a:prstGeom prst="rect">
                 <a:avLst/>
@@ -10507,14 +12179,14 @@
           </p:pic>
         </mc:Fallback>
       </mc:AlternateContent>
-      <mc:AlternateContent xmlns:mc="http://schemas.openxmlformats.org/markup-compatibility/2006" xmlns:p14="http://schemas.microsoft.com/office/powerpoint/2010/main">
-        <mc:Choice Requires="p14">
+      <mc:AlternateContent xmlns:mc="http://schemas.openxmlformats.org/markup-compatibility/2006">
+        <mc:Choice xmlns:p14="http://schemas.microsoft.com/office/powerpoint/2010/main" Requires="p14">
           <p:contentPart p14:bwMode="auto" r:id="rId5">
             <p14:nvContentPartPr>
-              <p14:cNvPr id="5" name="Ink 4">
+              <p14:cNvPr id="17" name="Ink 16">
                 <a:extLst>
                   <a:ext uri="{FF2B5EF4-FFF2-40B4-BE49-F238E27FC236}">
-                    <a16:creationId xmlns:a16="http://schemas.microsoft.com/office/drawing/2014/main" id="{B745893D-34BD-D158-1BF1-90DC3CD51230}"/>
+                    <a16:creationId xmlns:a16="http://schemas.microsoft.com/office/drawing/2014/main" id="{DE703996-726D-D47B-E960-5323E5F22238}"/>
                   </a:ext>
                 </a:extLst>
               </p14:cNvPr>
@@ -10522,18 +12194,18 @@
               <p14:nvPr/>
             </p14:nvContentPartPr>
             <p14:xfrm>
-              <a:off x="4638139" y="2405133"/>
-              <a:ext cx="985320" cy="364680"/>
+              <a:off x="3699979" y="2153133"/>
+              <a:ext cx="2966040" cy="720"/>
             </p14:xfrm>
           </p:contentPart>
         </mc:Choice>
-        <mc:Fallback xmlns="">
+        <mc:Fallback>
           <p:pic>
             <p:nvPicPr>
-              <p:cNvPr id="5" name="Ink 4">
+              <p:cNvPr id="17" name="Ink 16">
                 <a:extLst>
                   <a:ext uri="{FF2B5EF4-FFF2-40B4-BE49-F238E27FC236}">
-                    <a16:creationId xmlns:a16="http://schemas.microsoft.com/office/drawing/2014/main" id="{B745893D-34BD-D158-1BF1-90DC3CD51230}"/>
+                    <a16:creationId xmlns:a16="http://schemas.microsoft.com/office/drawing/2014/main" id="{DE703996-726D-D47B-E960-5323E5F22238}"/>
                   </a:ext>
                 </a:extLst>
               </p:cNvPr>
@@ -10548,8 +12220,8 @@
             </p:blipFill>
             <p:spPr>
               <a:xfrm>
-                <a:off x="4584139" y="2297493"/>
-                <a:ext cx="1092960" cy="580320"/>
+                <a:off x="3645979" y="1937133"/>
+                <a:ext cx="3073680" cy="432000"/>
               </a:xfrm>
               <a:prstGeom prst="rect">
                 <a:avLst/>
@@ -10558,14 +12230,14 @@
           </p:pic>
         </mc:Fallback>
       </mc:AlternateContent>
-      <mc:AlternateContent xmlns:mc="http://schemas.openxmlformats.org/markup-compatibility/2006" xmlns:p14="http://schemas.microsoft.com/office/powerpoint/2010/main">
-        <mc:Choice Requires="p14">
+      <mc:AlternateContent xmlns:mc="http://schemas.openxmlformats.org/markup-compatibility/2006">
+        <mc:Choice xmlns:p14="http://schemas.microsoft.com/office/powerpoint/2010/main" Requires="p14">
           <p:contentPart p14:bwMode="auto" r:id="rId7">
             <p14:nvContentPartPr>
-              <p14:cNvPr id="8" name="Ink 7">
+              <p14:cNvPr id="23" name="Ink 22">
                 <a:extLst>
                   <a:ext uri="{FF2B5EF4-FFF2-40B4-BE49-F238E27FC236}">
-                    <a16:creationId xmlns:a16="http://schemas.microsoft.com/office/drawing/2014/main" id="{A2E485F8-5B42-8273-BB94-E67CC8192485}"/>
+                    <a16:creationId xmlns:a16="http://schemas.microsoft.com/office/drawing/2014/main" id="{304EE2F6-0A23-A00D-97E3-77EB5E7C0BEF}"/>
                   </a:ext>
                 </a:extLst>
               </p14:cNvPr>
@@ -10573,18 +12245,18 @@
               <p14:nvPr/>
             </p14:nvContentPartPr>
             <p14:xfrm>
-              <a:off x="5733979" y="3751173"/>
-              <a:ext cx="2095920" cy="720"/>
+              <a:off x="3708259" y="2298573"/>
+              <a:ext cx="3000240" cy="360"/>
             </p14:xfrm>
           </p:contentPart>
         </mc:Choice>
-        <mc:Fallback xmlns="">
+        <mc:Fallback>
           <p:pic>
             <p:nvPicPr>
-              <p:cNvPr id="8" name="Ink 7">
+              <p:cNvPr id="23" name="Ink 22">
                 <a:extLst>
                   <a:ext uri="{FF2B5EF4-FFF2-40B4-BE49-F238E27FC236}">
-                    <a16:creationId xmlns:a16="http://schemas.microsoft.com/office/drawing/2014/main" id="{A2E485F8-5B42-8273-BB94-E67CC8192485}"/>
+                    <a16:creationId xmlns:a16="http://schemas.microsoft.com/office/drawing/2014/main" id="{304EE2F6-0A23-A00D-97E3-77EB5E7C0BEF}"/>
                   </a:ext>
                 </a:extLst>
               </p:cNvPr>
@@ -10599,8 +12271,8 @@
             </p:blipFill>
             <p:spPr>
               <a:xfrm>
-                <a:off x="5679979" y="3535173"/>
-                <a:ext cx="2203560" cy="432000"/>
+                <a:off x="3654259" y="2190573"/>
+                <a:ext cx="3107880" cy="216000"/>
               </a:xfrm>
               <a:prstGeom prst="rect">
                 <a:avLst/>
@@ -10609,14 +12281,14 @@
           </p:pic>
         </mc:Fallback>
       </mc:AlternateContent>
-      <mc:AlternateContent xmlns:mc="http://schemas.openxmlformats.org/markup-compatibility/2006" xmlns:p14="http://schemas.microsoft.com/office/powerpoint/2010/main">
-        <mc:Choice Requires="p14">
+      <mc:AlternateContent xmlns:mc="http://schemas.openxmlformats.org/markup-compatibility/2006">
+        <mc:Choice xmlns:p14="http://schemas.microsoft.com/office/powerpoint/2010/main" Requires="p14">
           <p:contentPart p14:bwMode="auto" r:id="rId9">
             <p14:nvContentPartPr>
-              <p14:cNvPr id="11" name="Ink 10">
+              <p14:cNvPr id="24" name="Ink 23">
                 <a:extLst>
                   <a:ext uri="{FF2B5EF4-FFF2-40B4-BE49-F238E27FC236}">
-                    <a16:creationId xmlns:a16="http://schemas.microsoft.com/office/drawing/2014/main" id="{F915FD53-345C-4F20-6088-CF80F4635C0B}"/>
+                    <a16:creationId xmlns:a16="http://schemas.microsoft.com/office/drawing/2014/main" id="{B1AB0825-1DC6-AF85-64A2-D23BBA835290}"/>
                   </a:ext>
                 </a:extLst>
               </p14:cNvPr>
@@ -10624,18 +12296,18 @@
               <p14:nvPr/>
             </p14:nvContentPartPr>
             <p14:xfrm>
-              <a:off x="5750899" y="4229973"/>
-              <a:ext cx="2120040" cy="720"/>
+              <a:off x="6673939" y="2118933"/>
+              <a:ext cx="360" cy="360"/>
             </p14:xfrm>
           </p:contentPart>
         </mc:Choice>
-        <mc:Fallback xmlns="">
+        <mc:Fallback>
           <p:pic>
             <p:nvPicPr>
-              <p:cNvPr id="11" name="Ink 10">
+              <p:cNvPr id="24" name="Ink 23">
                 <a:extLst>
                   <a:ext uri="{FF2B5EF4-FFF2-40B4-BE49-F238E27FC236}">
-                    <a16:creationId xmlns:a16="http://schemas.microsoft.com/office/drawing/2014/main" id="{F915FD53-345C-4F20-6088-CF80F4635C0B}"/>
+                    <a16:creationId xmlns:a16="http://schemas.microsoft.com/office/drawing/2014/main" id="{B1AB0825-1DC6-AF85-64A2-D23BBA835290}"/>
                   </a:ext>
                 </a:extLst>
               </p:cNvPr>
@@ -10650,8 +12322,8 @@
             </p:blipFill>
             <p:spPr>
               <a:xfrm>
-                <a:off x="5696899" y="4013973"/>
-                <a:ext cx="2227680" cy="432000"/>
+                <a:off x="6620299" y="2010933"/>
+                <a:ext cx="108000" cy="216000"/>
               </a:xfrm>
               <a:prstGeom prst="rect">
                 <a:avLst/>
@@ -10660,33 +12332,33 @@
           </p:pic>
         </mc:Fallback>
       </mc:AlternateContent>
-      <mc:AlternateContent xmlns:mc="http://schemas.openxmlformats.org/markup-compatibility/2006" xmlns:p14="http://schemas.microsoft.com/office/powerpoint/2010/main">
-        <mc:Choice Requires="p14">
+      <mc:AlternateContent xmlns:mc="http://schemas.openxmlformats.org/markup-compatibility/2006">
+        <mc:Choice xmlns:p14="http://schemas.microsoft.com/office/powerpoint/2010/main" Requires="p14">
           <p:contentPart p14:bwMode="auto" r:id="rId11">
             <p14:nvContentPartPr>
-              <p14:cNvPr id="14" name="Ink 13">
+              <p14:cNvPr id="25" name="Ink 24">
                 <a:extLst>
                   <a:ext uri="{FF2B5EF4-FFF2-40B4-BE49-F238E27FC236}">
-                    <a16:creationId xmlns:a16="http://schemas.microsoft.com/office/drawing/2014/main" id="{EB3B68DB-D7A8-F75C-F08D-797CAC579877}"/>
+                    <a16:creationId xmlns:a16="http://schemas.microsoft.com/office/drawing/2014/main" id="{D50D7CF0-5819-7B97-7991-301A909C4131}"/>
                   </a:ext>
                 </a:extLst>
               </p14:cNvPr>
               <p14:cNvContentPartPr/>
               <p14:nvPr/>
             </p14:nvContentPartPr>
-            <p14:xfrm rot="84896">
-              <a:off x="5759676" y="3879878"/>
-              <a:ext cx="2052086" cy="263150"/>
+            <p14:xfrm>
+              <a:off x="4139899" y="2467053"/>
+              <a:ext cx="1511280" cy="397800"/>
             </p14:xfrm>
           </p:contentPart>
         </mc:Choice>
-        <mc:Fallback xmlns="">
+        <mc:Fallback>
           <p:pic>
             <p:nvPicPr>
-              <p:cNvPr id="14" name="Ink 13">
+              <p:cNvPr id="25" name="Ink 24">
                 <a:extLst>
                   <a:ext uri="{FF2B5EF4-FFF2-40B4-BE49-F238E27FC236}">
-                    <a16:creationId xmlns:a16="http://schemas.microsoft.com/office/drawing/2014/main" id="{EB3B68DB-D7A8-F75C-F08D-797CAC579877}"/>
+                    <a16:creationId xmlns:a16="http://schemas.microsoft.com/office/drawing/2014/main" id="{D50D7CF0-5819-7B97-7991-301A909C4131}"/>
                   </a:ext>
                 </a:extLst>
               </p:cNvPr>
@@ -10700,9 +12372,9 @@
               </a:stretch>
             </p:blipFill>
             <p:spPr>
-              <a:xfrm rot="84896">
-                <a:off x="5705674" y="3771882"/>
-                <a:ext cx="2159731" cy="478782"/>
+              <a:xfrm>
+                <a:off x="4086259" y="2359413"/>
+                <a:ext cx="1618920" cy="613440"/>
               </a:xfrm>
               <a:prstGeom prst="rect">
                 <a:avLst/>
@@ -10711,14 +12383,14 @@
           </p:pic>
         </mc:Fallback>
       </mc:AlternateContent>
-      <mc:AlternateContent xmlns:mc="http://schemas.openxmlformats.org/markup-compatibility/2006" xmlns:p14="http://schemas.microsoft.com/office/powerpoint/2010/main">
-        <mc:Choice Requires="p14">
+      <mc:AlternateContent xmlns:mc="http://schemas.openxmlformats.org/markup-compatibility/2006">
+        <mc:Choice xmlns:p14="http://schemas.microsoft.com/office/powerpoint/2010/main" Requires="p14">
           <p:contentPart p14:bwMode="auto" r:id="rId13">
             <p14:nvContentPartPr>
-              <p14:cNvPr id="15" name="Ink 14">
+              <p14:cNvPr id="27" name="Ink 26">
                 <a:extLst>
                   <a:ext uri="{FF2B5EF4-FFF2-40B4-BE49-F238E27FC236}">
-                    <a16:creationId xmlns:a16="http://schemas.microsoft.com/office/drawing/2014/main" id="{80C708FA-DF9F-D003-8BBE-CB71775FAA4A}"/>
+                    <a16:creationId xmlns:a16="http://schemas.microsoft.com/office/drawing/2014/main" id="{E5420B18-6C47-BC23-85E8-B38DC3FC2020}"/>
                   </a:ext>
                 </a:extLst>
               </p14:cNvPr>
@@ -10726,18 +12398,18 @@
               <p14:nvPr/>
             </p14:nvContentPartPr>
             <p14:xfrm>
-              <a:off x="5741179" y="3983013"/>
-              <a:ext cx="933480" cy="172800"/>
+              <a:off x="5229619" y="3050253"/>
+              <a:ext cx="1462320" cy="720"/>
             </p14:xfrm>
           </p:contentPart>
         </mc:Choice>
-        <mc:Fallback xmlns="">
+        <mc:Fallback>
           <p:pic>
             <p:nvPicPr>
-              <p:cNvPr id="15" name="Ink 14">
+              <p:cNvPr id="27" name="Ink 26">
                 <a:extLst>
                   <a:ext uri="{FF2B5EF4-FFF2-40B4-BE49-F238E27FC236}">
-                    <a16:creationId xmlns:a16="http://schemas.microsoft.com/office/drawing/2014/main" id="{80C708FA-DF9F-D003-8BBE-CB71775FAA4A}"/>
+                    <a16:creationId xmlns:a16="http://schemas.microsoft.com/office/drawing/2014/main" id="{E5420B18-6C47-BC23-85E8-B38DC3FC2020}"/>
                   </a:ext>
                 </a:extLst>
               </p:cNvPr>
@@ -10752,8 +12424,8 @@
             </p:blipFill>
             <p:spPr>
               <a:xfrm>
-                <a:off x="5687179" y="3875013"/>
-                <a:ext cx="1041120" cy="388440"/>
+                <a:off x="5175619" y="2834253"/>
+                <a:ext cx="1569960" cy="432000"/>
               </a:xfrm>
               <a:prstGeom prst="rect">
                 <a:avLst/>
@@ -10762,14 +12434,14 @@
           </p:pic>
         </mc:Fallback>
       </mc:AlternateContent>
-      <mc:AlternateContent xmlns:mc="http://schemas.openxmlformats.org/markup-compatibility/2006" xmlns:p14="http://schemas.microsoft.com/office/powerpoint/2010/main">
-        <mc:Choice Requires="p14">
+      <mc:AlternateContent xmlns:mc="http://schemas.openxmlformats.org/markup-compatibility/2006">
+        <mc:Choice xmlns:p14="http://schemas.microsoft.com/office/powerpoint/2010/main" Requires="p14">
           <p:contentPart p14:bwMode="auto" r:id="rId15">
             <p14:nvContentPartPr>
-              <p14:cNvPr id="16" name="Ink 15">
+              <p14:cNvPr id="29" name="Ink 28">
                 <a:extLst>
                   <a:ext uri="{FF2B5EF4-FFF2-40B4-BE49-F238E27FC236}">
-                    <a16:creationId xmlns:a16="http://schemas.microsoft.com/office/drawing/2014/main" id="{8A91D55A-E0B7-EF5F-C2B1-CCE11DB489B2}"/>
+                    <a16:creationId xmlns:a16="http://schemas.microsoft.com/office/drawing/2014/main" id="{C9BF34C7-5F17-80C6-ECF9-CBFB9614D46D}"/>
                   </a:ext>
                 </a:extLst>
               </p14:cNvPr>
@@ -10777,18 +12449,18 @@
               <p14:nvPr/>
             </p14:nvContentPartPr>
             <p14:xfrm>
-              <a:off x="7425979" y="3945933"/>
-              <a:ext cx="414360" cy="117000"/>
+              <a:off x="5212699" y="3221253"/>
+              <a:ext cx="1478520" cy="9000"/>
             </p14:xfrm>
           </p:contentPart>
         </mc:Choice>
-        <mc:Fallback xmlns="">
+        <mc:Fallback>
           <p:pic>
             <p:nvPicPr>
-              <p:cNvPr id="16" name="Ink 15">
+              <p:cNvPr id="29" name="Ink 28">
                 <a:extLst>
                   <a:ext uri="{FF2B5EF4-FFF2-40B4-BE49-F238E27FC236}">
-                    <a16:creationId xmlns:a16="http://schemas.microsoft.com/office/drawing/2014/main" id="{8A91D55A-E0B7-EF5F-C2B1-CCE11DB489B2}"/>
+                    <a16:creationId xmlns:a16="http://schemas.microsoft.com/office/drawing/2014/main" id="{C9BF34C7-5F17-80C6-ECF9-CBFB9614D46D}"/>
                   </a:ext>
                 </a:extLst>
               </p:cNvPr>
@@ -10803,8 +12475,8 @@
             </p:blipFill>
             <p:spPr>
               <a:xfrm>
-                <a:off x="7372339" y="3837933"/>
-                <a:ext cx="522000" cy="332640"/>
+                <a:off x="5158699" y="3113253"/>
+                <a:ext cx="1586160" cy="224640"/>
               </a:xfrm>
               <a:prstGeom prst="rect">
                 <a:avLst/>
@@ -10813,14 +12485,14 @@
           </p:pic>
         </mc:Fallback>
       </mc:AlternateContent>
-      <mc:AlternateContent xmlns:mc="http://schemas.openxmlformats.org/markup-compatibility/2006" xmlns:p14="http://schemas.microsoft.com/office/powerpoint/2010/main">
-        <mc:Choice Requires="p14">
+      <mc:AlternateContent xmlns:mc="http://schemas.openxmlformats.org/markup-compatibility/2006">
+        <mc:Choice xmlns:p14="http://schemas.microsoft.com/office/powerpoint/2010/main" Requires="p14">
           <p:contentPart p14:bwMode="auto" r:id="rId17">
             <p14:nvContentPartPr>
-              <p14:cNvPr id="18" name="Ink 17">
+              <p14:cNvPr id="31" name="Ink 30">
                 <a:extLst>
                   <a:ext uri="{FF2B5EF4-FFF2-40B4-BE49-F238E27FC236}">
-                    <a16:creationId xmlns:a16="http://schemas.microsoft.com/office/drawing/2014/main" id="{7DCC93EF-D0AC-98F3-8F5A-012E3FC5A24C}"/>
+                    <a16:creationId xmlns:a16="http://schemas.microsoft.com/office/drawing/2014/main" id="{1CDD7DE4-BA50-2B83-A2EE-23C9366C7BE8}"/>
                   </a:ext>
                 </a:extLst>
               </p14:cNvPr>
@@ -10828,18 +12500,18 @@
               <p14:nvPr/>
             </p14:nvContentPartPr>
             <p14:xfrm>
-              <a:off x="5195419" y="6015933"/>
-              <a:ext cx="1582200" cy="720"/>
+              <a:off x="5221339" y="3417813"/>
+              <a:ext cx="1461600" cy="360"/>
             </p14:xfrm>
           </p:contentPart>
         </mc:Choice>
-        <mc:Fallback xmlns="">
+        <mc:Fallback>
           <p:pic>
             <p:nvPicPr>
-              <p:cNvPr id="18" name="Ink 17">
+              <p:cNvPr id="31" name="Ink 30">
                 <a:extLst>
                   <a:ext uri="{FF2B5EF4-FFF2-40B4-BE49-F238E27FC236}">
-                    <a16:creationId xmlns:a16="http://schemas.microsoft.com/office/drawing/2014/main" id="{7DCC93EF-D0AC-98F3-8F5A-012E3FC5A24C}"/>
+                    <a16:creationId xmlns:a16="http://schemas.microsoft.com/office/drawing/2014/main" id="{1CDD7DE4-BA50-2B83-A2EE-23C9366C7BE8}"/>
                   </a:ext>
                 </a:extLst>
               </p:cNvPr>
@@ -10854,8 +12526,8 @@
             </p:blipFill>
             <p:spPr>
               <a:xfrm>
-                <a:off x="5141419" y="5799933"/>
-                <a:ext cx="1689840" cy="432000"/>
+                <a:off x="5167339" y="3309813"/>
+                <a:ext cx="1569240" cy="216000"/>
               </a:xfrm>
               <a:prstGeom prst="rect">
                 <a:avLst/>
@@ -10864,14 +12536,14 @@
           </p:pic>
         </mc:Fallback>
       </mc:AlternateContent>
-      <mc:AlternateContent xmlns:mc="http://schemas.openxmlformats.org/markup-compatibility/2006" xmlns:p14="http://schemas.microsoft.com/office/powerpoint/2010/main">
-        <mc:Choice Requires="p14">
+      <mc:AlternateContent xmlns:mc="http://schemas.openxmlformats.org/markup-compatibility/2006">
+        <mc:Choice xmlns:p14="http://schemas.microsoft.com/office/powerpoint/2010/main" Requires="p14">
           <p:contentPart p14:bwMode="auto" r:id="rId19">
             <p14:nvContentPartPr>
-              <p14:cNvPr id="19" name="Ink 18">
+              <p14:cNvPr id="33" name="Ink 32">
                 <a:extLst>
                   <a:ext uri="{FF2B5EF4-FFF2-40B4-BE49-F238E27FC236}">
-                    <a16:creationId xmlns:a16="http://schemas.microsoft.com/office/drawing/2014/main" id="{1CC2BE53-F65B-175D-CA76-17CDB34C8624}"/>
+                    <a16:creationId xmlns:a16="http://schemas.microsoft.com/office/drawing/2014/main" id="{03A8E577-73BB-1618-71E4-F0B1F8F98E2C}"/>
                   </a:ext>
                 </a:extLst>
               </p14:cNvPr>
@@ -10879,18 +12551,18 @@
               <p14:nvPr/>
             </p14:nvContentPartPr>
             <p14:xfrm>
-              <a:off x="5185699" y="6122133"/>
-              <a:ext cx="1583640" cy="289800"/>
+              <a:off x="5212699" y="3443373"/>
+              <a:ext cx="1461600" cy="9360"/>
             </p14:xfrm>
           </p:contentPart>
         </mc:Choice>
-        <mc:Fallback xmlns="">
+        <mc:Fallback>
           <p:pic>
             <p:nvPicPr>
-              <p:cNvPr id="19" name="Ink 18">
+              <p:cNvPr id="33" name="Ink 32">
                 <a:extLst>
                   <a:ext uri="{FF2B5EF4-FFF2-40B4-BE49-F238E27FC236}">
-                    <a16:creationId xmlns:a16="http://schemas.microsoft.com/office/drawing/2014/main" id="{1CC2BE53-F65B-175D-CA76-17CDB34C8624}"/>
+                    <a16:creationId xmlns:a16="http://schemas.microsoft.com/office/drawing/2014/main" id="{03A8E577-73BB-1618-71E4-F0B1F8F98E2C}"/>
                   </a:ext>
                 </a:extLst>
               </p:cNvPr>
@@ -10905,8 +12577,8 @@
             </p:blipFill>
             <p:spPr>
               <a:xfrm>
-                <a:off x="5131699" y="6014133"/>
-                <a:ext cx="1691280" cy="505440"/>
+                <a:off x="5158699" y="3335373"/>
+                <a:ext cx="1569240" cy="225000"/>
               </a:xfrm>
               <a:prstGeom prst="rect">
                 <a:avLst/>
@@ -10915,14 +12587,14 @@
           </p:pic>
         </mc:Fallback>
       </mc:AlternateContent>
-      <mc:AlternateContent xmlns:mc="http://schemas.openxmlformats.org/markup-compatibility/2006" xmlns:p14="http://schemas.microsoft.com/office/powerpoint/2010/main">
-        <mc:Choice Requires="p14">
+      <mc:AlternateContent xmlns:mc="http://schemas.openxmlformats.org/markup-compatibility/2006">
+        <mc:Choice xmlns:p14="http://schemas.microsoft.com/office/powerpoint/2010/main" Requires="p14">
           <p:contentPart p14:bwMode="auto" r:id="rId21">
             <p14:nvContentPartPr>
-              <p14:cNvPr id="21" name="Ink 20">
+              <p14:cNvPr id="35" name="Ink 34">
                 <a:extLst>
                   <a:ext uri="{FF2B5EF4-FFF2-40B4-BE49-F238E27FC236}">
-                    <a16:creationId xmlns:a16="http://schemas.microsoft.com/office/drawing/2014/main" id="{35AB9355-D7DB-DE8D-CDD7-CFF98683EE4C}"/>
+                    <a16:creationId xmlns:a16="http://schemas.microsoft.com/office/drawing/2014/main" id="{73D48F13-FCCE-D942-3A37-5729CBF67B4D}"/>
                   </a:ext>
                 </a:extLst>
               </p14:cNvPr>
@@ -10930,18 +12602,18 @@
               <p14:nvPr/>
             </p14:nvContentPartPr>
             <p14:xfrm>
-              <a:off x="5187139" y="2982213"/>
-              <a:ext cx="1001160" cy="720"/>
+              <a:off x="5759539" y="3657213"/>
+              <a:ext cx="957960" cy="720"/>
             </p14:xfrm>
           </p:contentPart>
         </mc:Choice>
-        <mc:Fallback xmlns="">
+        <mc:Fallback>
           <p:pic>
             <p:nvPicPr>
-              <p:cNvPr id="21" name="Ink 20">
+              <p:cNvPr id="35" name="Ink 34">
                 <a:extLst>
                   <a:ext uri="{FF2B5EF4-FFF2-40B4-BE49-F238E27FC236}">
-                    <a16:creationId xmlns:a16="http://schemas.microsoft.com/office/drawing/2014/main" id="{35AB9355-D7DB-DE8D-CDD7-CFF98683EE4C}"/>
+                    <a16:creationId xmlns:a16="http://schemas.microsoft.com/office/drawing/2014/main" id="{73D48F13-FCCE-D942-3A37-5729CBF67B4D}"/>
                   </a:ext>
                 </a:extLst>
               </p:cNvPr>
@@ -10956,8 +12628,8 @@
             </p:blipFill>
             <p:spPr>
               <a:xfrm>
-                <a:off x="5133139" y="2766213"/>
-                <a:ext cx="1108800" cy="432000"/>
+                <a:off x="5705539" y="3441213"/>
+                <a:ext cx="1065600" cy="432000"/>
               </a:xfrm>
               <a:prstGeom prst="rect">
                 <a:avLst/>
@@ -10966,14 +12638,14 @@
           </p:pic>
         </mc:Fallback>
       </mc:AlternateContent>
-      <mc:AlternateContent xmlns:mc="http://schemas.openxmlformats.org/markup-compatibility/2006" xmlns:p14="http://schemas.microsoft.com/office/powerpoint/2010/main">
-        <mc:Choice Requires="p14">
+      <mc:AlternateContent xmlns:mc="http://schemas.openxmlformats.org/markup-compatibility/2006">
+        <mc:Choice xmlns:p14="http://schemas.microsoft.com/office/powerpoint/2010/main" Requires="p14">
           <p:contentPart p14:bwMode="auto" r:id="rId23">
             <p14:nvContentPartPr>
-              <p14:cNvPr id="22" name="Ink 21">
+              <p14:cNvPr id="37" name="Ink 36">
                 <a:extLst>
                   <a:ext uri="{FF2B5EF4-FFF2-40B4-BE49-F238E27FC236}">
-                    <a16:creationId xmlns:a16="http://schemas.microsoft.com/office/drawing/2014/main" id="{9CB9EA70-6E33-FF84-984D-23508652228A}"/>
+                    <a16:creationId xmlns:a16="http://schemas.microsoft.com/office/drawing/2014/main" id="{2AABC79A-4191-68AA-816C-6E72AAF28618}"/>
                   </a:ext>
                 </a:extLst>
               </p14:cNvPr>
@@ -10981,18 +12653,18 @@
               <p14:nvPr/>
             </p14:nvContentPartPr>
             <p14:xfrm>
-              <a:off x="5150779" y="3083013"/>
-              <a:ext cx="1028160" cy="490680"/>
+              <a:off x="5759539" y="3802653"/>
+              <a:ext cx="923400" cy="360"/>
             </p14:xfrm>
           </p:contentPart>
         </mc:Choice>
-        <mc:Fallback xmlns="">
+        <mc:Fallback>
           <p:pic>
             <p:nvPicPr>
-              <p:cNvPr id="22" name="Ink 21">
+              <p:cNvPr id="37" name="Ink 36">
                 <a:extLst>
                   <a:ext uri="{FF2B5EF4-FFF2-40B4-BE49-F238E27FC236}">
-                    <a16:creationId xmlns:a16="http://schemas.microsoft.com/office/drawing/2014/main" id="{9CB9EA70-6E33-FF84-984D-23508652228A}"/>
+                    <a16:creationId xmlns:a16="http://schemas.microsoft.com/office/drawing/2014/main" id="{2AABC79A-4191-68AA-816C-6E72AAF28618}"/>
                   </a:ext>
                 </a:extLst>
               </p:cNvPr>
@@ -11007,8 +12679,314 @@
             </p:blipFill>
             <p:spPr>
               <a:xfrm>
-                <a:off x="5097139" y="2975373"/>
-                <a:ext cx="1135800" cy="706320"/>
+                <a:off x="5705539" y="3694653"/>
+                <a:ext cx="1031040" cy="216000"/>
+              </a:xfrm>
+              <a:prstGeom prst="rect">
+                <a:avLst/>
+              </a:prstGeom>
+            </p:spPr>
+          </p:pic>
+        </mc:Fallback>
+      </mc:AlternateContent>
+      <mc:AlternateContent xmlns:mc="http://schemas.openxmlformats.org/markup-compatibility/2006">
+        <mc:Choice xmlns:p14="http://schemas.microsoft.com/office/powerpoint/2010/main" Requires="p14">
+          <p:contentPart p14:bwMode="auto" r:id="rId25">
+            <p14:nvContentPartPr>
+              <p14:cNvPr id="39" name="Ink 38">
+                <a:extLst>
+                  <a:ext uri="{FF2B5EF4-FFF2-40B4-BE49-F238E27FC236}">
+                    <a16:creationId xmlns:a16="http://schemas.microsoft.com/office/drawing/2014/main" id="{0356C459-CEC9-93CB-E9D1-93733E3320C7}"/>
+                  </a:ext>
+                </a:extLst>
+              </p14:cNvPr>
+              <p14:cNvContentPartPr/>
+              <p14:nvPr/>
+            </p14:nvContentPartPr>
+            <p14:xfrm>
+              <a:off x="5776099" y="3909573"/>
+              <a:ext cx="911880" cy="123840"/>
+            </p14:xfrm>
+          </p:contentPart>
+        </mc:Choice>
+        <mc:Fallback>
+          <p:pic>
+            <p:nvPicPr>
+              <p:cNvPr id="39" name="Ink 38">
+                <a:extLst>
+                  <a:ext uri="{FF2B5EF4-FFF2-40B4-BE49-F238E27FC236}">
+                    <a16:creationId xmlns:a16="http://schemas.microsoft.com/office/drawing/2014/main" id="{0356C459-CEC9-93CB-E9D1-93733E3320C7}"/>
+                  </a:ext>
+                </a:extLst>
+              </p:cNvPr>
+              <p:cNvPicPr/>
+              <p:nvPr/>
+            </p:nvPicPr>
+            <p:blipFill>
+              <a:blip r:embed="rId26"/>
+              <a:stretch>
+                <a:fillRect/>
+              </a:stretch>
+            </p:blipFill>
+            <p:spPr>
+              <a:xfrm>
+                <a:off x="5722099" y="3801573"/>
+                <a:ext cx="1019520" cy="339480"/>
+              </a:xfrm>
+              <a:prstGeom prst="rect">
+                <a:avLst/>
+              </a:prstGeom>
+            </p:spPr>
+          </p:pic>
+        </mc:Fallback>
+      </mc:AlternateContent>
+      <mc:AlternateContent xmlns:mc="http://schemas.openxmlformats.org/markup-compatibility/2006">
+        <mc:Choice xmlns:p14="http://schemas.microsoft.com/office/powerpoint/2010/main" Requires="p14">
+          <p:contentPart p14:bwMode="auto" r:id="rId27">
+            <p14:nvContentPartPr>
+              <p14:cNvPr id="40" name="Ink 39">
+                <a:extLst>
+                  <a:ext uri="{FF2B5EF4-FFF2-40B4-BE49-F238E27FC236}">
+                    <a16:creationId xmlns:a16="http://schemas.microsoft.com/office/drawing/2014/main" id="{FE9AEA50-0DBB-439F-3A5D-921EDF155DA5}"/>
+                  </a:ext>
+                </a:extLst>
+              </p14:cNvPr>
+              <p14:cNvContentPartPr/>
+              <p14:nvPr/>
+            </p14:nvContentPartPr>
+            <p14:xfrm>
+              <a:off x="6725059" y="3973653"/>
+              <a:ext cx="3960" cy="20160"/>
+            </p14:xfrm>
+          </p:contentPart>
+        </mc:Choice>
+        <mc:Fallback>
+          <p:pic>
+            <p:nvPicPr>
+              <p:cNvPr id="40" name="Ink 39">
+                <a:extLst>
+                  <a:ext uri="{FF2B5EF4-FFF2-40B4-BE49-F238E27FC236}">
+                    <a16:creationId xmlns:a16="http://schemas.microsoft.com/office/drawing/2014/main" id="{FE9AEA50-0DBB-439F-3A5D-921EDF155DA5}"/>
+                  </a:ext>
+                </a:extLst>
+              </p:cNvPr>
+              <p:cNvPicPr/>
+              <p:nvPr/>
+            </p:nvPicPr>
+            <p:blipFill>
+              <a:blip r:embed="rId28"/>
+              <a:stretch>
+                <a:fillRect/>
+              </a:stretch>
+            </p:blipFill>
+            <p:spPr>
+              <a:xfrm>
+                <a:off x="6671419" y="3865653"/>
+                <a:ext cx="111600" cy="235800"/>
+              </a:xfrm>
+              <a:prstGeom prst="rect">
+                <a:avLst/>
+              </a:prstGeom>
+            </p:spPr>
+          </p:pic>
+        </mc:Fallback>
+      </mc:AlternateContent>
+      <mc:AlternateContent xmlns:mc="http://schemas.openxmlformats.org/markup-compatibility/2006">
+        <mc:Choice xmlns:p14="http://schemas.microsoft.com/office/powerpoint/2010/main" Requires="p14">
+          <p:contentPart p14:bwMode="auto" r:id="rId29">
+            <p14:nvContentPartPr>
+              <p14:cNvPr id="41" name="Ink 40">
+                <a:extLst>
+                  <a:ext uri="{FF2B5EF4-FFF2-40B4-BE49-F238E27FC236}">
+                    <a16:creationId xmlns:a16="http://schemas.microsoft.com/office/drawing/2014/main" id="{253F1B7A-CB42-310E-6CA5-BF217292E81F}"/>
+                  </a:ext>
+                </a:extLst>
+              </p14:cNvPr>
+              <p14:cNvContentPartPr/>
+              <p14:nvPr/>
+            </p14:nvContentPartPr>
+            <p14:xfrm>
+              <a:off x="6774739" y="4237893"/>
+              <a:ext cx="1522080" cy="436680"/>
+            </p14:xfrm>
+          </p:contentPart>
+        </mc:Choice>
+        <mc:Fallback>
+          <p:pic>
+            <p:nvPicPr>
+              <p:cNvPr id="41" name="Ink 40">
+                <a:extLst>
+                  <a:ext uri="{FF2B5EF4-FFF2-40B4-BE49-F238E27FC236}">
+                    <a16:creationId xmlns:a16="http://schemas.microsoft.com/office/drawing/2014/main" id="{253F1B7A-CB42-310E-6CA5-BF217292E81F}"/>
+                  </a:ext>
+                </a:extLst>
+              </p:cNvPr>
+              <p:cNvPicPr/>
+              <p:nvPr/>
+            </p:nvPicPr>
+            <p:blipFill>
+              <a:blip r:embed="rId30"/>
+              <a:stretch>
+                <a:fillRect/>
+              </a:stretch>
+            </p:blipFill>
+            <p:spPr>
+              <a:xfrm>
+                <a:off x="6720739" y="4130253"/>
+                <a:ext cx="1629720" cy="652320"/>
+              </a:xfrm>
+              <a:prstGeom prst="rect">
+                <a:avLst/>
+              </a:prstGeom>
+            </p:spPr>
+          </p:pic>
+        </mc:Fallback>
+      </mc:AlternateContent>
+      <mc:AlternateContent xmlns:mc="http://schemas.openxmlformats.org/markup-compatibility/2006">
+        <mc:Choice xmlns:p14="http://schemas.microsoft.com/office/powerpoint/2010/main" Requires="p14">
+          <p:contentPart p14:bwMode="auto" r:id="rId31">
+            <p14:nvContentPartPr>
+              <p14:cNvPr id="43" name="Ink 42">
+                <a:extLst>
+                  <a:ext uri="{FF2B5EF4-FFF2-40B4-BE49-F238E27FC236}">
+                    <a16:creationId xmlns:a16="http://schemas.microsoft.com/office/drawing/2014/main" id="{12CAF1A4-240E-AD14-6B0F-6A3C4F71C94E}"/>
+                  </a:ext>
+                </a:extLst>
+              </p14:cNvPr>
+              <p14:cNvContentPartPr/>
+              <p14:nvPr/>
+            </p14:nvContentPartPr>
+            <p14:xfrm>
+              <a:off x="4694989" y="5953123"/>
+              <a:ext cx="1990860" cy="369700"/>
+            </p14:xfrm>
+          </p:contentPart>
+        </mc:Choice>
+        <mc:Fallback>
+          <p:pic>
+            <p:nvPicPr>
+              <p:cNvPr id="43" name="Ink 42">
+                <a:extLst>
+                  <a:ext uri="{FF2B5EF4-FFF2-40B4-BE49-F238E27FC236}">
+                    <a16:creationId xmlns:a16="http://schemas.microsoft.com/office/drawing/2014/main" id="{12CAF1A4-240E-AD14-6B0F-6A3C4F71C94E}"/>
+                  </a:ext>
+                </a:extLst>
+              </p:cNvPr>
+              <p:cNvPicPr/>
+              <p:nvPr/>
+            </p:nvPicPr>
+            <p:blipFill>
+              <a:blip r:embed="rId32"/>
+              <a:stretch>
+                <a:fillRect/>
+              </a:stretch>
+            </p:blipFill>
+            <p:spPr>
+              <a:xfrm>
+                <a:off x="4640987" y="5845129"/>
+                <a:ext cx="2098503" cy="585328"/>
+              </a:xfrm>
+              <a:prstGeom prst="rect">
+                <a:avLst/>
+              </a:prstGeom>
+            </p:spPr>
+          </p:pic>
+        </mc:Fallback>
+      </mc:AlternateContent>
+      <mc:AlternateContent xmlns:mc="http://schemas.openxmlformats.org/markup-compatibility/2006">
+        <mc:Choice xmlns:p14="http://schemas.microsoft.com/office/powerpoint/2010/main" Requires="p14">
+          <p:contentPart p14:bwMode="auto" r:id="rId33">
+            <p14:nvContentPartPr>
+              <p14:cNvPr id="44" name="Ink 43">
+                <a:extLst>
+                  <a:ext uri="{FF2B5EF4-FFF2-40B4-BE49-F238E27FC236}">
+                    <a16:creationId xmlns:a16="http://schemas.microsoft.com/office/drawing/2014/main" id="{F4A40C4C-6BE2-57FD-B143-E65825ACAE33}"/>
+                  </a:ext>
+                </a:extLst>
+              </p14:cNvPr>
+              <p14:cNvContentPartPr/>
+              <p14:nvPr/>
+            </p14:nvContentPartPr>
+            <p14:xfrm>
+              <a:off x="4738219" y="6100893"/>
+              <a:ext cx="1885320" cy="71280"/>
+            </p14:xfrm>
+          </p:contentPart>
+        </mc:Choice>
+        <mc:Fallback>
+          <p:pic>
+            <p:nvPicPr>
+              <p:cNvPr id="44" name="Ink 43">
+                <a:extLst>
+                  <a:ext uri="{FF2B5EF4-FFF2-40B4-BE49-F238E27FC236}">
+                    <a16:creationId xmlns:a16="http://schemas.microsoft.com/office/drawing/2014/main" id="{F4A40C4C-6BE2-57FD-B143-E65825ACAE33}"/>
+                  </a:ext>
+                </a:extLst>
+              </p:cNvPr>
+              <p:cNvPicPr/>
+              <p:nvPr/>
+            </p:nvPicPr>
+            <p:blipFill>
+              <a:blip r:embed="rId34"/>
+              <a:stretch>
+                <a:fillRect/>
+              </a:stretch>
+            </p:blipFill>
+            <p:spPr>
+              <a:xfrm>
+                <a:off x="4684579" y="5993253"/>
+                <a:ext cx="1992960" cy="286920"/>
+              </a:xfrm>
+              <a:prstGeom prst="rect">
+                <a:avLst/>
+              </a:prstGeom>
+            </p:spPr>
+          </p:pic>
+        </mc:Fallback>
+      </mc:AlternateContent>
+      <mc:AlternateContent xmlns:mc="http://schemas.openxmlformats.org/markup-compatibility/2006">
+        <mc:Choice xmlns:p14="http://schemas.microsoft.com/office/powerpoint/2010/main" Requires="p14">
+          <p:contentPart p14:bwMode="auto" r:id="rId35">
+            <p14:nvContentPartPr>
+              <p14:cNvPr id="45" name="Ink 44">
+                <a:extLst>
+                  <a:ext uri="{FF2B5EF4-FFF2-40B4-BE49-F238E27FC236}">
+                    <a16:creationId xmlns:a16="http://schemas.microsoft.com/office/drawing/2014/main" id="{379DC9C8-5C94-44D6-9503-336B1B919862}"/>
+                  </a:ext>
+                </a:extLst>
+              </p14:cNvPr>
+              <p14:cNvContentPartPr/>
+              <p14:nvPr/>
+            </p14:nvContentPartPr>
+            <p14:xfrm>
+              <a:off x="6682579" y="2110653"/>
+              <a:ext cx="360" cy="360"/>
+            </p14:xfrm>
+          </p:contentPart>
+        </mc:Choice>
+        <mc:Fallback>
+          <p:pic>
+            <p:nvPicPr>
+              <p:cNvPr id="45" name="Ink 44">
+                <a:extLst>
+                  <a:ext uri="{FF2B5EF4-FFF2-40B4-BE49-F238E27FC236}">
+                    <a16:creationId xmlns:a16="http://schemas.microsoft.com/office/drawing/2014/main" id="{379DC9C8-5C94-44D6-9503-336B1B919862}"/>
+                  </a:ext>
+                </a:extLst>
+              </p:cNvPr>
+              <p:cNvPicPr/>
+              <p:nvPr/>
+            </p:nvPicPr>
+            <p:blipFill>
+              <a:blip r:embed="rId10"/>
+              <a:stretch>
+                <a:fillRect/>
+              </a:stretch>
+            </p:blipFill>
+            <p:spPr>
+              <a:xfrm>
+                <a:off x="6628579" y="2002653"/>
+                <a:ext cx="108000" cy="216000"/>
               </a:xfrm>
               <a:prstGeom prst="rect">
                 <a:avLst/>
@@ -11042,7 +13020,7 @@
 </p:sld>
 </file>
 
-<file path=ppt/slides/slide17.xml><?xml version="1.0" encoding="utf-8"?>
+<file path=ppt/slides/slide18.xml><?xml version="1.0" encoding="utf-8"?>
 <p:sld xmlns:a="http://schemas.openxmlformats.org/drawingml/2006/main" xmlns:r="http://schemas.openxmlformats.org/officeDocument/2006/relationships" xmlns:p="http://schemas.openxmlformats.org/presentationml/2006/main">
   <p:cSld>
     <p:spTree>
@@ -11081,10 +13059,15 @@
             <p:ph type="title"/>
           </p:nvPr>
         </p:nvSpPr>
-        <p:spPr/>
+        <p:spPr>
+          <a:xfrm>
+            <a:off x="981844" y="116632"/>
+            <a:ext cx="10360501" cy="733896"/>
+          </a:xfrm>
+        </p:spPr>
         <p:txBody>
           <a:bodyPr>
-            <a:normAutofit/>
+            <a:normAutofit fontScale="90000"/>
           </a:bodyPr>
           <a:lstStyle/>
           <a:p>
@@ -11123,13 +13106,13 @@
         </p:nvSpPr>
         <p:spPr>
           <a:xfrm>
-            <a:off x="1218883" y="1701797"/>
-            <a:ext cx="10360501" cy="4391499"/>
+            <a:off x="914161" y="620688"/>
+            <a:ext cx="10724867" cy="6624736"/>
           </a:xfrm>
         </p:spPr>
         <p:txBody>
           <a:bodyPr>
-            <a:normAutofit fontScale="70000" lnSpcReduction="20000"/>
+            <a:normAutofit fontScale="25000" lnSpcReduction="20000"/>
           </a:bodyPr>
           <a:lstStyle/>
           <a:p>
@@ -11140,15 +13123,15 @@
               <a:buNone/>
             </a:pPr>
             <a:r>
-              <a:rPr lang="en-US" sz="1400" dirty="0"/>
+              <a:rPr lang="en-US" sz="4400" dirty="0"/>
               <a:t>[1] L. Beckwith, D. T. Nguyen, and K. Gaj, “High-Performance Hardware Implementation of CRYSTALS-</a:t>
             </a:r>
             <a:r>
-              <a:rPr lang="en-US" sz="1400" dirty="0" err="1"/>
+              <a:rPr lang="en-US" sz="4400" dirty="0" err="1"/>
               <a:t>Dilithium</a:t>
             </a:r>
             <a:r>
-              <a:rPr lang="en-US" sz="1400" dirty="0"/>
+              <a:rPr lang="en-US" sz="4400" dirty="0"/>
               <a:t>,” International Conference on Field-Programmable Technology, 2021.</a:t>
             </a:r>
           </a:p>
@@ -11157,15 +13140,15 @@
               <a:buNone/>
             </a:pPr>
             <a:r>
-              <a:rPr lang="en-US" sz="1400" dirty="0"/>
+              <a:rPr lang="en-US" sz="4400" dirty="0"/>
               <a:t>[2] C. Zhao, N. Zhang, H. Wang, B. Yang, W. Zhu, Z. Li, M. Zhu, S. Yin, S. Wei, and L. Liu, “A Compact and High-Performance Hardware Architecture for CRYSTALS-</a:t>
             </a:r>
             <a:r>
-              <a:rPr lang="en-US" sz="1400" dirty="0" err="1"/>
+              <a:rPr lang="en-US" sz="4400" dirty="0" err="1"/>
               <a:t>Dilithium</a:t>
             </a:r>
             <a:r>
-              <a:rPr lang="en-US" sz="1400" dirty="0"/>
+              <a:rPr lang="en-US" sz="4400" dirty="0"/>
               <a:t>,” IACR Transactions on Cryptographic Hardware and Embedded Systems, vol. 2022, no. 1, pp. 270–295, 2022.</a:t>
             </a:r>
           </a:p>
@@ -11174,15 +13157,15 @@
               <a:buNone/>
             </a:pPr>
             <a:r>
-              <a:rPr lang="en-US" sz="1400" dirty="0"/>
+              <a:rPr lang="en-US" sz="4400" dirty="0"/>
               <a:t>[3] G. Mao, D. Chen, G. Li, W. Dai, A. I. Sanka, C. K. Koc, and R. C. C. Cheung, “High-performance and Configurable SW/HW Co-design of Post-quantum Signature CRYSTALS-</a:t>
             </a:r>
             <a:r>
-              <a:rPr lang="en-US" sz="1400" dirty="0" err="1"/>
+              <a:rPr lang="en-US" sz="4400" dirty="0" err="1"/>
               <a:t>Dilithium</a:t>
             </a:r>
             <a:r>
-              <a:rPr lang="en-US" sz="1400" dirty="0"/>
+              <a:rPr lang="en-US" sz="4400" dirty="0"/>
               <a:t>,” ACM Transactions on Reconfigurable Technology and Systems, vol. 16, no. 3, Article 44, 2023.</a:t>
             </a:r>
           </a:p>
@@ -11191,15 +13174,15 @@
               <a:buNone/>
             </a:pPr>
             <a:r>
-              <a:rPr lang="en-US" sz="1400" dirty="0"/>
+              <a:rPr lang="en-US" sz="4400" dirty="0"/>
               <a:t>[4] T. Wang, C. Zhang, X. Zhang, D. Gu, and P. Cao, “Optimized Hardware-Software Co-Design for Kyber and </a:t>
             </a:r>
             <a:r>
-              <a:rPr lang="en-US" sz="1400" dirty="0" err="1"/>
+              <a:rPr lang="en-US" sz="4400" dirty="0" err="1"/>
               <a:t>Dilithium</a:t>
             </a:r>
             <a:r>
-              <a:rPr lang="en-US" sz="1400" dirty="0"/>
+              <a:rPr lang="en-US" sz="4400" dirty="0"/>
               <a:t> on RISC-V SoC FPGA,” IACR Transactions on Cryptographic Hardware and Embedded Systems, vol. 2024, no. 3, pp. 99–135, 2024.</a:t>
             </a:r>
           </a:p>
@@ -11208,23 +13191,23 @@
               <a:buNone/>
             </a:pPr>
             <a:r>
-              <a:rPr lang="en-US" sz="1400" dirty="0"/>
+              <a:rPr lang="en-US" sz="4400" dirty="0"/>
               <a:t>[5] Q. </a:t>
             </a:r>
             <a:r>
-              <a:rPr lang="en-US" sz="1400" dirty="0" err="1"/>
+              <a:rPr lang="en-US" sz="4400" dirty="0" err="1"/>
               <a:t>Norga</a:t>
             </a:r>
             <a:r>
-              <a:rPr lang="en-US" sz="1400" dirty="0"/>
+              <a:rPr lang="en-US" sz="4400" dirty="0"/>
               <a:t>, S. Kundu, and I. </a:t>
             </a:r>
             <a:r>
-              <a:rPr lang="en-US" sz="1400" dirty="0" err="1"/>
+              <a:rPr lang="en-US" sz="4400" dirty="0" err="1"/>
               <a:t>Verbauwhede</a:t>
             </a:r>
             <a:r>
-              <a:rPr lang="en-US" sz="1400" dirty="0"/>
+              <a:rPr lang="en-US" sz="4400" dirty="0"/>
               <a:t>, “ML-DSA-OSH: An Efficient, Open-Source Hardware Implementation of ML-DSA,” full version, 2025.</a:t>
             </a:r>
           </a:p>
@@ -11233,15 +13216,15 @@
               <a:buNone/>
             </a:pPr>
             <a:r>
-              <a:rPr lang="en-US" sz="1400" dirty="0"/>
+              <a:rPr lang="en-US" sz="4400" dirty="0"/>
               <a:t>[6] Y. Cui, J. Zhong, B. Wang, T. Xu, C. Wang, and W. Liu, “High-Performance Hardware Implementation of CRYSTALS-</a:t>
             </a:r>
             <a:r>
-              <a:rPr lang="en-US" sz="1400" dirty="0" err="1"/>
+              <a:rPr lang="en-US" sz="4400" dirty="0" err="1"/>
               <a:t>Dilithium</a:t>
             </a:r>
             <a:r>
-              <a:rPr lang="en-US" sz="1400" dirty="0"/>
+              <a:rPr lang="en-US" sz="4400" dirty="0"/>
               <a:t> Based on Improved MDC-NTT,” IEEE Transactions on Computers, vol. 74, no. 9, pp. 2896–2908, September 2025.</a:t>
             </a:r>
           </a:p>
@@ -11250,15 +13233,15 @@
               <a:buNone/>
             </a:pPr>
             <a:r>
-              <a:rPr lang="en-US" sz="1400" dirty="0"/>
+              <a:rPr lang="en-US" sz="4400" dirty="0"/>
               <a:t>[7] H. Nguyen and T. T. Nguyen, “Area-Time Efficient Hardware Design for CRYSTALS-</a:t>
             </a:r>
             <a:r>
-              <a:rPr lang="en-US" sz="1400" dirty="0" err="1"/>
+              <a:rPr lang="en-US" sz="4400" dirty="0" err="1"/>
               <a:t>Dilithium</a:t>
             </a:r>
             <a:r>
-              <a:rPr lang="en-US" sz="1400" dirty="0"/>
+              <a:rPr lang="en-US" sz="4400" dirty="0"/>
               <a:t>,” IEEE International Midwest Symposium on Circuits and Systems, 2025.</a:t>
             </a:r>
           </a:p>
@@ -11267,23 +13250,23 @@
               <a:buNone/>
             </a:pPr>
             <a:r>
-              <a:rPr lang="en-US" sz="1400" dirty="0"/>
+              <a:rPr lang="en-US" sz="4400" dirty="0"/>
               <a:t>[8] S. Chowdhury, N. Mishra, S. Bhattacharya, and D. Mukhopadhyay, “Unified FPGA Design of Kyber and </a:t>
             </a:r>
             <a:r>
-              <a:rPr lang="en-US" sz="1400" dirty="0" err="1"/>
+              <a:rPr lang="en-US" sz="4400" dirty="0" err="1"/>
               <a:t>Dilithium</a:t>
             </a:r>
             <a:r>
-              <a:rPr lang="en-US" sz="1400" dirty="0"/>
+              <a:rPr lang="en-US" sz="4400" dirty="0"/>
               <a:t> with Provable Fault Tolerance,” IACR Cryptology </a:t>
             </a:r>
             <a:r>
-              <a:rPr lang="en-US" sz="1400" dirty="0" err="1"/>
+              <a:rPr lang="en-US" sz="4400" dirty="0" err="1"/>
               <a:t>ePrint</a:t>
             </a:r>
             <a:r>
-              <a:rPr lang="en-US" sz="1400" dirty="0"/>
+              <a:rPr lang="en-US" sz="4400" dirty="0"/>
               <a:t> Archive, Paper 2026/1008, 2026.</a:t>
             </a:r>
           </a:p>
@@ -11292,23 +13275,23 @@
               <a:buNone/>
             </a:pPr>
             <a:r>
-              <a:rPr lang="en-US" sz="1400" dirty="0"/>
+              <a:rPr lang="en-US" sz="4400" dirty="0"/>
               <a:t>[9] Z. Ni, A. Khalid, Z. Zhang, Y. Cui, W. Liu, and M. O’Neill, “</a:t>
             </a:r>
             <a:r>
-              <a:rPr lang="en-US" sz="1400" dirty="0" err="1"/>
+              <a:rPr lang="en-US" sz="4400" dirty="0" err="1"/>
               <a:t>LightHD</a:t>
             </a:r>
             <a:r>
-              <a:rPr lang="en-US" sz="1400" dirty="0"/>
+              <a:rPr lang="en-US" sz="4400" dirty="0"/>
               <a:t>: A Lightweight and High-Performance Hardware Accelerator of CRYSTALS-</a:t>
             </a:r>
             <a:r>
-              <a:rPr lang="en-US" sz="1400" dirty="0" err="1"/>
+              <a:rPr lang="en-US" sz="4400" dirty="0" err="1"/>
               <a:t>Dilithium</a:t>
             </a:r>
             <a:r>
-              <a:rPr lang="en-US" sz="1400" dirty="0"/>
+              <a:rPr lang="en-US" sz="4400" dirty="0"/>
               <a:t>,” IEEE Transactions on Computers, vol. 75, no. 5, pp. 2007–2019, May 2026.</a:t>
             </a:r>
           </a:p>
@@ -11317,9 +13300,123 @@
               <a:buNone/>
             </a:pPr>
             <a:r>
-              <a:rPr lang="en-US" sz="1400" dirty="0"/>
+              <a:rPr lang="en-US" sz="4400" dirty="0"/>
               <a:t>[10] P. Sun, Q. Wang, and M. Ikeda, “PALS: A High-Speed ML-DSA Hardware Accelerator with Enhanced Pipeline on FPGA,” IEEE International Conference on Integrated Circuits, Technologies and Applications, 2025.</a:t>
             </a:r>
+          </a:p>
+          <a:p>
+            <a:pPr marL="0" indent="0">
+              <a:buNone/>
+            </a:pPr>
+            <a:r>
+              <a:rPr lang="en-US" sz="4400" dirty="0"/>
+              <a:t>[11] A. A. Abdulsamad and S. R. Repas, “Design of an Energy-Efficient SHA-3 Accelerator on Artix-7 FPGA for Secure Network Applications,” </a:t>
+            </a:r>
+            <a:r>
+              <a:rPr lang="en-US" sz="4400" i="1" dirty="0"/>
+              <a:t>Computers</a:t>
+            </a:r>
+            <a:r>
+              <a:rPr lang="en-US" sz="4400" dirty="0"/>
+              <a:t>, vol. 15, no. 1, article 3, 2026.</a:t>
+            </a:r>
+          </a:p>
+          <a:p>
+            <a:pPr marL="0" indent="0">
+              <a:buNone/>
+            </a:pPr>
+            <a:r>
+              <a:rPr lang="en-US" sz="4400" dirty="0"/>
+              <a:t>[12] Y. Tu and J. Xie, “EMINEM: Efficient FPGA Implementation of Mixed-</a:t>
+            </a:r>
+            <a:r>
+              <a:rPr lang="en-US" sz="4400" dirty="0" err="1"/>
+              <a:t>RadIx</a:t>
+            </a:r>
+            <a:r>
+              <a:rPr lang="en-US" sz="4400" dirty="0"/>
+              <a:t> NTT Hardware </a:t>
+            </a:r>
+            <a:r>
+              <a:rPr lang="en-US" sz="4400" dirty="0" err="1"/>
+              <a:t>AccElerators</a:t>
+            </a:r>
+            <a:r>
+              <a:rPr lang="en-US" sz="4400" dirty="0"/>
+              <a:t> for NIST Post-</a:t>
+            </a:r>
+            <a:r>
+              <a:rPr lang="en-US" sz="4400" dirty="0" err="1"/>
+              <a:t>QuantuM</a:t>
+            </a:r>
+            <a:r>
+              <a:rPr lang="en-US" sz="4400" dirty="0"/>
+              <a:t> Cryptography Falcon, </a:t>
+            </a:r>
+            <a:r>
+              <a:rPr lang="en-US" sz="4400" dirty="0" err="1"/>
+              <a:t>Dilithium</a:t>
+            </a:r>
+            <a:r>
+              <a:rPr lang="en-US" sz="4400" dirty="0"/>
+              <a:t>, and HAWK,” </a:t>
+            </a:r>
+            <a:r>
+              <a:rPr lang="en-US" sz="4400" i="1" dirty="0"/>
+              <a:t>ACM Transactions on Reconfigurable Technology and Systems</a:t>
+            </a:r>
+            <a:r>
+              <a:rPr lang="en-US" sz="4400" dirty="0"/>
+              <a:t>, vol. 18, no. 4, article 52, 2025.</a:t>
+            </a:r>
+          </a:p>
+          <a:p>
+            <a:pPr marL="0" indent="0">
+              <a:buNone/>
+            </a:pPr>
+            <a:r>
+              <a:rPr lang="en-US" sz="4400" dirty="0"/>
+              <a:t>[13] D. E. S. Kundi, J. M. Bermudo Mera, P.-Y. Strub, and M. Hutter, “High-Performance NTT Hardware Accelerator to Support ML-KEM and ML-DSA,” </a:t>
+            </a:r>
+            <a:r>
+              <a:rPr lang="en-US" sz="4400" i="1" dirty="0"/>
+              <a:t>Workshop on Attacks and Solutions in Hardware Security</a:t>
+            </a:r>
+            <a:r>
+              <a:rPr lang="en-US" sz="4400" dirty="0"/>
+              <a:t>, pp. 100–105, 2024.</a:t>
+            </a:r>
+          </a:p>
+          <a:p>
+            <a:pPr marL="0" indent="0">
+              <a:buNone/>
+            </a:pPr>
+            <a:r>
+              <a:rPr lang="en-US" sz="4400" dirty="0"/>
+              <a:t>[14] H. S. Ogawa, T. B. Paiva, M. A. Simplicio Jr., S. M. Hafiz, and B. Yildiz, “Efficient Conflict-Free NTT Hardware Architecture with Single-Port RAMs: Applications to ML-DSA,” </a:t>
+            </a:r>
+            <a:r>
+              <a:rPr lang="en-US" sz="4400" i="1" dirty="0"/>
+              <a:t>IACR Cryptology </a:t>
+            </a:r>
+            <a:r>
+              <a:rPr lang="en-US" sz="4400" i="1" dirty="0" err="1"/>
+              <a:t>ePrint</a:t>
+            </a:r>
+            <a:r>
+              <a:rPr lang="en-US" sz="4400" i="1" dirty="0"/>
+              <a:t> Archive</a:t>
+            </a:r>
+            <a:r>
+              <a:rPr lang="en-US" sz="4400" dirty="0"/>
+              <a:t>, Paper 2026/621, 2026.</a:t>
+            </a:r>
+          </a:p>
+          <a:p>
+            <a:pPr marL="0" indent="0">
+              <a:buNone/>
+            </a:pPr>
+            <a:endParaRPr lang="en-US" sz="1400" dirty="0"/>
           </a:p>
           <a:p>
             <a:pPr marL="0" indent="0">
@@ -11480,6 +13577,35 @@
           </a:p>
         </p:txBody>
       </p:sp>
+      <p:sp>
+        <p:nvSpPr>
+          <p:cNvPr id="2" name="Slide Number Placeholder 1">
+            <a:extLst>
+              <a:ext uri="{FF2B5EF4-FFF2-40B4-BE49-F238E27FC236}">
+                <a16:creationId xmlns:a16="http://schemas.microsoft.com/office/drawing/2014/main" id="{E9FFC40D-B062-39DF-2A98-27DEBC23A1D1}"/>
+              </a:ext>
+            </a:extLst>
+          </p:cNvPr>
+          <p:cNvSpPr>
+            <a:spLocks noGrp="1"/>
+          </p:cNvSpPr>
+          <p:nvPr>
+            <p:ph type="sldNum" sz="quarter" idx="12"/>
+          </p:nvPr>
+        </p:nvSpPr>
+        <p:spPr/>
+        <p:txBody>
+          <a:bodyPr/>
+          <a:lstStyle/>
+          <a:p>
+            <a:fld id="{C014DD1E-5D91-48A3-AD6D-45FBA980D106}" type="slidenum">
+              <a:rPr lang="en-PK" smtClean="0"/>
+              <a:t>18</a:t>
+            </a:fld>
+            <a:endParaRPr lang="en-PK"/>
+          </a:p>
+        </p:txBody>
+      </p:sp>
     </p:spTree>
     <p:extLst>
       <p:ext uri="{BB962C8B-B14F-4D97-AF65-F5344CB8AC3E}">
@@ -11505,7 +13631,7 @@
 </p:sld>
 </file>
 
-<file path=ppt/slides/slide18.xml><?xml version="1.0" encoding="utf-8"?>
+<file path=ppt/slides/slide19.xml><?xml version="1.0" encoding="utf-8"?>
 <p:sld xmlns:a="http://schemas.openxmlformats.org/drawingml/2006/main" xmlns:r="http://schemas.openxmlformats.org/officeDocument/2006/relationships" xmlns:p="http://schemas.openxmlformats.org/presentationml/2006/main">
   <p:cSld>
     <p:spTree>
@@ -11581,6 +13707,35 @@
                 </a:schemeClr>
               </a:solidFill>
             </a:endParaRPr>
+          </a:p>
+        </p:txBody>
+      </p:sp>
+      <p:sp>
+        <p:nvSpPr>
+          <p:cNvPr id="3" name="Slide Number Placeholder 2">
+            <a:extLst>
+              <a:ext uri="{FF2B5EF4-FFF2-40B4-BE49-F238E27FC236}">
+                <a16:creationId xmlns:a16="http://schemas.microsoft.com/office/drawing/2014/main" id="{BE36EA67-A737-8BC2-C6CA-1694C2F6036C}"/>
+              </a:ext>
+            </a:extLst>
+          </p:cNvPr>
+          <p:cNvSpPr>
+            <a:spLocks noGrp="1"/>
+          </p:cNvSpPr>
+          <p:nvPr>
+            <p:ph type="sldNum" sz="quarter" idx="12"/>
+          </p:nvPr>
+        </p:nvSpPr>
+        <p:spPr/>
+        <p:txBody>
+          <a:bodyPr/>
+          <a:lstStyle/>
+          <a:p>
+            <a:fld id="{C014DD1E-5D91-48A3-AD6D-45FBA980D106}" type="slidenum">
+              <a:rPr lang="en-PK" smtClean="0"/>
+              <a:t>19</a:t>
+            </a:fld>
+            <a:endParaRPr lang="en-PK"/>
           </a:p>
         </p:txBody>
       </p:sp>
@@ -11670,52 +13825,69 @@
             <p:ph idx="1"/>
           </p:nvPr>
         </p:nvSpPr>
+        <p:spPr>
+          <a:xfrm>
+            <a:off x="1218883" y="2056104"/>
+            <a:ext cx="10360501" cy="4462272"/>
+          </a:xfrm>
+        </p:spPr>
+        <p:txBody>
+          <a:bodyPr>
+            <a:normAutofit/>
+          </a:bodyPr>
+          <a:lstStyle/>
+          <a:p>
+            <a:r>
+              <a:rPr lang="en-US" sz="2400" dirty="0"/>
+              <a:t>Data security demands are rapidly increasing.</a:t>
+            </a:r>
+          </a:p>
+          <a:p>
+            <a:r>
+              <a:rPr lang="en-US" sz="2400" dirty="0"/>
+              <a:t>Quantum computers threaten current cryptographic algorithms.</a:t>
+            </a:r>
+          </a:p>
+          <a:p>
+            <a:r>
+              <a:rPr lang="en-US" sz="2400" dirty="0"/>
+              <a:t>Sensitive data can be harvested today and decrypted later.</a:t>
+            </a:r>
+          </a:p>
+          <a:p>
+            <a:r>
+              <a:rPr lang="en-US" sz="2400" dirty="0"/>
+              <a:t>Post-quantum cryptography is designed to provide long-term security against quantum attacks.</a:t>
+            </a:r>
+          </a:p>
+        </p:txBody>
+      </p:sp>
+      <p:sp>
+        <p:nvSpPr>
+          <p:cNvPr id="2" name="Slide Number Placeholder 1">
+            <a:extLst>
+              <a:ext uri="{FF2B5EF4-FFF2-40B4-BE49-F238E27FC236}">
+                <a16:creationId xmlns:a16="http://schemas.microsoft.com/office/drawing/2014/main" id="{A23B01A6-6AF1-CAD6-289F-DAF50C721791}"/>
+              </a:ext>
+            </a:extLst>
+          </p:cNvPr>
+          <p:cNvSpPr>
+            <a:spLocks noGrp="1"/>
+          </p:cNvSpPr>
+          <p:nvPr>
+            <p:ph type="sldNum" sz="quarter" idx="12"/>
+          </p:nvPr>
+        </p:nvSpPr>
         <p:spPr/>
         <p:txBody>
           <a:bodyPr/>
           <a:lstStyle/>
           <a:p>
-            <a:r>
-              <a:rPr lang="en-US" sz="2400" dirty="0"/>
-              <a:t>With the increase of data, the need for data security is also increasing.</a:t>
-            </a:r>
-          </a:p>
-          <a:p>
-            <a:r>
-              <a:rPr lang="en-US" sz="2400" dirty="0"/>
-              <a:t>In order to protect our data, cryptographic algorithms are used.</a:t>
-            </a:r>
-          </a:p>
-          <a:p>
-            <a:r>
-              <a:rPr lang="en-US" sz="2400" dirty="0"/>
-              <a:t>Although these algorithms are too hard to solve for classical computers, quantum computers are able to solve them.</a:t>
-            </a:r>
-          </a:p>
-          <a:p>
-            <a:r>
-              <a:rPr lang="en-US" sz="2400" dirty="0"/>
-              <a:t>Since quantum computers are not yet standardized, this creates a threat called </a:t>
-            </a:r>
-            <a:r>
-              <a:rPr lang="en-US" sz="2400" b="1" dirty="0"/>
-              <a:t>“Harvest Now, Decrypt Later.”</a:t>
-            </a:r>
-            <a:endParaRPr lang="en-US" sz="2400" dirty="0"/>
-          </a:p>
-          <a:p>
-            <a:r>
-              <a:rPr lang="en-US" sz="2400" dirty="0"/>
-              <a:t>In order to combat this issue, </a:t>
-            </a:r>
-            <a:r>
-              <a:rPr lang="en-US" sz="2400" b="1" dirty="0"/>
-              <a:t>post-quantum algorithms</a:t>
-            </a:r>
-            <a:r>
-              <a:rPr lang="en-US" sz="2400" dirty="0"/>
-              <a:t> exist.</a:t>
-            </a:r>
+            <a:fld id="{C014DD1E-5D91-48A3-AD6D-45FBA980D106}" type="slidenum">
+              <a:rPr lang="en-PK" smtClean="0"/>
+              <a:t>2</a:t>
+            </a:fld>
+            <a:endParaRPr lang="en-PK"/>
           </a:p>
         </p:txBody>
       </p:sp>
@@ -11827,7 +13999,7 @@
         </p:nvSpPr>
         <p:spPr>
           <a:xfrm>
-            <a:off x="1068889" y="1412776"/>
+            <a:off x="1068502" y="1201692"/>
             <a:ext cx="4242124" cy="4582922"/>
           </a:xfrm>
         </p:spPr>
@@ -11843,7 +14015,7 @@
             </a:pPr>
             <a:r>
               <a:rPr lang="pt-BR" sz="2400" dirty="0"/>
-              <a:t>Dilithium is a post-quantum digital signature algorithm.</a:t>
+              <a:t>Dilithium is a module lattice based post-quantum digital signature algorithm.</a:t>
             </a:r>
           </a:p>
           <a:p>
@@ -11862,7 +14034,7 @@
               <a:buChar char="•"/>
             </a:pPr>
             <a:r>
-              <a:rPr lang="en-US" sz="2400" dirty="0"/>
+              <a:rPr lang="en-US" dirty="0"/>
               <a:t>Authentication – Verifies who sent the message.</a:t>
             </a:r>
           </a:p>
@@ -11872,7 +14044,7 @@
               <a:buChar char="•"/>
             </a:pPr>
             <a:r>
-              <a:rPr lang="en-US" sz="2400" dirty="0"/>
+              <a:rPr lang="en-US" dirty="0"/>
               <a:t>Integrity – Ensures the message was not changed.</a:t>
             </a:r>
           </a:p>
@@ -11882,12 +14054,54 @@
               <a:buChar char="•"/>
             </a:pPr>
             <a:r>
+              <a:rPr lang="en-US" dirty="0"/>
+              <a:t>Non-repudiation – Sender cannot deny sending the message.</a:t>
+            </a:r>
+          </a:p>
+          <a:p>
+            <a:pPr marL="342900" indent="-342900">
+              <a:buFont typeface="Arial" panose="020B0604020202020204" pitchFamily="34" charset="0"/>
+              <a:buChar char="•"/>
+            </a:pPr>
+            <a:r>
+              <a:rPr lang="en-US" sz="2400" dirty="0" err="1"/>
+              <a:t>Dilithium</a:t>
+            </a:r>
+            <a:r>
               <a:rPr lang="en-US" sz="2400" dirty="0"/>
-              <a:t>Non-repudiation – Sender cannot deny sending the message.</a:t>
-            </a:r>
-          </a:p>
-          <a:p>
-            <a:endParaRPr lang="en-PK" sz="2400" dirty="0"/>
+              <a:t> Operations</a:t>
+            </a:r>
+          </a:p>
+          <a:p>
+            <a:pPr marL="952393" lvl="1" indent="-342900">
+              <a:buFont typeface="Arial" panose="020B0604020202020204" pitchFamily="34" charset="0"/>
+              <a:buChar char="•"/>
+            </a:pPr>
+            <a:r>
+              <a:rPr lang="en-US" sz="2000" dirty="0"/>
+              <a:t>Key generation</a:t>
+            </a:r>
+          </a:p>
+          <a:p>
+            <a:pPr marL="952393" lvl="1" indent="-342900">
+              <a:buFont typeface="Arial" panose="020B0604020202020204" pitchFamily="34" charset="0"/>
+              <a:buChar char="•"/>
+            </a:pPr>
+            <a:r>
+              <a:rPr lang="en-US" sz="2000" dirty="0"/>
+              <a:t>Message signing</a:t>
+            </a:r>
+          </a:p>
+          <a:p>
+            <a:pPr marL="952393" lvl="1" indent="-342900">
+              <a:buFont typeface="Arial" panose="020B0604020202020204" pitchFamily="34" charset="0"/>
+              <a:buChar char="•"/>
+            </a:pPr>
+            <a:r>
+              <a:rPr lang="en-US" sz="2000" dirty="0"/>
+              <a:t>Verification</a:t>
+            </a:r>
+            <a:endParaRPr lang="en-PK" sz="2000" dirty="0"/>
           </a:p>
         </p:txBody>
       </p:sp>
@@ -11938,6 +14152,35 @@
           </a:extLst>
         </p:spPr>
       </p:pic>
+      <p:sp>
+        <p:nvSpPr>
+          <p:cNvPr id="4" name="Slide Number Placeholder 3">
+            <a:extLst>
+              <a:ext uri="{FF2B5EF4-FFF2-40B4-BE49-F238E27FC236}">
+                <a16:creationId xmlns:a16="http://schemas.microsoft.com/office/drawing/2014/main" id="{B879E8B3-E1A8-BF23-946B-A33602CE346D}"/>
+              </a:ext>
+            </a:extLst>
+          </p:cNvPr>
+          <p:cNvSpPr>
+            <a:spLocks noGrp="1"/>
+          </p:cNvSpPr>
+          <p:nvPr>
+            <p:ph type="sldNum" sz="quarter" idx="12"/>
+          </p:nvPr>
+        </p:nvSpPr>
+        <p:spPr/>
+        <p:txBody>
+          <a:bodyPr/>
+          <a:lstStyle/>
+          <a:p>
+            <a:fld id="{C014DD1E-5D91-48A3-AD6D-45FBA980D106}" type="slidenum">
+              <a:rPr lang="en-PK" smtClean="0"/>
+              <a:t>3</a:t>
+            </a:fld>
+            <a:endParaRPr lang="en-PK"/>
+          </a:p>
+        </p:txBody>
+      </p:sp>
     </p:spTree>
     <p:extLst>
       <p:ext uri="{BB962C8B-B14F-4D97-AF65-F5344CB8AC3E}">
@@ -11964,149 +14207,6 @@
 </file>
 
 <file path=ppt/slides/slide4.xml><?xml version="1.0" encoding="utf-8"?>
-<p:sld xmlns:a="http://schemas.openxmlformats.org/drawingml/2006/main" xmlns:r="http://schemas.openxmlformats.org/officeDocument/2006/relationships" xmlns:p="http://schemas.openxmlformats.org/presentationml/2006/main">
-  <p:cSld>
-    <p:spTree>
-      <p:nvGrpSpPr>
-        <p:cNvPr id="1" name="">
-          <a:extLst>
-            <a:ext uri="{FF2B5EF4-FFF2-40B4-BE49-F238E27FC236}">
-              <a16:creationId xmlns:a16="http://schemas.microsoft.com/office/drawing/2014/main" id="{6A8CC239-9215-EAD3-052C-784A231AAF5C}"/>
-            </a:ext>
-          </a:extLst>
-        </p:cNvPr>
-        <p:cNvGrpSpPr/>
-        <p:nvPr/>
-      </p:nvGrpSpPr>
-      <p:grpSpPr>
-        <a:xfrm>
-          <a:off x="0" y="0"/>
-          <a:ext cx="0" cy="0"/>
-          <a:chOff x="0" y="0"/>
-          <a:chExt cx="0" cy="0"/>
-        </a:xfrm>
-      </p:grpSpPr>
-      <p:sp>
-        <p:nvSpPr>
-          <p:cNvPr id="13" name="Title 12">
-            <a:extLst>
-              <a:ext uri="{FF2B5EF4-FFF2-40B4-BE49-F238E27FC236}">
-                <a16:creationId xmlns:a16="http://schemas.microsoft.com/office/drawing/2014/main" id="{791D3130-42F6-BBCA-A0D7-14166A27FFB8}"/>
-              </a:ext>
-            </a:extLst>
-          </p:cNvPr>
-          <p:cNvSpPr>
-            <a:spLocks noGrp="1"/>
-          </p:cNvSpPr>
-          <p:nvPr>
-            <p:ph type="title"/>
-          </p:nvPr>
-        </p:nvSpPr>
-        <p:spPr>
-          <a:xfrm>
-            <a:off x="1037099" y="-243235"/>
-            <a:ext cx="10360501" cy="1223963"/>
-          </a:xfrm>
-        </p:spPr>
-        <p:txBody>
-          <a:bodyPr>
-            <a:normAutofit/>
-          </a:bodyPr>
-          <a:lstStyle/>
-          <a:p>
-            <a:br>
-              <a:rPr lang="en-US" dirty="0"/>
-            </a:br>
-            <a:r>
-              <a:rPr lang="en-US" dirty="0">
-                <a:solidFill>
-                  <a:schemeClr val="accent1">
-                    <a:lumMod val="20000"/>
-                    <a:lumOff val="80000"/>
-                  </a:schemeClr>
-                </a:solidFill>
-              </a:rPr>
-              <a:t>Hardware</a:t>
-            </a:r>
-            <a:r>
-              <a:rPr lang="en-US" dirty="0"/>
-              <a:t> </a:t>
-            </a:r>
-            <a:r>
-              <a:rPr lang="en-US" dirty="0">
-                <a:solidFill>
-                  <a:schemeClr val="accent1">
-                    <a:lumMod val="20000"/>
-                    <a:lumOff val="80000"/>
-                  </a:schemeClr>
-                </a:solidFill>
-              </a:rPr>
-              <a:t>Literature Review</a:t>
-            </a:r>
-          </a:p>
-        </p:txBody>
-      </p:sp>
-      <p:pic>
-        <p:nvPicPr>
-          <p:cNvPr id="12" name="Content Placeholder 11">
-            <a:extLst>
-              <a:ext uri="{FF2B5EF4-FFF2-40B4-BE49-F238E27FC236}">
-                <a16:creationId xmlns:a16="http://schemas.microsoft.com/office/drawing/2014/main" id="{44425CB1-6FCC-F41F-FF8A-71B54215CE90}"/>
-              </a:ext>
-            </a:extLst>
-          </p:cNvPr>
-          <p:cNvPicPr>
-            <a:picLocks noGrp="1" noChangeAspect="1"/>
-          </p:cNvPicPr>
-          <p:nvPr>
-            <p:ph idx="1"/>
-          </p:nvPr>
-        </p:nvPicPr>
-        <p:blipFill>
-          <a:blip r:embed="rId2">
-            <a:extLst>
-              <a:ext uri="{28A0092B-C50C-407E-A947-70E740481C1C}">
-                <a14:useLocalDpi xmlns:a14="http://schemas.microsoft.com/office/drawing/2010/main" val="0"/>
-              </a:ext>
-            </a:extLst>
-          </a:blip>
-          <a:stretch>
-            <a:fillRect/>
-          </a:stretch>
-        </p:blipFill>
-        <p:spPr>
-          <a:xfrm>
-            <a:off x="837829" y="980728"/>
-            <a:ext cx="10912918" cy="5675975"/>
-          </a:xfrm>
-        </p:spPr>
-      </p:pic>
-    </p:spTree>
-    <p:extLst>
-      <p:ext uri="{BB962C8B-B14F-4D97-AF65-F5344CB8AC3E}">
-        <p14:creationId xmlns:p14="http://schemas.microsoft.com/office/powerpoint/2010/main" val="1257635814"/>
-      </p:ext>
-    </p:extLst>
-  </p:cSld>
-  <p:clrMapOvr>
-    <a:masterClrMapping/>
-  </p:clrMapOvr>
-  <mc:AlternateContent xmlns:mc="http://schemas.openxmlformats.org/markup-compatibility/2006" xmlns:p14="http://schemas.microsoft.com/office/powerpoint/2010/main">
-    <mc:Choice Requires="p14">
-      <p:transition spd="med" p14:dur="700">
-        <p:fade/>
-      </p:transition>
-    </mc:Choice>
-    <mc:Fallback xmlns="">
-      <p:transition spd="med">
-        <p:fade/>
-      </p:transition>
-    </mc:Fallback>
-  </mc:AlternateContent>
-</p:sld>
-</file>
-
-<file path=ppt/slides/slide5.xml><?xml version="1.0" encoding="utf-8"?>
 <p:sld xmlns:a="http://schemas.openxmlformats.org/drawingml/2006/main" xmlns:r="http://schemas.openxmlformats.org/officeDocument/2006/relationships" xmlns:p="http://schemas.openxmlformats.org/presentationml/2006/main">
   <p:cSld>
     <p:spTree>
@@ -12535,10 +14635,211 @@
           </a:p>
         </p:txBody>
       </p:sp>
+      <p:sp>
+        <p:nvSpPr>
+          <p:cNvPr id="6" name="Slide Number Placeholder 5">
+            <a:extLst>
+              <a:ext uri="{FF2B5EF4-FFF2-40B4-BE49-F238E27FC236}">
+                <a16:creationId xmlns:a16="http://schemas.microsoft.com/office/drawing/2014/main" id="{8F537C7E-9EE5-571A-7A11-A8323A76ACFA}"/>
+              </a:ext>
+            </a:extLst>
+          </p:cNvPr>
+          <p:cNvSpPr>
+            <a:spLocks noGrp="1"/>
+          </p:cNvSpPr>
+          <p:nvPr>
+            <p:ph type="sldNum" sz="quarter" idx="12"/>
+          </p:nvPr>
+        </p:nvSpPr>
+        <p:spPr/>
+        <p:txBody>
+          <a:bodyPr/>
+          <a:lstStyle/>
+          <a:p>
+            <a:fld id="{C014DD1E-5D91-48A3-AD6D-45FBA980D106}" type="slidenum">
+              <a:rPr lang="en-PK" smtClean="0"/>
+              <a:t>4</a:t>
+            </a:fld>
+            <a:endParaRPr lang="en-PK"/>
+          </a:p>
+        </p:txBody>
+      </p:sp>
     </p:spTree>
     <p:extLst>
       <p:ext uri="{BB962C8B-B14F-4D97-AF65-F5344CB8AC3E}">
         <p14:creationId xmlns:p14="http://schemas.microsoft.com/office/powerpoint/2010/main" val="880728110"/>
+      </p:ext>
+    </p:extLst>
+  </p:cSld>
+  <p:clrMapOvr>
+    <a:masterClrMapping/>
+  </p:clrMapOvr>
+  <mc:AlternateContent xmlns:mc="http://schemas.openxmlformats.org/markup-compatibility/2006" xmlns:p14="http://schemas.microsoft.com/office/powerpoint/2010/main">
+    <mc:Choice Requires="p14">
+      <p:transition spd="med" p14:dur="700">
+        <p:fade/>
+      </p:transition>
+    </mc:Choice>
+    <mc:Fallback xmlns="">
+      <p:transition spd="med">
+        <p:fade/>
+      </p:transition>
+    </mc:Fallback>
+  </mc:AlternateContent>
+</p:sld>
+</file>
+
+<file path=ppt/slides/slide5.xml><?xml version="1.0" encoding="utf-8"?>
+<p:sld xmlns:a="http://schemas.openxmlformats.org/drawingml/2006/main" xmlns:r="http://schemas.openxmlformats.org/officeDocument/2006/relationships" xmlns:p="http://schemas.openxmlformats.org/presentationml/2006/main">
+  <p:cSld>
+    <p:spTree>
+      <p:nvGrpSpPr>
+        <p:cNvPr id="1" name="">
+          <a:extLst>
+            <a:ext uri="{FF2B5EF4-FFF2-40B4-BE49-F238E27FC236}">
+              <a16:creationId xmlns:a16="http://schemas.microsoft.com/office/drawing/2014/main" id="{6A8CC239-9215-EAD3-052C-784A231AAF5C}"/>
+            </a:ext>
+          </a:extLst>
+        </p:cNvPr>
+        <p:cNvGrpSpPr/>
+        <p:nvPr/>
+      </p:nvGrpSpPr>
+      <p:grpSpPr>
+        <a:xfrm>
+          <a:off x="0" y="0"/>
+          <a:ext cx="0" cy="0"/>
+          <a:chOff x="0" y="0"/>
+          <a:chExt cx="0" cy="0"/>
+        </a:xfrm>
+      </p:grpSpPr>
+      <p:sp>
+        <p:nvSpPr>
+          <p:cNvPr id="13" name="Title 12">
+            <a:extLst>
+              <a:ext uri="{FF2B5EF4-FFF2-40B4-BE49-F238E27FC236}">
+                <a16:creationId xmlns:a16="http://schemas.microsoft.com/office/drawing/2014/main" id="{791D3130-42F6-BBCA-A0D7-14166A27FFB8}"/>
+              </a:ext>
+            </a:extLst>
+          </p:cNvPr>
+          <p:cNvSpPr>
+            <a:spLocks noGrp="1"/>
+          </p:cNvSpPr>
+          <p:nvPr>
+            <p:ph type="title"/>
+          </p:nvPr>
+        </p:nvSpPr>
+        <p:spPr>
+          <a:xfrm>
+            <a:off x="1037099" y="-243235"/>
+            <a:ext cx="10360501" cy="1223963"/>
+          </a:xfrm>
+        </p:spPr>
+        <p:txBody>
+          <a:bodyPr>
+            <a:normAutofit/>
+          </a:bodyPr>
+          <a:lstStyle/>
+          <a:p>
+            <a:br>
+              <a:rPr lang="en-US" dirty="0"/>
+            </a:br>
+            <a:r>
+              <a:rPr lang="en-US" dirty="0">
+                <a:solidFill>
+                  <a:schemeClr val="accent1">
+                    <a:lumMod val="20000"/>
+                    <a:lumOff val="80000"/>
+                  </a:schemeClr>
+                </a:solidFill>
+              </a:rPr>
+              <a:t>Hardware</a:t>
+            </a:r>
+            <a:r>
+              <a:rPr lang="en-US" dirty="0"/>
+              <a:t> </a:t>
+            </a:r>
+            <a:r>
+              <a:rPr lang="en-US" dirty="0">
+                <a:solidFill>
+                  <a:schemeClr val="accent1">
+                    <a:lumMod val="20000"/>
+                    <a:lumOff val="80000"/>
+                  </a:schemeClr>
+                </a:solidFill>
+              </a:rPr>
+              <a:t>Literature Review</a:t>
+            </a:r>
+          </a:p>
+        </p:txBody>
+      </p:sp>
+      <p:pic>
+        <p:nvPicPr>
+          <p:cNvPr id="12" name="Content Placeholder 11">
+            <a:extLst>
+              <a:ext uri="{FF2B5EF4-FFF2-40B4-BE49-F238E27FC236}">
+                <a16:creationId xmlns:a16="http://schemas.microsoft.com/office/drawing/2014/main" id="{44425CB1-6FCC-F41F-FF8A-71B54215CE90}"/>
+              </a:ext>
+            </a:extLst>
+          </p:cNvPr>
+          <p:cNvPicPr>
+            <a:picLocks noGrp="1" noChangeAspect="1"/>
+          </p:cNvPicPr>
+          <p:nvPr>
+            <p:ph idx="1"/>
+          </p:nvPr>
+        </p:nvPicPr>
+        <p:blipFill>
+          <a:blip r:embed="rId2">
+            <a:extLst>
+              <a:ext uri="{28A0092B-C50C-407E-A947-70E740481C1C}">
+                <a14:useLocalDpi xmlns:a14="http://schemas.microsoft.com/office/drawing/2010/main" val="0"/>
+              </a:ext>
+            </a:extLst>
+          </a:blip>
+          <a:stretch>
+            <a:fillRect/>
+          </a:stretch>
+        </p:blipFill>
+        <p:spPr>
+          <a:xfrm>
+            <a:off x="837829" y="980728"/>
+            <a:ext cx="10912918" cy="5675975"/>
+          </a:xfrm>
+        </p:spPr>
+      </p:pic>
+      <p:sp>
+        <p:nvSpPr>
+          <p:cNvPr id="2" name="Slide Number Placeholder 1">
+            <a:extLst>
+              <a:ext uri="{FF2B5EF4-FFF2-40B4-BE49-F238E27FC236}">
+                <a16:creationId xmlns:a16="http://schemas.microsoft.com/office/drawing/2014/main" id="{AADE7A21-40F9-2498-50CD-B7EEC3AF6477}"/>
+              </a:ext>
+            </a:extLst>
+          </p:cNvPr>
+          <p:cNvSpPr>
+            <a:spLocks noGrp="1"/>
+          </p:cNvSpPr>
+          <p:nvPr>
+            <p:ph type="sldNum" sz="quarter" idx="12"/>
+          </p:nvPr>
+        </p:nvSpPr>
+        <p:spPr/>
+        <p:txBody>
+          <a:bodyPr/>
+          <a:lstStyle/>
+          <a:p>
+            <a:fld id="{C014DD1E-5D91-48A3-AD6D-45FBA980D106}" type="slidenum">
+              <a:rPr lang="en-PK" smtClean="0"/>
+              <a:t>5</a:t>
+            </a:fld>
+            <a:endParaRPr lang="en-PK"/>
+          </a:p>
+        </p:txBody>
+      </p:sp>
+    </p:spTree>
+    <p:extLst>
+      <p:ext uri="{BB962C8B-B14F-4D97-AF65-F5344CB8AC3E}">
+        <p14:creationId xmlns:p14="http://schemas.microsoft.com/office/powerpoint/2010/main" val="1257635814"/>
       </p:ext>
     </p:extLst>
   </p:cSld>
@@ -12568,7 +14869,7 @@
         <p:cNvPr id="1" name="">
           <a:extLst>
             <a:ext uri="{FF2B5EF4-FFF2-40B4-BE49-F238E27FC236}">
-              <a16:creationId xmlns:a16="http://schemas.microsoft.com/office/drawing/2014/main" id="{E557BF68-23D5-1E25-4402-747CB0B44269}"/>
+              <a16:creationId xmlns:a16="http://schemas.microsoft.com/office/drawing/2014/main" id="{CE64CE65-591D-83EF-AA73-2F7A1A015223}"/>
             </a:ext>
           </a:extLst>
         </p:cNvPr>
@@ -12588,7 +14889,7 @@
           <p:cNvPr id="13" name="Title 12">
             <a:extLst>
               <a:ext uri="{FF2B5EF4-FFF2-40B4-BE49-F238E27FC236}">
-                <a16:creationId xmlns:a16="http://schemas.microsoft.com/office/drawing/2014/main" id="{3630D81F-DD27-D0DC-A5BB-2B3A0AFADB28}"/>
+                <a16:creationId xmlns:a16="http://schemas.microsoft.com/office/drawing/2014/main" id="{C54B9519-FF52-43FF-A5EE-031D98642428}"/>
               </a:ext>
             </a:extLst>
           </p:cNvPr>
@@ -12599,7 +14900,12 @@
             <p:ph type="title"/>
           </p:nvPr>
         </p:nvSpPr>
-        <p:spPr/>
+        <p:spPr>
+          <a:xfrm>
+            <a:off x="4568602" y="-459432"/>
+            <a:ext cx="3888432" cy="1384179"/>
+          </a:xfrm>
+        </p:spPr>
         <p:txBody>
           <a:bodyPr>
             <a:normAutofit/>
@@ -12625,10 +14931,10 @@
       </p:sp>
       <p:sp>
         <p:nvSpPr>
-          <p:cNvPr id="14" name="Content Placeholder 13">
+          <p:cNvPr id="2" name="Slide Number Placeholder 1">
             <a:extLst>
               <a:ext uri="{FF2B5EF4-FFF2-40B4-BE49-F238E27FC236}">
-                <a16:creationId xmlns:a16="http://schemas.microsoft.com/office/drawing/2014/main" id="{95BA662F-8CDE-A7A0-F05D-50BAE0F37D2E}"/>
+                <a16:creationId xmlns:a16="http://schemas.microsoft.com/office/drawing/2014/main" id="{AC4201B2-D738-D383-AB45-DA98D5811C71}"/>
               </a:ext>
             </a:extLst>
           </p:cNvPr>
@@ -12636,57 +14942,61 @@
             <a:spLocks noGrp="1"/>
           </p:cNvSpPr>
           <p:nvPr>
-            <p:ph idx="1"/>
+            <p:ph type="sldNum" sz="quarter" idx="12"/>
           </p:nvPr>
         </p:nvSpPr>
         <p:spPr/>
         <p:txBody>
-          <a:bodyPr>
-            <a:normAutofit/>
-          </a:bodyPr>
+          <a:bodyPr/>
           <a:lstStyle/>
           <a:p>
-            <a:r>
-              <a:rPr lang="en-US" sz="2100" dirty="0"/>
-              <a:t>Algorithm Analysis: Study reference C implementation to identify computational bottlenecks.</a:t>
-            </a:r>
-          </a:p>
-          <a:p>
-            <a:r>
-              <a:rPr lang="en-US" sz="2100" dirty="0"/>
-              <a:t>Architectural Decomposition: Break down key modules into dedicated hardware blocks</a:t>
-            </a:r>
-          </a:p>
-          <a:p>
-            <a:r>
-              <a:rPr lang="en-US" sz="2100" dirty="0"/>
-              <a:t>RTL Design &amp; Integration: Implement modules in Verilog and integrate into full hardware design.</a:t>
-            </a:r>
-          </a:p>
-          <a:p>
-            <a:r>
-              <a:rPr lang="en-US" sz="2100" dirty="0"/>
-              <a:t>Functional Verification: Testbench-driven simulation to ensure correctness.</a:t>
-            </a:r>
-          </a:p>
-          <a:p>
-            <a:r>
-              <a:rPr lang="en-US" sz="2100" dirty="0"/>
-              <a:t>Performance Evaluation: Use FPGA synthesis tools to measure Latency , Resource utilization and Power consumption</a:t>
-            </a:r>
-          </a:p>
-          <a:p>
-            <a:r>
-              <a:rPr lang="en-US" sz="2100" dirty="0"/>
-              <a:t>Research Hypothesis: Hardware acceleration significantly improves Dilithium performance compared to software on embedded processors.</a:t>
-            </a:r>
+            <a:fld id="{C014DD1E-5D91-48A3-AD6D-45FBA980D106}" type="slidenum">
+              <a:rPr lang="en-PK" smtClean="0"/>
+              <a:t>6</a:t>
+            </a:fld>
+            <a:endParaRPr lang="en-PK"/>
           </a:p>
         </p:txBody>
       </p:sp>
+      <p:pic>
+        <p:nvPicPr>
+          <p:cNvPr id="8" name="Content Placeholder 7">
+            <a:extLst>
+              <a:ext uri="{FF2B5EF4-FFF2-40B4-BE49-F238E27FC236}">
+                <a16:creationId xmlns:a16="http://schemas.microsoft.com/office/drawing/2014/main" id="{92963706-B5D1-D529-20EC-63E389D9BC68}"/>
+              </a:ext>
+            </a:extLst>
+          </p:cNvPr>
+          <p:cNvPicPr>
+            <a:picLocks noGrp="1" noChangeAspect="1"/>
+          </p:cNvPicPr>
+          <p:nvPr>
+            <p:ph idx="1"/>
+          </p:nvPr>
+        </p:nvPicPr>
+        <p:blipFill>
+          <a:blip r:embed="rId2">
+            <a:extLst>
+              <a:ext uri="{28A0092B-C50C-407E-A947-70E740481C1C}">
+                <a14:useLocalDpi xmlns:a14="http://schemas.microsoft.com/office/drawing/2010/main" val="0"/>
+              </a:ext>
+            </a:extLst>
+          </a:blip>
+          <a:stretch>
+            <a:fillRect/>
+          </a:stretch>
+        </p:blipFill>
+        <p:spPr>
+          <a:xfrm>
+            <a:off x="860190" y="811824"/>
+            <a:ext cx="11305256" cy="5909653"/>
+          </a:xfrm>
+        </p:spPr>
+      </p:pic>
     </p:spTree>
     <p:extLst>
       <p:ext uri="{BB962C8B-B14F-4D97-AF65-F5344CB8AC3E}">
-        <p14:creationId xmlns:p14="http://schemas.microsoft.com/office/powerpoint/2010/main" val="1136242434"/>
+        <p14:creationId xmlns:p14="http://schemas.microsoft.com/office/powerpoint/2010/main" val="3983449789"/>
       </p:ext>
     </p:extLst>
   </p:cSld>
@@ -12709,130 +15019,6 @@
 </file>
 
 <file path=ppt/slides/slide7.xml><?xml version="1.0" encoding="utf-8"?>
-<p:sld xmlns:a="http://schemas.openxmlformats.org/drawingml/2006/main" xmlns:r="http://schemas.openxmlformats.org/officeDocument/2006/relationships" xmlns:p="http://schemas.openxmlformats.org/presentationml/2006/main">
-  <p:cSld>
-    <p:spTree>
-      <p:nvGrpSpPr>
-        <p:cNvPr id="1" name="">
-          <a:extLst>
-            <a:ext uri="{FF2B5EF4-FFF2-40B4-BE49-F238E27FC236}">
-              <a16:creationId xmlns:a16="http://schemas.microsoft.com/office/drawing/2014/main" id="{8BAD64AA-267F-366E-BA3E-D523651A7365}"/>
-            </a:ext>
-          </a:extLst>
-        </p:cNvPr>
-        <p:cNvGrpSpPr/>
-        <p:nvPr/>
-      </p:nvGrpSpPr>
-      <p:grpSpPr>
-        <a:xfrm>
-          <a:off x="0" y="0"/>
-          <a:ext cx="0" cy="0"/>
-          <a:chOff x="0" y="0"/>
-          <a:chExt cx="0" cy="0"/>
-        </a:xfrm>
-      </p:grpSpPr>
-      <p:sp>
-        <p:nvSpPr>
-          <p:cNvPr id="2" name="Title 1">
-            <a:extLst>
-              <a:ext uri="{FF2B5EF4-FFF2-40B4-BE49-F238E27FC236}">
-                <a16:creationId xmlns:a16="http://schemas.microsoft.com/office/drawing/2014/main" id="{57301E34-D618-69B6-B223-5505847693FB}"/>
-              </a:ext>
-            </a:extLst>
-          </p:cNvPr>
-          <p:cNvSpPr>
-            <a:spLocks noGrp="1"/>
-          </p:cNvSpPr>
-          <p:nvPr>
-            <p:ph type="ctrTitle"/>
-          </p:nvPr>
-        </p:nvSpPr>
-        <p:spPr>
-          <a:xfrm>
-            <a:off x="1053852" y="0"/>
-            <a:ext cx="8735325" cy="756568"/>
-          </a:xfrm>
-        </p:spPr>
-        <p:txBody>
-          <a:bodyPr>
-            <a:normAutofit/>
-          </a:bodyPr>
-          <a:lstStyle/>
-          <a:p>
-            <a:pPr algn="ctr"/>
-            <a:r>
-              <a:rPr lang="en-US" sz="3600" dirty="0">
-                <a:solidFill>
-                  <a:schemeClr val="accent1"/>
-                </a:solidFill>
-              </a:rPr>
-              <a:t>Methodology</a:t>
-            </a:r>
-            <a:endParaRPr lang="en-PK" sz="3600" dirty="0">
-              <a:solidFill>
-                <a:schemeClr val="accent1"/>
-              </a:solidFill>
-            </a:endParaRPr>
-          </a:p>
-        </p:txBody>
-      </p:sp>
-      <p:pic>
-        <p:nvPicPr>
-          <p:cNvPr id="3" name="f2" descr="Figure 2&#10;Methodology of the thesis: analysis of the reference model, per-module RTL design and verification, followed by evaluation and benchmarking.">
-            <a:extLst>
-              <a:ext uri="{FF2B5EF4-FFF2-40B4-BE49-F238E27FC236}">
-                <a16:creationId xmlns:a16="http://schemas.microsoft.com/office/drawing/2014/main" id="{DCB4C506-2446-923E-A36A-E008C41841C3}"/>
-              </a:ext>
-            </a:extLst>
-          </p:cNvPr>
-          <p:cNvPicPr>
-            <a:picLocks noChangeAspect="1"/>
-          </p:cNvPicPr>
-          <p:nvPr/>
-        </p:nvPicPr>
-        <p:blipFill>
-          <a:blip r:embed="rId2"/>
-          <a:stretch>
-            <a:fillRect/>
-          </a:stretch>
-        </p:blipFill>
-        <p:spPr bwMode="auto">
-          <a:xfrm>
-            <a:off x="2133972" y="756568"/>
-            <a:ext cx="6984777" cy="5826969"/>
-          </a:xfrm>
-          <a:prstGeom prst="rect">
-            <a:avLst/>
-          </a:prstGeom>
-          <a:noFill/>
-        </p:spPr>
-      </p:pic>
-    </p:spTree>
-    <p:extLst>
-      <p:ext uri="{BB962C8B-B14F-4D97-AF65-F5344CB8AC3E}">
-        <p14:creationId xmlns:p14="http://schemas.microsoft.com/office/powerpoint/2010/main" val="2037370226"/>
-      </p:ext>
-    </p:extLst>
-  </p:cSld>
-  <p:clrMapOvr>
-    <a:masterClrMapping/>
-  </p:clrMapOvr>
-  <mc:AlternateContent xmlns:mc="http://schemas.openxmlformats.org/markup-compatibility/2006" xmlns:p14="http://schemas.microsoft.com/office/powerpoint/2010/main">
-    <mc:Choice Requires="p14">
-      <p:transition spd="med" p14:dur="700">
-        <p:fade/>
-      </p:transition>
-    </mc:Choice>
-    <mc:Fallback xmlns="">
-      <p:transition spd="med">
-        <p:fade/>
-      </p:transition>
-    </mc:Fallback>
-  </mc:AlternateContent>
-</p:sld>
-</file>
-
-<file path=ppt/slides/slide8.xml><?xml version="1.0" encoding="utf-8"?>
 <p:sld xmlns:a="http://schemas.openxmlformats.org/drawingml/2006/main" xmlns:r="http://schemas.openxmlformats.org/officeDocument/2006/relationships" xmlns:p="http://schemas.openxmlformats.org/presentationml/2006/main">
   <p:cSld>
     <p:spTree>
@@ -12976,8 +15162,37 @@
             </a:r>
             <a:r>
               <a:rPr lang="en-US" sz="1200" dirty="0"/>
-              <a:t> High-Level Architecture. Reproduced from [10]</a:t>
-            </a:r>
+              <a:t> High-Level Architecture. Courtesy- PALS 2025 [10]</a:t>
+            </a:r>
+          </a:p>
+        </p:txBody>
+      </p:sp>
+      <p:sp>
+        <p:nvSpPr>
+          <p:cNvPr id="3" name="Slide Number Placeholder 2">
+            <a:extLst>
+              <a:ext uri="{FF2B5EF4-FFF2-40B4-BE49-F238E27FC236}">
+                <a16:creationId xmlns:a16="http://schemas.microsoft.com/office/drawing/2014/main" id="{C35ACD99-5AD9-DAA2-50F7-862D8DD85098}"/>
+              </a:ext>
+            </a:extLst>
+          </p:cNvPr>
+          <p:cNvSpPr>
+            <a:spLocks noGrp="1"/>
+          </p:cNvSpPr>
+          <p:nvPr>
+            <p:ph type="sldNum" sz="quarter" idx="12"/>
+          </p:nvPr>
+        </p:nvSpPr>
+        <p:spPr/>
+        <p:txBody>
+          <a:bodyPr/>
+          <a:lstStyle/>
+          <a:p>
+            <a:fld id="{C014DD1E-5D91-48A3-AD6D-45FBA980D106}" type="slidenum">
+              <a:rPr lang="en-PK" smtClean="0"/>
+              <a:t>7</a:t>
+            </a:fld>
+            <a:endParaRPr lang="en-PK" dirty="0"/>
           </a:p>
         </p:txBody>
       </p:sp>
@@ -13006,7 +15221,7 @@
 </p:sld>
 </file>
 
-<file path=ppt/slides/slide9.xml><?xml version="1.0" encoding="utf-8"?>
+<file path=ppt/slides/slide8.xml><?xml version="1.0" encoding="utf-8"?>
 <p:sld xmlns:a="http://schemas.openxmlformats.org/drawingml/2006/main" xmlns:r="http://schemas.openxmlformats.org/officeDocument/2006/relationships" xmlns:p="http://schemas.openxmlformats.org/presentationml/2006/main">
   <p:cSld>
     <p:spTree>
@@ -13112,7 +15327,7 @@
           <a:p>
             <a:r>
               <a:rPr lang="en-US" sz="2100" dirty="0"/>
-              <a:t>Keccak engine (SHAKE-128/256)				</a:t>
+              <a:t>Keccak engine (SHAKE-128/256) (Hashing)				</a:t>
             </a:r>
           </a:p>
           <a:p>
@@ -13880,10 +16095,356 @@
           </p:pic>
         </mc:Fallback>
       </mc:AlternateContent>
+      <p:sp>
+        <p:nvSpPr>
+          <p:cNvPr id="2" name="Slide Number Placeholder 1">
+            <a:extLst>
+              <a:ext uri="{FF2B5EF4-FFF2-40B4-BE49-F238E27FC236}">
+                <a16:creationId xmlns:a16="http://schemas.microsoft.com/office/drawing/2014/main" id="{9F4F4F9C-4E14-3E01-A748-FD087ECF321B}"/>
+              </a:ext>
+            </a:extLst>
+          </p:cNvPr>
+          <p:cNvSpPr>
+            <a:spLocks noGrp="1"/>
+          </p:cNvSpPr>
+          <p:nvPr>
+            <p:ph type="sldNum" sz="quarter" idx="12"/>
+          </p:nvPr>
+        </p:nvSpPr>
+        <p:spPr/>
+        <p:txBody>
+          <a:bodyPr/>
+          <a:lstStyle/>
+          <a:p>
+            <a:fld id="{C014DD1E-5D91-48A3-AD6D-45FBA980D106}" type="slidenum">
+              <a:rPr lang="en-PK" smtClean="0"/>
+              <a:t>8</a:t>
+            </a:fld>
+            <a:endParaRPr lang="en-PK"/>
+          </a:p>
+        </p:txBody>
+      </p:sp>
+      <mc:AlternateContent xmlns:mc="http://schemas.openxmlformats.org/markup-compatibility/2006">
+        <mc:Choice xmlns:p14="http://schemas.microsoft.com/office/powerpoint/2010/main" Requires="p14">
+          <p:contentPart p14:bwMode="auto" r:id="rId26">
+            <p14:nvContentPartPr>
+              <p14:cNvPr id="3" name="Ink 2">
+                <a:extLst>
+                  <a:ext uri="{FF2B5EF4-FFF2-40B4-BE49-F238E27FC236}">
+                    <a16:creationId xmlns:a16="http://schemas.microsoft.com/office/drawing/2014/main" id="{DA786A42-E447-7803-49D6-8FC4CE23559A}"/>
+                  </a:ext>
+                </a:extLst>
+              </p14:cNvPr>
+              <p14:cNvContentPartPr/>
+              <p14:nvPr/>
+            </p14:nvContentPartPr>
+            <p14:xfrm>
+              <a:off x="5289379" y="1810507"/>
+              <a:ext cx="914400" cy="86760"/>
+            </p14:xfrm>
+          </p:contentPart>
+        </mc:Choice>
+        <mc:Fallback>
+          <p:pic>
+            <p:nvPicPr>
+              <p:cNvPr id="3" name="Ink 2">
+                <a:extLst>
+                  <a:ext uri="{FF2B5EF4-FFF2-40B4-BE49-F238E27FC236}">
+                    <a16:creationId xmlns:a16="http://schemas.microsoft.com/office/drawing/2014/main" id="{DA786A42-E447-7803-49D6-8FC4CE23559A}"/>
+                  </a:ext>
+                </a:extLst>
+              </p:cNvPr>
+              <p:cNvPicPr/>
+              <p:nvPr/>
+            </p:nvPicPr>
+            <p:blipFill>
+              <a:blip r:embed="rId27"/>
+              <a:stretch>
+                <a:fillRect/>
+              </a:stretch>
+            </p:blipFill>
+            <p:spPr>
+              <a:xfrm>
+                <a:off x="5235739" y="1702867"/>
+                <a:ext cx="1022040" cy="302400"/>
+              </a:xfrm>
+              <a:prstGeom prst="rect">
+                <a:avLst/>
+              </a:prstGeom>
+            </p:spPr>
+          </p:pic>
+        </mc:Fallback>
+      </mc:AlternateContent>
     </p:spTree>
     <p:extLst>
       <p:ext uri="{BB962C8B-B14F-4D97-AF65-F5344CB8AC3E}">
         <p14:creationId xmlns:p14="http://schemas.microsoft.com/office/powerpoint/2010/main" val="4231224507"/>
+      </p:ext>
+    </p:extLst>
+  </p:cSld>
+  <p:clrMapOvr>
+    <a:masterClrMapping/>
+  </p:clrMapOvr>
+  <mc:AlternateContent xmlns:mc="http://schemas.openxmlformats.org/markup-compatibility/2006" xmlns:p14="http://schemas.microsoft.com/office/powerpoint/2010/main">
+    <mc:Choice Requires="p14">
+      <p:transition spd="med" p14:dur="700">
+        <p:fade/>
+      </p:transition>
+    </mc:Choice>
+    <mc:Fallback xmlns="">
+      <p:transition spd="med">
+        <p:fade/>
+      </p:transition>
+    </mc:Fallback>
+  </mc:AlternateContent>
+</p:sld>
+</file>
+
+<file path=ppt/slides/slide9.xml><?xml version="1.0" encoding="utf-8"?>
+<p:sld xmlns:a="http://schemas.openxmlformats.org/drawingml/2006/main" xmlns:r="http://schemas.openxmlformats.org/officeDocument/2006/relationships" xmlns:p="http://schemas.openxmlformats.org/presentationml/2006/main">
+  <p:cSld>
+    <p:spTree>
+      <p:nvGrpSpPr>
+        <p:cNvPr id="1" name="">
+          <a:extLst>
+            <a:ext uri="{FF2B5EF4-FFF2-40B4-BE49-F238E27FC236}">
+              <a16:creationId xmlns:a16="http://schemas.microsoft.com/office/drawing/2014/main" id="{3CA2E923-41D4-14D2-77BC-F70A91B244B7}"/>
+            </a:ext>
+          </a:extLst>
+        </p:cNvPr>
+        <p:cNvGrpSpPr/>
+        <p:nvPr/>
+      </p:nvGrpSpPr>
+      <p:grpSpPr>
+        <a:xfrm>
+          <a:off x="0" y="0"/>
+          <a:ext cx="0" cy="0"/>
+          <a:chOff x="0" y="0"/>
+          <a:chExt cx="0" cy="0"/>
+        </a:xfrm>
+      </p:grpSpPr>
+      <p:sp>
+        <p:nvSpPr>
+          <p:cNvPr id="13" name="Title 12">
+            <a:extLst>
+              <a:ext uri="{FF2B5EF4-FFF2-40B4-BE49-F238E27FC236}">
+                <a16:creationId xmlns:a16="http://schemas.microsoft.com/office/drawing/2014/main" id="{6D7031FA-ADEF-5C30-831D-1BF250DADCB9}"/>
+              </a:ext>
+            </a:extLst>
+          </p:cNvPr>
+          <p:cNvSpPr>
+            <a:spLocks noGrp="1"/>
+          </p:cNvSpPr>
+          <p:nvPr>
+            <p:ph type="title"/>
+          </p:nvPr>
+        </p:nvSpPr>
+        <p:spPr/>
+        <p:txBody>
+          <a:bodyPr>
+            <a:normAutofit/>
+          </a:bodyPr>
+          <a:lstStyle/>
+          <a:p>
+            <a:br>
+              <a:rPr lang="en-US" dirty="0"/>
+            </a:br>
+            <a:r>
+              <a:rPr lang="en-US" dirty="0">
+                <a:solidFill>
+                  <a:schemeClr val="accent1">
+                    <a:lumMod val="20000"/>
+                    <a:lumOff val="80000"/>
+                  </a:schemeClr>
+                </a:solidFill>
+              </a:rPr>
+              <a:t>Keccak Engine – Design </a:t>
+            </a:r>
+          </a:p>
+        </p:txBody>
+      </p:sp>
+      <p:sp>
+        <p:nvSpPr>
+          <p:cNvPr id="14" name="Content Placeholder 13">
+            <a:extLst>
+              <a:ext uri="{FF2B5EF4-FFF2-40B4-BE49-F238E27FC236}">
+                <a16:creationId xmlns:a16="http://schemas.microsoft.com/office/drawing/2014/main" id="{3AA8BD2D-BE62-8A93-9071-D8E84129C24B}"/>
+              </a:ext>
+            </a:extLst>
+          </p:cNvPr>
+          <p:cNvSpPr>
+            <a:spLocks noGrp="1"/>
+          </p:cNvSpPr>
+          <p:nvPr>
+            <p:ph idx="1"/>
+          </p:nvPr>
+        </p:nvSpPr>
+        <p:spPr/>
+        <p:txBody>
+          <a:bodyPr>
+            <a:normAutofit lnSpcReduction="10000"/>
+          </a:bodyPr>
+          <a:lstStyle/>
+          <a:p>
+            <a:r>
+              <a:rPr lang="en-US" sz="2100" dirty="0"/>
+              <a:t>Works on Sponge Construction</a:t>
+            </a:r>
+          </a:p>
+          <a:p>
+            <a:pPr lvl="1"/>
+            <a:r>
+              <a:rPr lang="en-US" sz="1700" dirty="0"/>
+              <a:t>Absorb</a:t>
+            </a:r>
+          </a:p>
+          <a:p>
+            <a:pPr lvl="1"/>
+            <a:r>
+              <a:rPr lang="en-US" sz="1700" dirty="0"/>
+              <a:t>Permute(</a:t>
+            </a:r>
+            <a:r>
+              <a:rPr lang="el-GR" sz="1700" dirty="0"/>
+              <a:t>θ -&gt; ρ -&gt; π -&gt; χ -&gt; ι</a:t>
+            </a:r>
+            <a:r>
+              <a:rPr lang="en-US" sz="1700" dirty="0"/>
+              <a:t>)</a:t>
+            </a:r>
+          </a:p>
+          <a:p>
+            <a:pPr lvl="1"/>
+            <a:r>
+              <a:rPr lang="en-US" sz="1700" dirty="0"/>
+              <a:t>Squeeze</a:t>
+            </a:r>
+          </a:p>
+          <a:p>
+            <a:r>
+              <a:rPr lang="en-US" sz="2100" dirty="0"/>
+              <a:t>24 permutation rounds (24 </a:t>
+            </a:r>
+            <a:r>
+              <a:rPr lang="en-US" sz="2100" dirty="0" err="1"/>
+              <a:t>cyc</a:t>
+            </a:r>
+            <a:r>
+              <a:rPr lang="en-US" sz="2100" dirty="0"/>
+              <a:t>/perm) </a:t>
+            </a:r>
+          </a:p>
+          <a:p>
+            <a:r>
+              <a:rPr lang="en-US" sz="2100" dirty="0"/>
+              <a:t>SHAKE128/SHAKE256  hashing </a:t>
+            </a:r>
+            <a:br>
+              <a:rPr lang="en-US" sz="2100" dirty="0"/>
+            </a:br>
+            <a:r>
+              <a:rPr lang="en-US" sz="2100" dirty="0"/>
+              <a:t>support</a:t>
+            </a:r>
+          </a:p>
+          <a:p>
+            <a:r>
+              <a:rPr lang="en-US" sz="2100" dirty="0"/>
+              <a:t>64-bit bus</a:t>
+            </a:r>
+          </a:p>
+          <a:p>
+            <a:r>
+              <a:rPr lang="en-US" sz="2100" dirty="0"/>
+              <a:t>2-stage pipelined design (48 </a:t>
+            </a:r>
+            <a:r>
+              <a:rPr lang="en-US" sz="2100" dirty="0" err="1"/>
+              <a:t>cyc</a:t>
+            </a:r>
+            <a:r>
+              <a:rPr lang="en-US" sz="2100" dirty="0"/>
+              <a:t>/perm)</a:t>
+            </a:r>
+          </a:p>
+          <a:p>
+            <a:r>
+              <a:rPr lang="en-US" sz="2100" dirty="0"/>
+              <a:t>parameterized parallel lanes</a:t>
+            </a:r>
+          </a:p>
+          <a:p>
+            <a:r>
+              <a:rPr lang="en-US" sz="2100" dirty="0"/>
+              <a:t>4-lane speedup: 3.84x</a:t>
+            </a:r>
+          </a:p>
+        </p:txBody>
+      </p:sp>
+      <p:pic>
+        <p:nvPicPr>
+          <p:cNvPr id="2" name="f4" descr="Figure 4&#10;Module hierarchy of the Keccak engine: a parameterised parallel wrapper over N independent cores, each split into parameter, absorb, step and output units.">
+            <a:extLst>
+              <a:ext uri="{FF2B5EF4-FFF2-40B4-BE49-F238E27FC236}">
+                <a16:creationId xmlns:a16="http://schemas.microsoft.com/office/drawing/2014/main" id="{5DE65C66-46C4-57B8-7A77-0CE320A168AB}"/>
+              </a:ext>
+            </a:extLst>
+          </p:cNvPr>
+          <p:cNvPicPr>
+            <a:picLocks noChangeAspect="1"/>
+          </p:cNvPicPr>
+          <p:nvPr/>
+        </p:nvPicPr>
+        <p:blipFill>
+          <a:blip r:embed="rId2"/>
+          <a:stretch>
+            <a:fillRect/>
+          </a:stretch>
+        </p:blipFill>
+        <p:spPr bwMode="auto">
+          <a:xfrm>
+            <a:off x="5950396" y="1690883"/>
+            <a:ext cx="5839692" cy="3887443"/>
+          </a:xfrm>
+          <a:prstGeom prst="rect">
+            <a:avLst/>
+          </a:prstGeom>
+          <a:noFill/>
+        </p:spPr>
+      </p:pic>
+      <p:sp>
+        <p:nvSpPr>
+          <p:cNvPr id="3" name="Slide Number Placeholder 2">
+            <a:extLst>
+              <a:ext uri="{FF2B5EF4-FFF2-40B4-BE49-F238E27FC236}">
+                <a16:creationId xmlns:a16="http://schemas.microsoft.com/office/drawing/2014/main" id="{F328C310-4614-052F-BBA1-3ECE428676F5}"/>
+              </a:ext>
+            </a:extLst>
+          </p:cNvPr>
+          <p:cNvSpPr>
+            <a:spLocks noGrp="1"/>
+          </p:cNvSpPr>
+          <p:nvPr>
+            <p:ph type="sldNum" sz="quarter" idx="12"/>
+          </p:nvPr>
+        </p:nvSpPr>
+        <p:spPr/>
+        <p:txBody>
+          <a:bodyPr/>
+          <a:lstStyle/>
+          <a:p>
+            <a:fld id="{C014DD1E-5D91-48A3-AD6D-45FBA980D106}" type="slidenum">
+              <a:rPr lang="en-PK" smtClean="0"/>
+              <a:t>9</a:t>
+            </a:fld>
+            <a:endParaRPr lang="en-PK"/>
+          </a:p>
+        </p:txBody>
+      </p:sp>
+    </p:spTree>
+    <p:extLst>
+      <p:ext uri="{BB962C8B-B14F-4D97-AF65-F5344CB8AC3E}">
+        <p14:creationId xmlns:p14="http://schemas.microsoft.com/office/powerpoint/2010/main" val="168890123"/>
       </p:ext>
     </p:extLst>
   </p:cSld>
